--- a/Materials/Slides/slides_w1.pptx
+++ b/Materials/Slides/slides_w1.pptx
@@ -53,8 +53,10 @@
     <p:sldId id="370" r:id="rId41"/>
     <p:sldId id="327" r:id="rId42"/>
     <p:sldId id="375" r:id="rId43"/>
-    <p:sldId id="381" r:id="rId44"/>
-    <p:sldId id="382" r:id="rId45"/>
+    <p:sldId id="383" r:id="rId56"/>
+    <p:sldId id="384" r:id="rId57"/>
+    <p:sldId id="385" r:id="rId58"/>
+    <p:sldId id="386" r:id="rId59"/>
     <p:sldId id="354" r:id="rId46"/>
     <p:sldId id="260" r:id="rId47"/>
   </p:sldIdLst>
@@ -8385,6 +8387,286 @@
 </p:notes>
 </file>
 
+<file path=ppt/notesSlides/notesSlide30.xml><?xml version="1.0" encoding="utf-8"?>
+<p:notes xmlns:a="http://schemas.openxmlformats.org/drawingml/2006/main" xmlns:p="http://schemas.openxmlformats.org/presentationml/2006/main" xmlns:r="http://schemas.openxmlformats.org/officeDocument/2006/relationships">
+  <p:cSld>
+    <p:spTree>
+      <p:nvGrpSpPr>
+        <p:cNvPr id="1" name=""/>
+        <p:cNvGrpSpPr/>
+        <p:nvPr/>
+      </p:nvGrpSpPr>
+      <p:grpSpPr>
+        <a:xfrm>
+          <a:off x="0" y="0"/>
+          <a:ext cx="0" cy="0"/>
+          <a:chOff x="0" y="0"/>
+          <a:chExt cx="0" cy="0"/>
+        </a:xfrm>
+      </p:grpSpPr>
+      <p:sp>
+        <p:nvSpPr>
+          <p:cNvPr id="2" name="Slide Image Placeholder 1"/>
+          <p:cNvSpPr>
+            <a:spLocks noGrp="1"/>
+          </p:cNvSpPr>
+          <p:nvPr>
+            <p:ph type="sldImg" idx="2"/>
+          </p:nvPr>
+        </p:nvSpPr>
+        <p:spPr/>
+      </p:sp>
+      <p:sp>
+        <p:nvSpPr>
+          <p:cNvPr id="3" name="Notes Placeholder 2"/>
+          <p:cNvSpPr>
+            <a:spLocks noGrp="1"/>
+          </p:cNvSpPr>
+          <p:nvPr>
+            <p:ph type="body" idx="3" sz="quarter"/>
+          </p:nvPr>
+        </p:nvSpPr>
+        <p:spPr/>
+        <p:txBody>
+          <a:bodyPr/>
+          <a:lstStyle/>
+          <a:p>
+            <a:r>
+              <a:t>The Descriptive Statistics table from Worksheet 1, Task 4–6, with ppltrst treated as a Scale variable. (1) Valid and Missing: 1,680 answers, 4 refusals or don't knows. (2)–(4) Three measures of the centre: the mode 7, the median 6 and the mean 5.40. The mean is lower than the median because a minority of low answers pulls it down. (5) The standard deviation, 2.3: answers typically lie about 2.3 points from the mean. (6) Minimum and maximum show that the whole 0 to 10 scale was used.</a:t>
+            </a:r>
+          </a:p>
+        </p:txBody>
+      </p:sp>
+      <p:sp>
+        <p:nvSpPr>
+          <p:cNvPr id="4" name="Slide Number Placeholder 3"/>
+          <p:cNvSpPr>
+            <a:spLocks noGrp="1"/>
+          </p:cNvSpPr>
+          <p:nvPr>
+            <p:ph type="sldNum" idx="5" sz="quarter"/>
+          </p:nvPr>
+        </p:nvSpPr>
+        <p:spPr/>
+      </p:sp>
+    </p:spTree>
+  </p:cSld>
+  <p:clrMapOvr>
+    <a:masterClrMapping/>
+  </p:clrMapOvr>
+</p:notes>
+</file>
+
+<file path=ppt/notesSlides/notesSlide31.xml><?xml version="1.0" encoding="utf-8"?>
+<p:notes xmlns:a="http://schemas.openxmlformats.org/drawingml/2006/main" xmlns:p="http://schemas.openxmlformats.org/presentationml/2006/main" xmlns:r="http://schemas.openxmlformats.org/officeDocument/2006/relationships">
+  <p:cSld>
+    <p:spTree>
+      <p:nvGrpSpPr>
+        <p:cNvPr id="1" name=""/>
+        <p:cNvGrpSpPr/>
+        <p:nvPr/>
+      </p:nvGrpSpPr>
+      <p:grpSpPr>
+        <a:xfrm>
+          <a:off x="0" y="0"/>
+          <a:ext cx="0" cy="0"/>
+          <a:chOff x="0" y="0"/>
+          <a:chExt cx="0" cy="0"/>
+        </a:xfrm>
+      </p:grpSpPr>
+      <p:sp>
+        <p:nvSpPr>
+          <p:cNvPr id="2" name="Slide Image Placeholder 1"/>
+          <p:cNvSpPr>
+            <a:spLocks noGrp="1"/>
+          </p:cNvSpPr>
+          <p:nvPr>
+            <p:ph type="sldImg" idx="2"/>
+          </p:nvPr>
+        </p:nvSpPr>
+        <p:spPr/>
+      </p:sp>
+      <p:sp>
+        <p:nvSpPr>
+          <p:cNvPr id="3" name="Notes Placeholder 2"/>
+          <p:cNvSpPr>
+            <a:spLocks noGrp="1"/>
+          </p:cNvSpPr>
+          <p:nvPr>
+            <p:ph type="body" idx="3" sz="quarter"/>
+          </p:nvPr>
+        </p:nvSpPr>
+        <p:spPr/>
+        <p:txBody>
+          <a:bodyPr/>
+          <a:lstStyle/>
+          <a:p>
+            <a:r>
+              <a:t>The frequency table from Worksheet 1, Task 4. (1) Frequency: counts. (2) Percent uses all 1,684 respondents as the base, including the 4 missing answers. (3) Valid Percent uses only the 1,680 valid answers; it is usually the one to report. (4) Cumulative Percent adds up the valid percentages. (5) It passes 50% at 6, which is therefore the median. (6) The Missing row collects refusals (77) and don't knows (88).</a:t>
+            </a:r>
+          </a:p>
+        </p:txBody>
+      </p:sp>
+      <p:sp>
+        <p:nvSpPr>
+          <p:cNvPr id="4" name="Slide Number Placeholder 3"/>
+          <p:cNvSpPr>
+            <a:spLocks noGrp="1"/>
+          </p:cNvSpPr>
+          <p:nvPr>
+            <p:ph type="sldNum" idx="5" sz="quarter"/>
+          </p:nvPr>
+        </p:nvSpPr>
+        <p:spPr/>
+      </p:sp>
+    </p:spTree>
+  </p:cSld>
+  <p:clrMapOvr>
+    <a:masterClrMapping/>
+  </p:clrMapOvr>
+</p:notes>
+</file>
+
+<file path=ppt/notesSlides/notesSlide32.xml><?xml version="1.0" encoding="utf-8"?>
+<p:notes xmlns:a="http://schemas.openxmlformats.org/drawingml/2006/main" xmlns:p="http://schemas.openxmlformats.org/presentationml/2006/main" xmlns:r="http://schemas.openxmlformats.org/officeDocument/2006/relationships">
+  <p:cSld>
+    <p:spTree>
+      <p:nvGrpSpPr>
+        <p:cNvPr id="1" name=""/>
+        <p:cNvGrpSpPr/>
+        <p:nvPr/>
+      </p:nvGrpSpPr>
+      <p:grpSpPr>
+        <a:xfrm>
+          <a:off x="0" y="0"/>
+          <a:ext cx="0" cy="0"/>
+          <a:chOff x="0" y="0"/>
+          <a:chExt cx="0" cy="0"/>
+        </a:xfrm>
+      </p:grpSpPr>
+      <p:sp>
+        <p:nvSpPr>
+          <p:cNvPr id="2" name="Slide Image Placeholder 1"/>
+          <p:cNvSpPr>
+            <a:spLocks noGrp="1"/>
+          </p:cNvSpPr>
+          <p:nvPr>
+            <p:ph type="sldImg" idx="2"/>
+          </p:nvPr>
+        </p:nvSpPr>
+        <p:spPr/>
+      </p:sp>
+      <p:sp>
+        <p:nvSpPr>
+          <p:cNvPr id="3" name="Notes Placeholder 2"/>
+          <p:cNvSpPr>
+            <a:spLocks noGrp="1"/>
+          </p:cNvSpPr>
+          <p:nvPr>
+            <p:ph type="body" idx="3" sz="quarter"/>
+          </p:nvPr>
+        </p:nvSpPr>
+        <p:spPr/>
+        <p:txBody>
+          <a:bodyPr/>
+          <a:lstStyle/>
+          <a:p>
+            <a:r>
+              <a:t>A paragraph that describes one variable in the way the assignment asks for: the question and its scale, the number of valid answers, centre, spread and shape, and a chart.</a:t>
+            </a:r>
+          </a:p>
+        </p:txBody>
+      </p:sp>
+      <p:sp>
+        <p:nvSpPr>
+          <p:cNvPr id="4" name="Slide Number Placeholder 3"/>
+          <p:cNvSpPr>
+            <a:spLocks noGrp="1"/>
+          </p:cNvSpPr>
+          <p:nvPr>
+            <p:ph type="sldNum" idx="5" sz="quarter"/>
+          </p:nvPr>
+        </p:nvSpPr>
+        <p:spPr/>
+      </p:sp>
+    </p:spTree>
+  </p:cSld>
+  <p:clrMapOvr>
+    <a:masterClrMapping/>
+  </p:clrMapOvr>
+</p:notes>
+</file>
+
+<file path=ppt/notesSlides/notesSlide33.xml><?xml version="1.0" encoding="utf-8"?>
+<p:notes xmlns:a="http://schemas.openxmlformats.org/drawingml/2006/main" xmlns:p="http://schemas.openxmlformats.org/presentationml/2006/main" xmlns:r="http://schemas.openxmlformats.org/officeDocument/2006/relationships">
+  <p:cSld>
+    <p:spTree>
+      <p:nvGrpSpPr>
+        <p:cNvPr id="1" name=""/>
+        <p:cNvGrpSpPr/>
+        <p:nvPr/>
+      </p:nvGrpSpPr>
+      <p:grpSpPr>
+        <a:xfrm>
+          <a:off x="0" y="0"/>
+          <a:ext cx="0" cy="0"/>
+          <a:chOff x="0" y="0"/>
+          <a:chExt cx="0" cy="0"/>
+        </a:xfrm>
+      </p:grpSpPr>
+      <p:sp>
+        <p:nvSpPr>
+          <p:cNvPr id="2" name="Slide Image Placeholder 1"/>
+          <p:cNvSpPr>
+            <a:spLocks noGrp="1"/>
+          </p:cNvSpPr>
+          <p:nvPr>
+            <p:ph type="sldImg" idx="2"/>
+          </p:nvPr>
+        </p:nvSpPr>
+        <p:spPr/>
+      </p:sp>
+      <p:sp>
+        <p:nvSpPr>
+          <p:cNvPr id="3" name="Notes Placeholder 2"/>
+          <p:cNvSpPr>
+            <a:spLocks noGrp="1"/>
+          </p:cNvSpPr>
+          <p:nvPr>
+            <p:ph type="body" idx="3" sz="quarter"/>
+          </p:nvPr>
+        </p:nvSpPr>
+        <p:spPr/>
+        <p:txBody>
+          <a:bodyPr/>
+          <a:lstStyle/>
+          <a:p>
+            <a:r>
+              <a:t>The Week 1 Interactive Explorer page (https://cgmoreh.github.io/SOC2069-QUANT-26/Materials/Explorers/explorer_w1.html) has interactive versions of ideas from this lecture. Students can scan the code or follow the link from the course site and try the three tasks on the slide.</a:t>
+            </a:r>
+          </a:p>
+        </p:txBody>
+      </p:sp>
+      <p:sp>
+        <p:nvSpPr>
+          <p:cNvPr id="4" name="Slide Number Placeholder 3"/>
+          <p:cNvSpPr>
+            <a:spLocks noGrp="1"/>
+          </p:cNvSpPr>
+          <p:nvPr>
+            <p:ph type="sldNum" idx="5" sz="quarter"/>
+          </p:nvPr>
+        </p:nvSpPr>
+        <p:spPr/>
+      </p:sp>
+    </p:spTree>
+  </p:cSld>
+  <p:clrMapOvr>
+    <a:masterClrMapping/>
+  </p:clrMapOvr>
+</p:notes>
+</file>
+
 <file path=ppt/notesSlides/notesSlide4.xml><?xml version="1.0" encoding="utf-8"?>
 <p:notes xmlns:a="http://schemas.openxmlformats.org/drawingml/2006/main" xmlns:r="http://schemas.openxmlformats.org/officeDocument/2006/relationships" xmlns:p="http://schemas.openxmlformats.org/presentationml/2006/main">
   <p:cSld>
@@ -31488,7 +31770,7 @@
 </file>
 
 <file path=ppt/slides/slide43.xml><?xml version="1.0" encoding="utf-8"?>
-<p:sld xmlns:a="http://schemas.openxmlformats.org/drawingml/2006/main" xmlns:r="http://schemas.openxmlformats.org/officeDocument/2006/relationships" xmlns:p="http://schemas.openxmlformats.org/presentationml/2006/main">
+<p:sld xmlns:a="http://schemas.openxmlformats.org/drawingml/2006/main" xmlns:p="http://schemas.openxmlformats.org/presentationml/2006/main" xmlns:r="http://schemas.openxmlformats.org/officeDocument/2006/relationships">
   <p:cSld>
     <p:spTree>
       <p:nvGrpSpPr>
@@ -31496,23 +31778,10 @@
         <p:cNvGrpSpPr/>
         <p:nvPr/>
       </p:nvGrpSpPr>
-      <p:grpSpPr>
-        <a:xfrm>
-          <a:off x="0" y="0"/>
-          <a:ext cx="0" cy="0"/>
-          <a:chOff x="0" y="0"/>
-          <a:chExt cx="0" cy="0"/>
-        </a:xfrm>
-      </p:grpSpPr>
-      <p:sp>
-        <p:nvSpPr>
-          <p:cNvPr id="2" name="Title 1">
-            <a:extLst>
-              <a:ext uri="{FF2B5EF4-FFF2-40B4-BE49-F238E27FC236}">
-                <a16:creationId xmlns:a16="http://schemas.microsoft.com/office/drawing/2014/main" id="{E6B2ADEA-3CCA-6128-88BE-363EC542C252}"/>
-              </a:ext>
-            </a:extLst>
-          </p:cNvPr>
+      <p:grpSpPr/>
+      <p:sp>
+        <p:nvSpPr>
+          <p:cNvPr id="2" name="Title 1"/>
           <p:cNvSpPr>
             <a:spLocks noGrp="1"/>
           </p:cNvSpPr>
@@ -31526,18 +31795,17 @@
           <a:lstStyle/>
           <a:p>
             <a:r>
-              <a:rPr lang="en-GB" dirty="0"/>
-              <a:t>Workshop exercise</a:t>
-            </a:r>
-          </a:p>
-        </p:txBody>
-      </p:sp>
-      <p:sp>
-        <p:nvSpPr>
-          <p:cNvPr id="4" name="Footer Placeholder 3">
+              <a:t>Reading the JASP output: descriptive statistics</a:t>
+            </a:r>
+          </a:p>
+        </p:txBody>
+      </p:sp>
+      <p:sp>
+        <p:nvSpPr>
+          <p:cNvPr id="3" name="Footer Placeholder 2">
             <a:extLst>
               <a:ext uri="{FF2B5EF4-FFF2-40B4-BE49-F238E27FC236}">
-                <a16:creationId xmlns:a16="http://schemas.microsoft.com/office/drawing/2014/main" id="{24DF7B36-ABDC-F3FF-15AC-313E0A87514C}"/>
+                <a16:creationId xmlns:a16="http://schemas.microsoft.com/office/drawing/2014/main" id="{D0C8C946-5335-2921-801F-E32EBBDC06AC}"/>
               </a:ext>
             </a:extLst>
           </p:cNvPr>
@@ -31557,16 +31825,15 @@
               <a:rPr lang="en-GB"/>
               <a:t>Measurement and Description</a:t>
             </a:r>
-            <a:endParaRPr lang="en-GB" dirty="0"/>
-          </a:p>
-        </p:txBody>
-      </p:sp>
-      <p:sp>
-        <p:nvSpPr>
-          <p:cNvPr id="5" name="Slide Number Placeholder 4">
+          </a:p>
+        </p:txBody>
+      </p:sp>
+      <p:sp>
+        <p:nvSpPr>
+          <p:cNvPr id="4" name="Slide Number Placeholder 3">
             <a:extLst>
               <a:ext uri="{FF2B5EF4-FFF2-40B4-BE49-F238E27FC236}">
-                <a16:creationId xmlns:a16="http://schemas.microsoft.com/office/drawing/2014/main" id="{340AF7AC-3066-766D-1654-088953E048C1}"/>
+                <a16:creationId xmlns:a16="http://schemas.microsoft.com/office/drawing/2014/main" id="{975A5B92-8D16-E54E-863B-32FBAC4EF875}"/>
               </a:ext>
             </a:extLst>
           </p:cNvPr>
@@ -31584,22 +31851,5447 @@
           <a:p>
             <a:fld id="{9FAA51BB-2FC0-4DB8-B50E-F52D50E733B6}" type="slidenum">
               <a:rPr lang="en-GB" smtClean="0"/>
-              <a:pPr/>
-              <a:t>43</a:t>
+              <a:t>20</a:t>
             </a:fld>
-            <a:endParaRPr lang="en-GB" dirty="0"/>
-          </a:p>
-        </p:txBody>
-      </p:sp>
-      <p:pic>
-        <p:nvPicPr>
-          <p:cNvPr id="7" name="Picture 6">
+            <a:endParaRPr lang="en-GB"/>
+          </a:p>
+        </p:txBody>
+      </p:sp>
+      <p:sp>
+        <p:nvSpPr>
+          <p:cNvPr id="5" name="TextBox 4"/>
+          <p:cNvSpPr txBox="1"/>
+          <p:nvPr/>
+        </p:nvSpPr>
+        <p:spPr>
+          <a:xfrm>
+            <a:off x="758952" y="1325880"/>
+            <a:ext cx="3474720" cy="274320"/>
+          </a:xfrm>
+          <a:prstGeom prst="rect">
+            <a:avLst/>
+          </a:prstGeom>
+          <a:noFill/>
+        </p:spPr>
+        <p:txBody>
+          <a:bodyPr wrap="square" lIns="0" rIns="0" tIns="0" bIns="0" anchor="t">
+            <a:spAutoFit/>
+          </a:bodyPr>
+          <a:lstStyle/>
+          <a:p>
+            <a:pPr algn="l"/>
+            <a:r>
+              <a:rPr sz="1400" b="1" i="0">
+                <a:solidFill>
+                  <a:srgbClr val="222222"/>
+                </a:solidFill>
+              </a:rPr>
+              <a:t>Descriptive Statistics</a:t>
+            </a:r>
+            <a:endParaRPr sz="1400"/>
+          </a:p>
+        </p:txBody>
+      </p:sp>
+      <p:graphicFrame>
+        <p:nvGraphicFramePr>
+          <p:cNvPr id="6" name="Table 5"/>
+          <p:cNvGraphicFramePr>
+            <a:graphicFrameLocks noGrp="1"/>
+          </p:cNvGraphicFramePr>
+          <p:nvPr/>
+        </p:nvGraphicFramePr>
+        <p:xfrm>
+          <a:off x="758952" y="1627632"/>
+          <a:ext cx="3474720" cy="3291840"/>
+        </p:xfrm>
+        <a:graphic>
+          <a:graphicData uri="http://schemas.openxmlformats.org/drawingml/2006/table">
+            <a:tbl>
+              <a:tblPr>
+                <a:tableStyleId>{2D5ABB26-0587-4C30-8999-92F81FD0307C}</a:tableStyleId>
+              </a:tblPr>
+              <a:tblGrid>
+                <a:gridCol w="2194560"/>
+                <a:gridCol w="1280160"/>
+              </a:tblGrid>
+              <a:tr h="365760">
+                <a:tc>
+                  <a:txBody>
+                    <a:bodyPr wrap="square"/>
+                    <a:lstStyle/>
+                    <a:p>
+                      <a:pPr algn="l"/>
+                      <a:r>
+                        <a:rPr sz="1400" b="1" i="0">
+                          <a:solidFill>
+                            <a:srgbClr val="222222"/>
+                          </a:solidFill>
+                        </a:rPr>
+                        <a:t/>
+                      </a:r>
+                      <a:endParaRPr sz="1400"/>
+                    </a:p>
+                  </a:txBody>
+                  <a:tcPr marL="73152" marR="73152" marT="27432" marB="27432" anchor="ctr">
+                    <a:lnL w="0">
+                      <a:noFill/>
+                    </a:lnL>
+                    <a:lnR w="0">
+                      <a:noFill/>
+                    </a:lnR>
+                    <a:lnT w="12700">
+                      <a:solidFill>
+                        <a:srgbClr val="222222"/>
+                      </a:solidFill>
+                    </a:lnT>
+                    <a:lnB w="9525">
+                      <a:solidFill>
+                        <a:srgbClr val="222222"/>
+                      </a:solidFill>
+                    </a:lnB>
+                    <a:noFill/>
+                  </a:tcPr>
+                </a:tc>
+                <a:tc>
+                  <a:txBody>
+                    <a:bodyPr wrap="square"/>
+                    <a:lstStyle/>
+                    <a:p>
+                      <a:pPr algn="r"/>
+                      <a:r>
+                        <a:rPr sz="1400" b="1" i="0">
+                          <a:solidFill>
+                            <a:srgbClr val="222222"/>
+                          </a:solidFill>
+                        </a:rPr>
+                        <a:t>ppltrst</a:t>
+                      </a:r>
+                      <a:endParaRPr sz="1400"/>
+                    </a:p>
+                  </a:txBody>
+                  <a:tcPr marL="73152" marR="73152" marT="27432" marB="27432" anchor="ctr">
+                    <a:lnL w="0">
+                      <a:noFill/>
+                    </a:lnL>
+                    <a:lnR w="0">
+                      <a:noFill/>
+                    </a:lnR>
+                    <a:lnT w="12700">
+                      <a:solidFill>
+                        <a:srgbClr val="222222"/>
+                      </a:solidFill>
+                    </a:lnT>
+                    <a:lnB w="9525">
+                      <a:solidFill>
+                        <a:srgbClr val="222222"/>
+                      </a:solidFill>
+                    </a:lnB>
+                    <a:noFill/>
+                  </a:tcPr>
+                </a:tc>
+              </a:tr>
+              <a:tr h="365760">
+                <a:tc>
+                  <a:txBody>
+                    <a:bodyPr wrap="square"/>
+                    <a:lstStyle/>
+                    <a:p>
+                      <a:pPr algn="l"/>
+                      <a:r>
+                        <a:rPr sz="1400" b="0" i="0">
+                          <a:solidFill>
+                            <a:srgbClr val="222222"/>
+                          </a:solidFill>
+                        </a:rPr>
+                        <a:t>Valid</a:t>
+                      </a:r>
+                      <a:endParaRPr sz="1400"/>
+                    </a:p>
+                  </a:txBody>
+                  <a:tcPr marL="73152" marR="73152" marT="27432" marB="27432" anchor="ctr">
+                    <a:lnL w="0">
+                      <a:noFill/>
+                    </a:lnL>
+                    <a:lnR w="0">
+                      <a:noFill/>
+                    </a:lnR>
+                    <a:lnT w="0">
+                      <a:noFill/>
+                    </a:lnT>
+                    <a:lnB w="0">
+                      <a:noFill/>
+                    </a:lnB>
+                    <a:noFill/>
+                  </a:tcPr>
+                </a:tc>
+                <a:tc>
+                  <a:txBody>
+                    <a:bodyPr wrap="square"/>
+                    <a:lstStyle/>
+                    <a:p>
+                      <a:pPr algn="r"/>
+                      <a:r>
+                        <a:rPr sz="1400" b="0" i="0">
+                          <a:solidFill>
+                            <a:srgbClr val="222222"/>
+                          </a:solidFill>
+                        </a:rPr>
+                        <a:t>1680</a:t>
+                      </a:r>
+                      <a:endParaRPr sz="1400"/>
+                    </a:p>
+                  </a:txBody>
+                  <a:tcPr marL="73152" marR="73152" marT="27432" marB="27432" anchor="ctr">
+                    <a:lnL w="0">
+                      <a:noFill/>
+                    </a:lnL>
+                    <a:lnR w="0">
+                      <a:noFill/>
+                    </a:lnR>
+                    <a:lnT w="0">
+                      <a:noFill/>
+                    </a:lnT>
+                    <a:lnB w="0">
+                      <a:noFill/>
+                    </a:lnB>
+                    <a:noFill/>
+                  </a:tcPr>
+                </a:tc>
+              </a:tr>
+              <a:tr h="365760">
+                <a:tc>
+                  <a:txBody>
+                    <a:bodyPr wrap="square"/>
+                    <a:lstStyle/>
+                    <a:p>
+                      <a:pPr algn="l"/>
+                      <a:r>
+                        <a:rPr sz="1400" b="0" i="0">
+                          <a:solidFill>
+                            <a:srgbClr val="222222"/>
+                          </a:solidFill>
+                        </a:rPr>
+                        <a:t>Missing</a:t>
+                      </a:r>
+                      <a:endParaRPr sz="1400"/>
+                    </a:p>
+                  </a:txBody>
+                  <a:tcPr marL="73152" marR="73152" marT="27432" marB="27432" anchor="ctr">
+                    <a:lnL w="0">
+                      <a:noFill/>
+                    </a:lnL>
+                    <a:lnR w="0">
+                      <a:noFill/>
+                    </a:lnR>
+                    <a:lnT w="0">
+                      <a:noFill/>
+                    </a:lnT>
+                    <a:lnB w="0">
+                      <a:noFill/>
+                    </a:lnB>
+                    <a:noFill/>
+                  </a:tcPr>
+                </a:tc>
+                <a:tc>
+                  <a:txBody>
+                    <a:bodyPr wrap="square"/>
+                    <a:lstStyle/>
+                    <a:p>
+                      <a:pPr algn="r"/>
+                      <a:r>
+                        <a:rPr sz="1400" b="0" i="0">
+                          <a:solidFill>
+                            <a:srgbClr val="222222"/>
+                          </a:solidFill>
+                        </a:rPr>
+                        <a:t>4</a:t>
+                      </a:r>
+                      <a:endParaRPr sz="1400"/>
+                    </a:p>
+                  </a:txBody>
+                  <a:tcPr marL="73152" marR="73152" marT="27432" marB="27432" anchor="ctr">
+                    <a:lnL w="0">
+                      <a:noFill/>
+                    </a:lnL>
+                    <a:lnR w="0">
+                      <a:noFill/>
+                    </a:lnR>
+                    <a:lnT w="0">
+                      <a:noFill/>
+                    </a:lnT>
+                    <a:lnB w="0">
+                      <a:noFill/>
+                    </a:lnB>
+                    <a:noFill/>
+                  </a:tcPr>
+                </a:tc>
+              </a:tr>
+              <a:tr h="365760">
+                <a:tc>
+                  <a:txBody>
+                    <a:bodyPr wrap="square"/>
+                    <a:lstStyle/>
+                    <a:p>
+                      <a:pPr algn="l"/>
+                      <a:r>
+                        <a:rPr sz="1400" b="0" i="0">
+                          <a:solidFill>
+                            <a:srgbClr val="222222"/>
+                          </a:solidFill>
+                        </a:rPr>
+                        <a:t>Mode</a:t>
+                      </a:r>
+                      <a:endParaRPr sz="1400"/>
+                    </a:p>
+                  </a:txBody>
+                  <a:tcPr marL="73152" marR="73152" marT="27432" marB="27432" anchor="ctr">
+                    <a:lnL w="0">
+                      <a:noFill/>
+                    </a:lnL>
+                    <a:lnR w="0">
+                      <a:noFill/>
+                    </a:lnR>
+                    <a:lnT w="0">
+                      <a:noFill/>
+                    </a:lnT>
+                    <a:lnB w="0">
+                      <a:noFill/>
+                    </a:lnB>
+                    <a:noFill/>
+                  </a:tcPr>
+                </a:tc>
+                <a:tc>
+                  <a:txBody>
+                    <a:bodyPr wrap="square"/>
+                    <a:lstStyle/>
+                    <a:p>
+                      <a:pPr algn="r"/>
+                      <a:r>
+                        <a:rPr sz="1400" b="0" i="0">
+                          <a:solidFill>
+                            <a:srgbClr val="222222"/>
+                          </a:solidFill>
+                        </a:rPr>
+                        <a:t>7.000</a:t>
+                      </a:r>
+                      <a:endParaRPr sz="1400"/>
+                    </a:p>
+                  </a:txBody>
+                  <a:tcPr marL="73152" marR="73152" marT="27432" marB="27432" anchor="ctr">
+                    <a:lnL w="0">
+                      <a:noFill/>
+                    </a:lnL>
+                    <a:lnR w="0">
+                      <a:noFill/>
+                    </a:lnR>
+                    <a:lnT w="0">
+                      <a:noFill/>
+                    </a:lnT>
+                    <a:lnB w="0">
+                      <a:noFill/>
+                    </a:lnB>
+                    <a:noFill/>
+                  </a:tcPr>
+                </a:tc>
+              </a:tr>
+              <a:tr h="365760">
+                <a:tc>
+                  <a:txBody>
+                    <a:bodyPr wrap="square"/>
+                    <a:lstStyle/>
+                    <a:p>
+                      <a:pPr algn="l"/>
+                      <a:r>
+                        <a:rPr sz="1400" b="0" i="0">
+                          <a:solidFill>
+                            <a:srgbClr val="222222"/>
+                          </a:solidFill>
+                        </a:rPr>
+                        <a:t>Median</a:t>
+                      </a:r>
+                      <a:endParaRPr sz="1400"/>
+                    </a:p>
+                  </a:txBody>
+                  <a:tcPr marL="73152" marR="73152" marT="27432" marB="27432" anchor="ctr">
+                    <a:lnL w="0">
+                      <a:noFill/>
+                    </a:lnL>
+                    <a:lnR w="0">
+                      <a:noFill/>
+                    </a:lnR>
+                    <a:lnT w="0">
+                      <a:noFill/>
+                    </a:lnT>
+                    <a:lnB w="0">
+                      <a:noFill/>
+                    </a:lnB>
+                    <a:noFill/>
+                  </a:tcPr>
+                </a:tc>
+                <a:tc>
+                  <a:txBody>
+                    <a:bodyPr wrap="square"/>
+                    <a:lstStyle/>
+                    <a:p>
+                      <a:pPr algn="r"/>
+                      <a:r>
+                        <a:rPr sz="1400" b="0" i="0">
+                          <a:solidFill>
+                            <a:srgbClr val="222222"/>
+                          </a:solidFill>
+                        </a:rPr>
+                        <a:t>6.000</a:t>
+                      </a:r>
+                      <a:endParaRPr sz="1400"/>
+                    </a:p>
+                  </a:txBody>
+                  <a:tcPr marL="73152" marR="73152" marT="27432" marB="27432" anchor="ctr">
+                    <a:lnL w="0">
+                      <a:noFill/>
+                    </a:lnL>
+                    <a:lnR w="0">
+                      <a:noFill/>
+                    </a:lnR>
+                    <a:lnT w="0">
+                      <a:noFill/>
+                    </a:lnT>
+                    <a:lnB w="0">
+                      <a:noFill/>
+                    </a:lnB>
+                    <a:noFill/>
+                  </a:tcPr>
+                </a:tc>
+              </a:tr>
+              <a:tr h="365760">
+                <a:tc>
+                  <a:txBody>
+                    <a:bodyPr wrap="square"/>
+                    <a:lstStyle/>
+                    <a:p>
+                      <a:pPr algn="l"/>
+                      <a:r>
+                        <a:rPr sz="1400" b="0" i="0">
+                          <a:solidFill>
+                            <a:srgbClr val="222222"/>
+                          </a:solidFill>
+                        </a:rPr>
+                        <a:t>Mean</a:t>
+                      </a:r>
+                      <a:endParaRPr sz="1400"/>
+                    </a:p>
+                  </a:txBody>
+                  <a:tcPr marL="73152" marR="73152" marT="27432" marB="27432" anchor="ctr">
+                    <a:lnL w="0">
+                      <a:noFill/>
+                    </a:lnL>
+                    <a:lnR w="0">
+                      <a:noFill/>
+                    </a:lnR>
+                    <a:lnT w="0">
+                      <a:noFill/>
+                    </a:lnT>
+                    <a:lnB w="0">
+                      <a:noFill/>
+                    </a:lnB>
+                    <a:noFill/>
+                  </a:tcPr>
+                </a:tc>
+                <a:tc>
+                  <a:txBody>
+                    <a:bodyPr wrap="square"/>
+                    <a:lstStyle/>
+                    <a:p>
+                      <a:pPr algn="r"/>
+                      <a:r>
+                        <a:rPr sz="1400" b="0" i="0">
+                          <a:solidFill>
+                            <a:srgbClr val="222222"/>
+                          </a:solidFill>
+                        </a:rPr>
+                        <a:t>5.402</a:t>
+                      </a:r>
+                      <a:endParaRPr sz="1400"/>
+                    </a:p>
+                  </a:txBody>
+                  <a:tcPr marL="73152" marR="73152" marT="27432" marB="27432" anchor="ctr">
+                    <a:lnL w="0">
+                      <a:noFill/>
+                    </a:lnL>
+                    <a:lnR w="0">
+                      <a:noFill/>
+                    </a:lnR>
+                    <a:lnT w="0">
+                      <a:noFill/>
+                    </a:lnT>
+                    <a:lnB w="0">
+                      <a:noFill/>
+                    </a:lnB>
+                    <a:noFill/>
+                  </a:tcPr>
+                </a:tc>
+              </a:tr>
+              <a:tr h="365760">
+                <a:tc>
+                  <a:txBody>
+                    <a:bodyPr wrap="square"/>
+                    <a:lstStyle/>
+                    <a:p>
+                      <a:pPr algn="l"/>
+                      <a:r>
+                        <a:rPr sz="1400" b="0" i="0">
+                          <a:solidFill>
+                            <a:srgbClr val="222222"/>
+                          </a:solidFill>
+                        </a:rPr>
+                        <a:t>Std. Deviation</a:t>
+                      </a:r>
+                      <a:endParaRPr sz="1400"/>
+                    </a:p>
+                  </a:txBody>
+                  <a:tcPr marL="73152" marR="73152" marT="27432" marB="27432" anchor="ctr">
+                    <a:lnL w="0">
+                      <a:noFill/>
+                    </a:lnL>
+                    <a:lnR w="0">
+                      <a:noFill/>
+                    </a:lnR>
+                    <a:lnT w="0">
+                      <a:noFill/>
+                    </a:lnT>
+                    <a:lnB w="0">
+                      <a:noFill/>
+                    </a:lnB>
+                    <a:noFill/>
+                  </a:tcPr>
+                </a:tc>
+                <a:tc>
+                  <a:txBody>
+                    <a:bodyPr wrap="square"/>
+                    <a:lstStyle/>
+                    <a:p>
+                      <a:pPr algn="r"/>
+                      <a:r>
+                        <a:rPr sz="1400" b="0" i="0">
+                          <a:solidFill>
+                            <a:srgbClr val="222222"/>
+                          </a:solidFill>
+                        </a:rPr>
+                        <a:t>2.298</a:t>
+                      </a:r>
+                      <a:endParaRPr sz="1400"/>
+                    </a:p>
+                  </a:txBody>
+                  <a:tcPr marL="73152" marR="73152" marT="27432" marB="27432" anchor="ctr">
+                    <a:lnL w="0">
+                      <a:noFill/>
+                    </a:lnL>
+                    <a:lnR w="0">
+                      <a:noFill/>
+                    </a:lnR>
+                    <a:lnT w="0">
+                      <a:noFill/>
+                    </a:lnT>
+                    <a:lnB w="0">
+                      <a:noFill/>
+                    </a:lnB>
+                    <a:noFill/>
+                  </a:tcPr>
+                </a:tc>
+              </a:tr>
+              <a:tr h="365760">
+                <a:tc>
+                  <a:txBody>
+                    <a:bodyPr wrap="square"/>
+                    <a:lstStyle/>
+                    <a:p>
+                      <a:pPr algn="l"/>
+                      <a:r>
+                        <a:rPr sz="1400" b="0" i="0">
+                          <a:solidFill>
+                            <a:srgbClr val="222222"/>
+                          </a:solidFill>
+                        </a:rPr>
+                        <a:t>Minimum</a:t>
+                      </a:r>
+                      <a:endParaRPr sz="1400"/>
+                    </a:p>
+                  </a:txBody>
+                  <a:tcPr marL="73152" marR="73152" marT="27432" marB="27432" anchor="ctr">
+                    <a:lnL w="0">
+                      <a:noFill/>
+                    </a:lnL>
+                    <a:lnR w="0">
+                      <a:noFill/>
+                    </a:lnR>
+                    <a:lnT w="0">
+                      <a:noFill/>
+                    </a:lnT>
+                    <a:lnB w="0">
+                      <a:noFill/>
+                    </a:lnB>
+                    <a:noFill/>
+                  </a:tcPr>
+                </a:tc>
+                <a:tc>
+                  <a:txBody>
+                    <a:bodyPr wrap="square"/>
+                    <a:lstStyle/>
+                    <a:p>
+                      <a:pPr algn="r"/>
+                      <a:r>
+                        <a:rPr sz="1400" b="0" i="0">
+                          <a:solidFill>
+                            <a:srgbClr val="222222"/>
+                          </a:solidFill>
+                        </a:rPr>
+                        <a:t>0.000</a:t>
+                      </a:r>
+                      <a:endParaRPr sz="1400"/>
+                    </a:p>
+                  </a:txBody>
+                  <a:tcPr marL="73152" marR="73152" marT="27432" marB="27432" anchor="ctr">
+                    <a:lnL w="0">
+                      <a:noFill/>
+                    </a:lnL>
+                    <a:lnR w="0">
+                      <a:noFill/>
+                    </a:lnR>
+                    <a:lnT w="0">
+                      <a:noFill/>
+                    </a:lnT>
+                    <a:lnB w="0">
+                      <a:noFill/>
+                    </a:lnB>
+                    <a:noFill/>
+                  </a:tcPr>
+                </a:tc>
+              </a:tr>
+              <a:tr h="365760">
+                <a:tc>
+                  <a:txBody>
+                    <a:bodyPr wrap="square"/>
+                    <a:lstStyle/>
+                    <a:p>
+                      <a:pPr algn="l"/>
+                      <a:r>
+                        <a:rPr sz="1400" b="0" i="0">
+                          <a:solidFill>
+                            <a:srgbClr val="222222"/>
+                          </a:solidFill>
+                        </a:rPr>
+                        <a:t>Maximum</a:t>
+                      </a:r>
+                      <a:endParaRPr sz="1400"/>
+                    </a:p>
+                  </a:txBody>
+                  <a:tcPr marL="73152" marR="73152" marT="27432" marB="27432" anchor="ctr">
+                    <a:lnL w="0">
+                      <a:noFill/>
+                    </a:lnL>
+                    <a:lnR w="0">
+                      <a:noFill/>
+                    </a:lnR>
+                    <a:lnT w="0">
+                      <a:noFill/>
+                    </a:lnT>
+                    <a:lnB w="12700">
+                      <a:solidFill>
+                        <a:srgbClr val="222222"/>
+                      </a:solidFill>
+                    </a:lnB>
+                    <a:noFill/>
+                  </a:tcPr>
+                </a:tc>
+                <a:tc>
+                  <a:txBody>
+                    <a:bodyPr wrap="square"/>
+                    <a:lstStyle/>
+                    <a:p>
+                      <a:pPr algn="r"/>
+                      <a:r>
+                        <a:rPr sz="1400" b="0" i="0">
+                          <a:solidFill>
+                            <a:srgbClr val="222222"/>
+                          </a:solidFill>
+                        </a:rPr>
+                        <a:t>10.000</a:t>
+                      </a:r>
+                      <a:endParaRPr sz="1400"/>
+                    </a:p>
+                  </a:txBody>
+                  <a:tcPr marL="73152" marR="73152" marT="27432" marB="27432" anchor="ctr">
+                    <a:lnL w="0">
+                      <a:noFill/>
+                    </a:lnL>
+                    <a:lnR w="0">
+                      <a:noFill/>
+                    </a:lnR>
+                    <a:lnT w="0">
+                      <a:noFill/>
+                    </a:lnT>
+                    <a:lnB w="12700">
+                      <a:solidFill>
+                        <a:srgbClr val="222222"/>
+                      </a:solidFill>
+                    </a:lnB>
+                    <a:noFill/>
+                  </a:tcPr>
+                </a:tc>
+              </a:tr>
+            </a:tbl>
+          </a:graphicData>
+        </a:graphic>
+      </p:graphicFrame>
+      <p:sp>
+        <p:nvSpPr>
+          <p:cNvPr id="7" name="Oval 6"/>
+          <p:cNvSpPr/>
+          <p:nvPr/>
+        </p:nvSpPr>
+        <p:spPr>
+          <a:xfrm>
+            <a:off x="4361688" y="2212848"/>
+            <a:ext cx="292608" cy="292608"/>
+          </a:xfrm>
+          <a:prstGeom prst="ellipse">
+            <a:avLst/>
+          </a:prstGeom>
+          <a:solidFill>
+            <a:srgbClr val="B88C00"/>
+          </a:solidFill>
+          <a:ln>
+            <a:noFill/>
+          </a:ln>
+        </p:spPr>
+        <p:txBody>
+          <a:bodyPr rtlCol="0" anchor="ctr" wrap="square" lIns="0" rIns="0" tIns="18288" bIns="18288"/>
+          <a:lstStyle/>
+          <a:p>
+            <a:pPr algn="ctr"/>
+            <a:r>
+              <a:rPr sz="1200" b="1" i="0">
+                <a:solidFill>
+                  <a:srgbClr val="FFFFFF"/>
+                </a:solidFill>
+              </a:rPr>
+              <a:t>1</a:t>
+            </a:r>
+            <a:endParaRPr sz="1200"/>
+          </a:p>
+        </p:txBody>
+      </p:sp>
+      <p:sp>
+        <p:nvSpPr>
+          <p:cNvPr id="8" name="Oval 7"/>
+          <p:cNvSpPr/>
+          <p:nvPr/>
+        </p:nvSpPr>
+        <p:spPr>
+          <a:xfrm>
+            <a:off x="4361688" y="2761488"/>
+            <a:ext cx="292608" cy="292608"/>
+          </a:xfrm>
+          <a:prstGeom prst="ellipse">
+            <a:avLst/>
+          </a:prstGeom>
+          <a:solidFill>
+            <a:srgbClr val="B88C00"/>
+          </a:solidFill>
+          <a:ln>
+            <a:noFill/>
+          </a:ln>
+        </p:spPr>
+        <p:txBody>
+          <a:bodyPr rtlCol="0" anchor="ctr" wrap="square" lIns="0" rIns="0" tIns="18288" bIns="18288"/>
+          <a:lstStyle/>
+          <a:p>
+            <a:pPr algn="ctr"/>
+            <a:r>
+              <a:rPr sz="1200" b="1" i="0">
+                <a:solidFill>
+                  <a:srgbClr val="FFFFFF"/>
+                </a:solidFill>
+              </a:rPr>
+              <a:t>2</a:t>
+            </a:r>
+            <a:endParaRPr sz="1200"/>
+          </a:p>
+        </p:txBody>
+      </p:sp>
+      <p:sp>
+        <p:nvSpPr>
+          <p:cNvPr id="9" name="Oval 8"/>
+          <p:cNvSpPr/>
+          <p:nvPr/>
+        </p:nvSpPr>
+        <p:spPr>
+          <a:xfrm>
+            <a:off x="4361688" y="3127248"/>
+            <a:ext cx="292608" cy="292608"/>
+          </a:xfrm>
+          <a:prstGeom prst="ellipse">
+            <a:avLst/>
+          </a:prstGeom>
+          <a:solidFill>
+            <a:srgbClr val="B88C00"/>
+          </a:solidFill>
+          <a:ln>
+            <a:noFill/>
+          </a:ln>
+        </p:spPr>
+        <p:txBody>
+          <a:bodyPr rtlCol="0" anchor="ctr" wrap="square" lIns="0" rIns="0" tIns="18288" bIns="18288"/>
+          <a:lstStyle/>
+          <a:p>
+            <a:pPr algn="ctr"/>
+            <a:r>
+              <a:rPr sz="1200" b="1" i="0">
+                <a:solidFill>
+                  <a:srgbClr val="FFFFFF"/>
+                </a:solidFill>
+              </a:rPr>
+              <a:t>3</a:t>
+            </a:r>
+            <a:endParaRPr sz="1200"/>
+          </a:p>
+        </p:txBody>
+      </p:sp>
+      <p:sp>
+        <p:nvSpPr>
+          <p:cNvPr id="10" name="Oval 9"/>
+          <p:cNvSpPr/>
+          <p:nvPr/>
+        </p:nvSpPr>
+        <p:spPr>
+          <a:xfrm>
+            <a:off x="4361688" y="3493008"/>
+            <a:ext cx="292608" cy="292608"/>
+          </a:xfrm>
+          <a:prstGeom prst="ellipse">
+            <a:avLst/>
+          </a:prstGeom>
+          <a:solidFill>
+            <a:srgbClr val="B88C00"/>
+          </a:solidFill>
+          <a:ln>
+            <a:noFill/>
+          </a:ln>
+        </p:spPr>
+        <p:txBody>
+          <a:bodyPr rtlCol="0" anchor="ctr" wrap="square" lIns="0" rIns="0" tIns="18288" bIns="18288"/>
+          <a:lstStyle/>
+          <a:p>
+            <a:pPr algn="ctr"/>
+            <a:r>
+              <a:rPr sz="1200" b="1" i="0">
+                <a:solidFill>
+                  <a:srgbClr val="FFFFFF"/>
+                </a:solidFill>
+              </a:rPr>
+              <a:t>4</a:t>
+            </a:r>
+            <a:endParaRPr sz="1200"/>
+          </a:p>
+        </p:txBody>
+      </p:sp>
+      <p:sp>
+        <p:nvSpPr>
+          <p:cNvPr id="11" name="Oval 10"/>
+          <p:cNvSpPr/>
+          <p:nvPr/>
+        </p:nvSpPr>
+        <p:spPr>
+          <a:xfrm>
+            <a:off x="4361688" y="3858768"/>
+            <a:ext cx="292608" cy="292608"/>
+          </a:xfrm>
+          <a:prstGeom prst="ellipse">
+            <a:avLst/>
+          </a:prstGeom>
+          <a:solidFill>
+            <a:srgbClr val="B88C00"/>
+          </a:solidFill>
+          <a:ln>
+            <a:noFill/>
+          </a:ln>
+        </p:spPr>
+        <p:txBody>
+          <a:bodyPr rtlCol="0" anchor="ctr" wrap="square" lIns="0" rIns="0" tIns="18288" bIns="18288"/>
+          <a:lstStyle/>
+          <a:p>
+            <a:pPr algn="ctr"/>
+            <a:r>
+              <a:rPr sz="1200" b="1" i="0">
+                <a:solidFill>
+                  <a:srgbClr val="FFFFFF"/>
+                </a:solidFill>
+              </a:rPr>
+              <a:t>5</a:t>
+            </a:r>
+            <a:endParaRPr sz="1200"/>
+          </a:p>
+        </p:txBody>
+      </p:sp>
+      <p:sp>
+        <p:nvSpPr>
+          <p:cNvPr id="12" name="Oval 11"/>
+          <p:cNvSpPr/>
+          <p:nvPr/>
+        </p:nvSpPr>
+        <p:spPr>
+          <a:xfrm>
+            <a:off x="4361688" y="4407408"/>
+            <a:ext cx="292608" cy="292608"/>
+          </a:xfrm>
+          <a:prstGeom prst="ellipse">
+            <a:avLst/>
+          </a:prstGeom>
+          <a:solidFill>
+            <a:srgbClr val="B88C00"/>
+          </a:solidFill>
+          <a:ln>
+            <a:noFill/>
+          </a:ln>
+        </p:spPr>
+        <p:txBody>
+          <a:bodyPr rtlCol="0" anchor="ctr" wrap="square" lIns="0" rIns="0" tIns="18288" bIns="18288"/>
+          <a:lstStyle/>
+          <a:p>
+            <a:pPr algn="ctr"/>
+            <a:r>
+              <a:rPr sz="1200" b="1" i="0">
+                <a:solidFill>
+                  <a:srgbClr val="FFFFFF"/>
+                </a:solidFill>
+              </a:rPr>
+              <a:t>6</a:t>
+            </a:r>
+            <a:endParaRPr sz="1200"/>
+          </a:p>
+        </p:txBody>
+      </p:sp>
+      <p:sp>
+        <p:nvSpPr>
+          <p:cNvPr id="13" name="Oval 12"/>
+          <p:cNvSpPr/>
+          <p:nvPr/>
+        </p:nvSpPr>
+        <p:spPr>
+          <a:xfrm>
+            <a:off x="5394960" y="1655064"/>
+            <a:ext cx="292608" cy="292608"/>
+          </a:xfrm>
+          <a:prstGeom prst="ellipse">
+            <a:avLst/>
+          </a:prstGeom>
+          <a:solidFill>
+            <a:srgbClr val="B88C00"/>
+          </a:solidFill>
+          <a:ln>
+            <a:noFill/>
+          </a:ln>
+        </p:spPr>
+        <p:txBody>
+          <a:bodyPr rtlCol="0" anchor="ctr" wrap="square" lIns="0" rIns="0" tIns="18288" bIns="18288"/>
+          <a:lstStyle/>
+          <a:p>
+            <a:pPr algn="ctr"/>
+            <a:r>
+              <a:rPr sz="1200" b="1" i="0">
+                <a:solidFill>
+                  <a:srgbClr val="FFFFFF"/>
+                </a:solidFill>
+              </a:rPr>
+              <a:t>1</a:t>
+            </a:r>
+            <a:endParaRPr sz="1200"/>
+          </a:p>
+        </p:txBody>
+      </p:sp>
+      <p:sp>
+        <p:nvSpPr>
+          <p:cNvPr id="14" name="TextBox 13"/>
+          <p:cNvSpPr txBox="1"/>
+          <p:nvPr/>
+        </p:nvSpPr>
+        <p:spPr>
+          <a:xfrm>
+            <a:off x="5806440" y="1463040"/>
+            <a:ext cx="5532120" cy="676656"/>
+          </a:xfrm>
+          <a:prstGeom prst="rect">
+            <a:avLst/>
+          </a:prstGeom>
+          <a:noFill/>
+        </p:spPr>
+        <p:txBody>
+          <a:bodyPr wrap="square" lIns="0" rIns="0" tIns="0" bIns="0" anchor="ctr">
+            <a:spAutoFit/>
+          </a:bodyPr>
+          <a:lstStyle/>
+          <a:p>
+            <a:pPr algn="l"/>
+            <a:r>
+              <a:rPr sz="1500" b="0" i="0">
+                <a:solidFill>
+                  <a:srgbClr val="1F2A33"/>
+                </a:solidFill>
+              </a:rPr>
+              <a:t>Valid and Missing: 1,680 answered; 4 refused or did not know</a:t>
+            </a:r>
+            <a:endParaRPr sz="1500"/>
+          </a:p>
+        </p:txBody>
+      </p:sp>
+      <p:sp>
+        <p:nvSpPr>
+          <p:cNvPr id="15" name="Oval 14"/>
+          <p:cNvSpPr/>
+          <p:nvPr/>
+        </p:nvSpPr>
+        <p:spPr>
+          <a:xfrm>
+            <a:off x="5394960" y="2331720"/>
+            <a:ext cx="292608" cy="292608"/>
+          </a:xfrm>
+          <a:prstGeom prst="ellipse">
+            <a:avLst/>
+          </a:prstGeom>
+          <a:solidFill>
+            <a:srgbClr val="B88C00"/>
+          </a:solidFill>
+          <a:ln>
+            <a:noFill/>
+          </a:ln>
+        </p:spPr>
+        <p:txBody>
+          <a:bodyPr rtlCol="0" anchor="ctr" wrap="square" lIns="0" rIns="0" tIns="18288" bIns="18288"/>
+          <a:lstStyle/>
+          <a:p>
+            <a:pPr algn="ctr"/>
+            <a:r>
+              <a:rPr sz="1200" b="1" i="0">
+                <a:solidFill>
+                  <a:srgbClr val="FFFFFF"/>
+                </a:solidFill>
+              </a:rPr>
+              <a:t>2</a:t>
+            </a:r>
+            <a:endParaRPr sz="1200"/>
+          </a:p>
+        </p:txBody>
+      </p:sp>
+      <p:sp>
+        <p:nvSpPr>
+          <p:cNvPr id="16" name="TextBox 15"/>
+          <p:cNvSpPr txBox="1"/>
+          <p:nvPr/>
+        </p:nvSpPr>
+        <p:spPr>
+          <a:xfrm>
+            <a:off x="5806440" y="2139696"/>
+            <a:ext cx="5532120" cy="676656"/>
+          </a:xfrm>
+          <a:prstGeom prst="rect">
+            <a:avLst/>
+          </a:prstGeom>
+          <a:noFill/>
+        </p:spPr>
+        <p:txBody>
+          <a:bodyPr wrap="square" lIns="0" rIns="0" tIns="0" bIns="0" anchor="ctr">
+            <a:spAutoFit/>
+          </a:bodyPr>
+          <a:lstStyle/>
+          <a:p>
+            <a:pPr algn="l"/>
+            <a:r>
+              <a:rPr sz="1500" b="0" i="0">
+                <a:solidFill>
+                  <a:srgbClr val="1F2A33"/>
+                </a:solidFill>
+              </a:rPr>
+              <a:t>Mode: the most common answer, 7</a:t>
+            </a:r>
+            <a:endParaRPr sz="1500"/>
+          </a:p>
+        </p:txBody>
+      </p:sp>
+      <p:sp>
+        <p:nvSpPr>
+          <p:cNvPr id="17" name="Oval 16"/>
+          <p:cNvSpPr/>
+          <p:nvPr/>
+        </p:nvSpPr>
+        <p:spPr>
+          <a:xfrm>
+            <a:off x="5394960" y="3008376"/>
+            <a:ext cx="292608" cy="292608"/>
+          </a:xfrm>
+          <a:prstGeom prst="ellipse">
+            <a:avLst/>
+          </a:prstGeom>
+          <a:solidFill>
+            <a:srgbClr val="B88C00"/>
+          </a:solidFill>
+          <a:ln>
+            <a:noFill/>
+          </a:ln>
+        </p:spPr>
+        <p:txBody>
+          <a:bodyPr rtlCol="0" anchor="ctr" wrap="square" lIns="0" rIns="0" tIns="18288" bIns="18288"/>
+          <a:lstStyle/>
+          <a:p>
+            <a:pPr algn="ctr"/>
+            <a:r>
+              <a:rPr sz="1200" b="1" i="0">
+                <a:solidFill>
+                  <a:srgbClr val="FFFFFF"/>
+                </a:solidFill>
+              </a:rPr>
+              <a:t>3</a:t>
+            </a:r>
+            <a:endParaRPr sz="1200"/>
+          </a:p>
+        </p:txBody>
+      </p:sp>
+      <p:sp>
+        <p:nvSpPr>
+          <p:cNvPr id="18" name="TextBox 17"/>
+          <p:cNvSpPr txBox="1"/>
+          <p:nvPr/>
+        </p:nvSpPr>
+        <p:spPr>
+          <a:xfrm>
+            <a:off x="5806440" y="2816352"/>
+            <a:ext cx="5532120" cy="676656"/>
+          </a:xfrm>
+          <a:prstGeom prst="rect">
+            <a:avLst/>
+          </a:prstGeom>
+          <a:noFill/>
+        </p:spPr>
+        <p:txBody>
+          <a:bodyPr wrap="square" lIns="0" rIns="0" tIns="0" bIns="0" anchor="ctr">
+            <a:spAutoFit/>
+          </a:bodyPr>
+          <a:lstStyle/>
+          <a:p>
+            <a:pPr algn="l"/>
+            <a:r>
+              <a:rPr sz="1500" b="0" i="0">
+                <a:solidFill>
+                  <a:srgbClr val="1F2A33"/>
+                </a:solidFill>
+              </a:rPr>
+              <a:t>Median: the middle answer when all of them are lined up, 6</a:t>
+            </a:r>
+            <a:endParaRPr sz="1500"/>
+          </a:p>
+        </p:txBody>
+      </p:sp>
+      <p:sp>
+        <p:nvSpPr>
+          <p:cNvPr id="19" name="Oval 18"/>
+          <p:cNvSpPr/>
+          <p:nvPr/>
+        </p:nvSpPr>
+        <p:spPr>
+          <a:xfrm>
+            <a:off x="5394960" y="3685031"/>
+            <a:ext cx="292608" cy="292608"/>
+          </a:xfrm>
+          <a:prstGeom prst="ellipse">
+            <a:avLst/>
+          </a:prstGeom>
+          <a:solidFill>
+            <a:srgbClr val="B88C00"/>
+          </a:solidFill>
+          <a:ln>
+            <a:noFill/>
+          </a:ln>
+        </p:spPr>
+        <p:txBody>
+          <a:bodyPr rtlCol="0" anchor="ctr" wrap="square" lIns="0" rIns="0" tIns="18288" bIns="18288"/>
+          <a:lstStyle/>
+          <a:p>
+            <a:pPr algn="ctr"/>
+            <a:r>
+              <a:rPr sz="1200" b="1" i="0">
+                <a:solidFill>
+                  <a:srgbClr val="FFFFFF"/>
+                </a:solidFill>
+              </a:rPr>
+              <a:t>4</a:t>
+            </a:r>
+            <a:endParaRPr sz="1200"/>
+          </a:p>
+        </p:txBody>
+      </p:sp>
+      <p:sp>
+        <p:nvSpPr>
+          <p:cNvPr id="20" name="TextBox 19"/>
+          <p:cNvSpPr txBox="1"/>
+          <p:nvPr/>
+        </p:nvSpPr>
+        <p:spPr>
+          <a:xfrm>
+            <a:off x="5806440" y="3493008"/>
+            <a:ext cx="5532120" cy="676656"/>
+          </a:xfrm>
+          <a:prstGeom prst="rect">
+            <a:avLst/>
+          </a:prstGeom>
+          <a:noFill/>
+        </p:spPr>
+        <p:txBody>
+          <a:bodyPr wrap="square" lIns="0" rIns="0" tIns="0" bIns="0" anchor="ctr">
+            <a:spAutoFit/>
+          </a:bodyPr>
+          <a:lstStyle/>
+          <a:p>
+            <a:pPr algn="l"/>
+            <a:r>
+              <a:rPr sz="1500" b="0" i="0">
+                <a:solidFill>
+                  <a:srgbClr val="1F2A33"/>
+                </a:solidFill>
+              </a:rPr>
+              <a:t>Mean: the average answer, 5.40</a:t>
+            </a:r>
+            <a:endParaRPr sz="1500"/>
+          </a:p>
+        </p:txBody>
+      </p:sp>
+      <p:sp>
+        <p:nvSpPr>
+          <p:cNvPr id="21" name="Oval 20"/>
+          <p:cNvSpPr/>
+          <p:nvPr/>
+        </p:nvSpPr>
+        <p:spPr>
+          <a:xfrm>
+            <a:off x="5394960" y="4361688"/>
+            <a:ext cx="292608" cy="292608"/>
+          </a:xfrm>
+          <a:prstGeom prst="ellipse">
+            <a:avLst/>
+          </a:prstGeom>
+          <a:solidFill>
+            <a:srgbClr val="B88C00"/>
+          </a:solidFill>
+          <a:ln>
+            <a:noFill/>
+          </a:ln>
+        </p:spPr>
+        <p:txBody>
+          <a:bodyPr rtlCol="0" anchor="ctr" wrap="square" lIns="0" rIns="0" tIns="18288" bIns="18288"/>
+          <a:lstStyle/>
+          <a:p>
+            <a:pPr algn="ctr"/>
+            <a:r>
+              <a:rPr sz="1200" b="1" i="0">
+                <a:solidFill>
+                  <a:srgbClr val="FFFFFF"/>
+                </a:solidFill>
+              </a:rPr>
+              <a:t>5</a:t>
+            </a:r>
+            <a:endParaRPr sz="1200"/>
+          </a:p>
+        </p:txBody>
+      </p:sp>
+      <p:sp>
+        <p:nvSpPr>
+          <p:cNvPr id="22" name="TextBox 21"/>
+          <p:cNvSpPr txBox="1"/>
+          <p:nvPr/>
+        </p:nvSpPr>
+        <p:spPr>
+          <a:xfrm>
+            <a:off x="5806440" y="4169664"/>
+            <a:ext cx="5532120" cy="676656"/>
+          </a:xfrm>
+          <a:prstGeom prst="rect">
+            <a:avLst/>
+          </a:prstGeom>
+          <a:noFill/>
+        </p:spPr>
+        <p:txBody>
+          <a:bodyPr wrap="square" lIns="0" rIns="0" tIns="0" bIns="0" anchor="ctr">
+            <a:spAutoFit/>
+          </a:bodyPr>
+          <a:lstStyle/>
+          <a:p>
+            <a:pPr algn="l"/>
+            <a:r>
+              <a:rPr sz="1500" b="0" i="0">
+                <a:solidFill>
+                  <a:srgbClr val="1F2A33"/>
+                </a:solidFill>
+              </a:rPr>
+              <a:t>Std. Deviation: the typical distance of an answer from the mean, 2.3 points</a:t>
+            </a:r>
+            <a:endParaRPr sz="1500"/>
+          </a:p>
+        </p:txBody>
+      </p:sp>
+      <p:sp>
+        <p:nvSpPr>
+          <p:cNvPr id="23" name="Oval 22"/>
+          <p:cNvSpPr/>
+          <p:nvPr/>
+        </p:nvSpPr>
+        <p:spPr>
+          <a:xfrm>
+            <a:off x="5394960" y="5038344"/>
+            <a:ext cx="292608" cy="292608"/>
+          </a:xfrm>
+          <a:prstGeom prst="ellipse">
+            <a:avLst/>
+          </a:prstGeom>
+          <a:solidFill>
+            <a:srgbClr val="B88C00"/>
+          </a:solidFill>
+          <a:ln>
+            <a:noFill/>
+          </a:ln>
+        </p:spPr>
+        <p:txBody>
+          <a:bodyPr rtlCol="0" anchor="ctr" wrap="square" lIns="0" rIns="0" tIns="18288" bIns="18288"/>
+          <a:lstStyle/>
+          <a:p>
+            <a:pPr algn="ctr"/>
+            <a:r>
+              <a:rPr sz="1200" b="1" i="0">
+                <a:solidFill>
+                  <a:srgbClr val="FFFFFF"/>
+                </a:solidFill>
+              </a:rPr>
+              <a:t>6</a:t>
+            </a:r>
+            <a:endParaRPr sz="1200"/>
+          </a:p>
+        </p:txBody>
+      </p:sp>
+      <p:sp>
+        <p:nvSpPr>
+          <p:cNvPr id="24" name="TextBox 23"/>
+          <p:cNvSpPr txBox="1"/>
+          <p:nvPr/>
+        </p:nvSpPr>
+        <p:spPr>
+          <a:xfrm>
+            <a:off x="5806440" y="4846320"/>
+            <a:ext cx="5532120" cy="676656"/>
+          </a:xfrm>
+          <a:prstGeom prst="rect">
+            <a:avLst/>
+          </a:prstGeom>
+          <a:noFill/>
+        </p:spPr>
+        <p:txBody>
+          <a:bodyPr wrap="square" lIns="0" rIns="0" tIns="0" bIns="0" anchor="ctr">
+            <a:spAutoFit/>
+          </a:bodyPr>
+          <a:lstStyle/>
+          <a:p>
+            <a:pPr algn="l"/>
+            <a:r>
+              <a:rPr sz="1500" b="0" i="0">
+                <a:solidFill>
+                  <a:srgbClr val="1F2A33"/>
+                </a:solidFill>
+              </a:rPr>
+              <a:t>Minimum and Maximum: the lowest and highest answers given, 0 and 10</a:t>
+            </a:r>
+            <a:endParaRPr sz="1500"/>
+          </a:p>
+        </p:txBody>
+      </p:sp>
+      <p:sp>
+        <p:nvSpPr>
+          <p:cNvPr id="25" name="TextBox 24"/>
+          <p:cNvSpPr txBox="1"/>
+          <p:nvPr/>
+        </p:nvSpPr>
+        <p:spPr>
+          <a:xfrm>
+            <a:off x="758952" y="5943600"/>
+            <a:ext cx="10607040" cy="292608"/>
+          </a:xfrm>
+          <a:prstGeom prst="rect">
+            <a:avLst/>
+          </a:prstGeom>
+          <a:noFill/>
+        </p:spPr>
+        <p:txBody>
+          <a:bodyPr wrap="square" lIns="0" rIns="0" tIns="0" bIns="0" anchor="ctr">
+            <a:spAutoFit/>
+          </a:bodyPr>
+          <a:lstStyle/>
+          <a:p>
+            <a:pPr algn="l"/>
+            <a:r>
+              <a:rPr sz="1200" b="0" i="0">
+                <a:solidFill>
+                  <a:srgbClr val="55606B"/>
+                </a:solidFill>
+              </a:rPr>
+              <a:t>Data: European Social Survey Round 11 (2023–24), UK sample (gb-ess11-trust.sav). JASP: Descriptives › Descriptive Statistics; ppltrst set to Scale; Mode and Median ticked.</a:t>
+            </a:r>
+            <a:endParaRPr sz="1200"/>
+          </a:p>
+        </p:txBody>
+      </p:sp>
+    </p:spTree>
+  </p:cSld>
+  <p:clrMapOvr>
+    <a:masterClrMapping/>
+  </p:clrMapOvr>
+</p:sld>
+</file>
+
+<file path=ppt/slides/slide44.xml><?xml version="1.0" encoding="utf-8"?>
+<p:sld xmlns:a="http://schemas.openxmlformats.org/drawingml/2006/main" xmlns:p="http://schemas.openxmlformats.org/presentationml/2006/main" xmlns:r="http://schemas.openxmlformats.org/officeDocument/2006/relationships">
+  <p:cSld>
+    <p:spTree>
+      <p:nvGrpSpPr>
+        <p:cNvPr id="1" name=""/>
+        <p:cNvGrpSpPr/>
+        <p:nvPr/>
+      </p:nvGrpSpPr>
+      <p:grpSpPr/>
+      <p:sp>
+        <p:nvSpPr>
+          <p:cNvPr id="2" name="Title 1"/>
+          <p:cNvSpPr>
+            <a:spLocks noGrp="1"/>
+          </p:cNvSpPr>
+          <p:nvPr>
+            <p:ph type="title"/>
+          </p:nvPr>
+        </p:nvSpPr>
+        <p:spPr/>
+        <p:txBody>
+          <a:bodyPr/>
+          <a:lstStyle/>
+          <a:p>
+            <a:r>
+              <a:t>Reading the JASP output: frequency table</a:t>
+            </a:r>
+          </a:p>
+        </p:txBody>
+      </p:sp>
+      <p:sp>
+        <p:nvSpPr>
+          <p:cNvPr id="3" name="Footer Placeholder 2">
             <a:extLst>
               <a:ext uri="{FF2B5EF4-FFF2-40B4-BE49-F238E27FC236}">
-                <a16:creationId xmlns:a16="http://schemas.microsoft.com/office/drawing/2014/main" id="{842F4CDE-CA65-A351-FC7A-A0239DCC68E8}"/>
+                <a16:creationId xmlns:a16="http://schemas.microsoft.com/office/drawing/2014/main" id="{D0C8C946-5335-2921-801F-E32EBBDC06AC}"/>
               </a:ext>
             </a:extLst>
           </p:cNvPr>
+          <p:cNvSpPr>
+            <a:spLocks noGrp="1"/>
+          </p:cNvSpPr>
+          <p:nvPr>
+            <p:ph type="ftr" sz="quarter" idx="11"/>
+          </p:nvPr>
+        </p:nvSpPr>
+        <p:spPr/>
+        <p:txBody>
+          <a:bodyPr/>
+          <a:lstStyle/>
+          <a:p>
+            <a:r>
+              <a:rPr lang="en-GB"/>
+              <a:t>Measurement and Description</a:t>
+            </a:r>
+          </a:p>
+        </p:txBody>
+      </p:sp>
+      <p:sp>
+        <p:nvSpPr>
+          <p:cNvPr id="4" name="Slide Number Placeholder 3">
+            <a:extLst>
+              <a:ext uri="{FF2B5EF4-FFF2-40B4-BE49-F238E27FC236}">
+                <a16:creationId xmlns:a16="http://schemas.microsoft.com/office/drawing/2014/main" id="{975A5B92-8D16-E54E-863B-32FBAC4EF875}"/>
+              </a:ext>
+            </a:extLst>
+          </p:cNvPr>
+          <p:cNvSpPr>
+            <a:spLocks noGrp="1"/>
+          </p:cNvSpPr>
+          <p:nvPr>
+            <p:ph type="sldNum" sz="quarter" idx="12"/>
+          </p:nvPr>
+        </p:nvSpPr>
+        <p:spPr/>
+        <p:txBody>
+          <a:bodyPr/>
+          <a:lstStyle/>
+          <a:p>
+            <a:fld id="{9FAA51BB-2FC0-4DB8-B50E-F52D50E733B6}" type="slidenum">
+              <a:rPr lang="en-GB" smtClean="0"/>
+              <a:t>20</a:t>
+            </a:fld>
+            <a:endParaRPr lang="en-GB"/>
+          </a:p>
+        </p:txBody>
+      </p:sp>
+      <p:sp>
+        <p:nvSpPr>
+          <p:cNvPr id="5" name="TextBox 4"/>
+          <p:cNvSpPr txBox="1"/>
+          <p:nvPr/>
+        </p:nvSpPr>
+        <p:spPr>
+          <a:xfrm>
+            <a:off x="758952" y="1261872"/>
+            <a:ext cx="7040880" cy="274320"/>
+          </a:xfrm>
+          <a:prstGeom prst="rect">
+            <a:avLst/>
+          </a:prstGeom>
+          <a:noFill/>
+        </p:spPr>
+        <p:txBody>
+          <a:bodyPr wrap="square" lIns="0" rIns="0" tIns="0" bIns="0" anchor="t">
+            <a:spAutoFit/>
+          </a:bodyPr>
+          <a:lstStyle/>
+          <a:p>
+            <a:pPr algn="l"/>
+            <a:r>
+              <a:rPr sz="1400" b="1" i="0">
+                <a:solidFill>
+                  <a:srgbClr val="222222"/>
+                </a:solidFill>
+              </a:rPr>
+              <a:t>Frequencies for ppltrst</a:t>
+            </a:r>
+            <a:endParaRPr sz="1400"/>
+          </a:p>
+        </p:txBody>
+      </p:sp>
+      <p:graphicFrame>
+        <p:nvGraphicFramePr>
+          <p:cNvPr id="6" name="Table 5"/>
+          <p:cNvGraphicFramePr>
+            <a:graphicFrameLocks noGrp="1"/>
+          </p:cNvGraphicFramePr>
+          <p:nvPr/>
+        </p:nvGraphicFramePr>
+        <p:xfrm>
+          <a:off x="758952" y="1563624"/>
+          <a:ext cx="7040880" cy="3648442"/>
+        </p:xfrm>
+        <a:graphic>
+          <a:graphicData uri="http://schemas.openxmlformats.org/drawingml/2006/table">
+            <a:tbl>
+              <a:tblPr>
+                <a:tableStyleId>{2D5ABB26-0587-4C30-8999-92F81FD0307C}</a:tableStyleId>
+              </a:tblPr>
+              <a:tblGrid>
+                <a:gridCol w="2331720"/>
+                <a:gridCol w="1005840"/>
+                <a:gridCol w="914400"/>
+                <a:gridCol w="1188720"/>
+                <a:gridCol w="1600200"/>
+              </a:tblGrid>
+              <a:tr h="260603">
+                <a:tc>
+                  <a:txBody>
+                    <a:bodyPr wrap="square"/>
+                    <a:lstStyle/>
+                    <a:p>
+                      <a:pPr algn="l"/>
+                      <a:r>
+                        <a:rPr sz="1200" b="1" i="0">
+                          <a:solidFill>
+                            <a:srgbClr val="222222"/>
+                          </a:solidFill>
+                        </a:rPr>
+                        <a:t>ppltrst</a:t>
+                      </a:r>
+                      <a:endParaRPr sz="1200"/>
+                    </a:p>
+                  </a:txBody>
+                  <a:tcPr marL="73152" marR="73152" marT="27432" marB="27432" anchor="ctr">
+                    <a:lnL w="0">
+                      <a:noFill/>
+                    </a:lnL>
+                    <a:lnR w="0">
+                      <a:noFill/>
+                    </a:lnR>
+                    <a:lnT w="12700">
+                      <a:solidFill>
+                        <a:srgbClr val="222222"/>
+                      </a:solidFill>
+                    </a:lnT>
+                    <a:lnB w="9525">
+                      <a:solidFill>
+                        <a:srgbClr val="222222"/>
+                      </a:solidFill>
+                    </a:lnB>
+                    <a:noFill/>
+                  </a:tcPr>
+                </a:tc>
+                <a:tc>
+                  <a:txBody>
+                    <a:bodyPr wrap="square"/>
+                    <a:lstStyle/>
+                    <a:p>
+                      <a:pPr algn="r"/>
+                      <a:r>
+                        <a:rPr sz="1200" b="1" i="0">
+                          <a:solidFill>
+                            <a:srgbClr val="222222"/>
+                          </a:solidFill>
+                        </a:rPr>
+                        <a:t>Frequency</a:t>
+                      </a:r>
+                      <a:endParaRPr sz="1200"/>
+                    </a:p>
+                  </a:txBody>
+                  <a:tcPr marL="73152" marR="73152" marT="27432" marB="27432" anchor="ctr">
+                    <a:lnL w="0">
+                      <a:noFill/>
+                    </a:lnL>
+                    <a:lnR w="0">
+                      <a:noFill/>
+                    </a:lnR>
+                    <a:lnT w="12700">
+                      <a:solidFill>
+                        <a:srgbClr val="222222"/>
+                      </a:solidFill>
+                    </a:lnT>
+                    <a:lnB w="9525">
+                      <a:solidFill>
+                        <a:srgbClr val="222222"/>
+                      </a:solidFill>
+                    </a:lnB>
+                    <a:noFill/>
+                  </a:tcPr>
+                </a:tc>
+                <a:tc>
+                  <a:txBody>
+                    <a:bodyPr wrap="square"/>
+                    <a:lstStyle/>
+                    <a:p>
+                      <a:pPr algn="r"/>
+                      <a:r>
+                        <a:rPr sz="1200" b="1" i="0">
+                          <a:solidFill>
+                            <a:srgbClr val="222222"/>
+                          </a:solidFill>
+                        </a:rPr>
+                        <a:t>Percent</a:t>
+                      </a:r>
+                      <a:endParaRPr sz="1200"/>
+                    </a:p>
+                  </a:txBody>
+                  <a:tcPr marL="73152" marR="73152" marT="27432" marB="27432" anchor="ctr">
+                    <a:lnL w="0">
+                      <a:noFill/>
+                    </a:lnL>
+                    <a:lnR w="0">
+                      <a:noFill/>
+                    </a:lnR>
+                    <a:lnT w="12700">
+                      <a:solidFill>
+                        <a:srgbClr val="222222"/>
+                      </a:solidFill>
+                    </a:lnT>
+                    <a:lnB w="9525">
+                      <a:solidFill>
+                        <a:srgbClr val="222222"/>
+                      </a:solidFill>
+                    </a:lnB>
+                    <a:noFill/>
+                  </a:tcPr>
+                </a:tc>
+                <a:tc>
+                  <a:txBody>
+                    <a:bodyPr wrap="square"/>
+                    <a:lstStyle/>
+                    <a:p>
+                      <a:pPr algn="r"/>
+                      <a:r>
+                        <a:rPr sz="1200" b="1" i="0">
+                          <a:solidFill>
+                            <a:srgbClr val="222222"/>
+                          </a:solidFill>
+                        </a:rPr>
+                        <a:t>Valid Percent</a:t>
+                      </a:r>
+                      <a:endParaRPr sz="1200"/>
+                    </a:p>
+                  </a:txBody>
+                  <a:tcPr marL="73152" marR="73152" marT="27432" marB="27432" anchor="ctr">
+                    <a:lnL w="0">
+                      <a:noFill/>
+                    </a:lnL>
+                    <a:lnR w="0">
+                      <a:noFill/>
+                    </a:lnR>
+                    <a:lnT w="12700">
+                      <a:solidFill>
+                        <a:srgbClr val="222222"/>
+                      </a:solidFill>
+                    </a:lnT>
+                    <a:lnB w="9525">
+                      <a:solidFill>
+                        <a:srgbClr val="222222"/>
+                      </a:solidFill>
+                    </a:lnB>
+                    <a:noFill/>
+                  </a:tcPr>
+                </a:tc>
+                <a:tc>
+                  <a:txBody>
+                    <a:bodyPr wrap="square"/>
+                    <a:lstStyle/>
+                    <a:p>
+                      <a:pPr algn="r"/>
+                      <a:r>
+                        <a:rPr sz="1200" b="1" i="0">
+                          <a:solidFill>
+                            <a:srgbClr val="222222"/>
+                          </a:solidFill>
+                        </a:rPr>
+                        <a:t>Cumulative Percent</a:t>
+                      </a:r>
+                      <a:endParaRPr sz="1200"/>
+                    </a:p>
+                  </a:txBody>
+                  <a:tcPr marL="73152" marR="73152" marT="27432" marB="27432" anchor="ctr">
+                    <a:lnL w="0">
+                      <a:noFill/>
+                    </a:lnL>
+                    <a:lnR w="0">
+                      <a:noFill/>
+                    </a:lnR>
+                    <a:lnT w="12700">
+                      <a:solidFill>
+                        <a:srgbClr val="222222"/>
+                      </a:solidFill>
+                    </a:lnT>
+                    <a:lnB w="9525">
+                      <a:solidFill>
+                        <a:srgbClr val="222222"/>
+                      </a:solidFill>
+                    </a:lnB>
+                    <a:noFill/>
+                  </a:tcPr>
+                </a:tc>
+              </a:tr>
+              <a:tr h="260603">
+                <a:tc>
+                  <a:txBody>
+                    <a:bodyPr wrap="square"/>
+                    <a:lstStyle/>
+                    <a:p>
+                      <a:pPr algn="l"/>
+                      <a:r>
+                        <a:rPr sz="1200" b="0" i="0">
+                          <a:solidFill>
+                            <a:srgbClr val="222222"/>
+                          </a:solidFill>
+                        </a:rPr>
+                        <a:t>You can’t be too careful</a:t>
+                      </a:r>
+                      <a:endParaRPr sz="1200"/>
+                    </a:p>
+                  </a:txBody>
+                  <a:tcPr marL="73152" marR="73152" marT="27432" marB="27432" anchor="ctr">
+                    <a:lnL w="0">
+                      <a:noFill/>
+                    </a:lnL>
+                    <a:lnR w="0">
+                      <a:noFill/>
+                    </a:lnR>
+                    <a:lnT w="0">
+                      <a:noFill/>
+                    </a:lnT>
+                    <a:lnB w="0">
+                      <a:noFill/>
+                    </a:lnB>
+                    <a:noFill/>
+                  </a:tcPr>
+                </a:tc>
+                <a:tc>
+                  <a:txBody>
+                    <a:bodyPr wrap="square"/>
+                    <a:lstStyle/>
+                    <a:p>
+                      <a:pPr algn="r"/>
+                      <a:r>
+                        <a:rPr sz="1200" b="0" i="0">
+                          <a:solidFill>
+                            <a:srgbClr val="222222"/>
+                          </a:solidFill>
+                        </a:rPr>
+                        <a:t>59</a:t>
+                      </a:r>
+                      <a:endParaRPr sz="1200"/>
+                    </a:p>
+                  </a:txBody>
+                  <a:tcPr marL="73152" marR="73152" marT="27432" marB="27432" anchor="ctr">
+                    <a:lnL w="0">
+                      <a:noFill/>
+                    </a:lnL>
+                    <a:lnR w="0">
+                      <a:noFill/>
+                    </a:lnR>
+                    <a:lnT w="0">
+                      <a:noFill/>
+                    </a:lnT>
+                    <a:lnB w="0">
+                      <a:noFill/>
+                    </a:lnB>
+                    <a:noFill/>
+                  </a:tcPr>
+                </a:tc>
+                <a:tc>
+                  <a:txBody>
+                    <a:bodyPr wrap="square"/>
+                    <a:lstStyle/>
+                    <a:p>
+                      <a:pPr algn="r"/>
+                      <a:r>
+                        <a:rPr sz="1200" b="0" i="0">
+                          <a:solidFill>
+                            <a:srgbClr val="222222"/>
+                          </a:solidFill>
+                        </a:rPr>
+                        <a:t>3.5</a:t>
+                      </a:r>
+                      <a:endParaRPr sz="1200"/>
+                    </a:p>
+                  </a:txBody>
+                  <a:tcPr marL="73152" marR="73152" marT="27432" marB="27432" anchor="ctr">
+                    <a:lnL w="0">
+                      <a:noFill/>
+                    </a:lnL>
+                    <a:lnR w="0">
+                      <a:noFill/>
+                    </a:lnR>
+                    <a:lnT w="0">
+                      <a:noFill/>
+                    </a:lnT>
+                    <a:lnB w="0">
+                      <a:noFill/>
+                    </a:lnB>
+                    <a:noFill/>
+                  </a:tcPr>
+                </a:tc>
+                <a:tc>
+                  <a:txBody>
+                    <a:bodyPr wrap="square"/>
+                    <a:lstStyle/>
+                    <a:p>
+                      <a:pPr algn="r"/>
+                      <a:r>
+                        <a:rPr sz="1200" b="0" i="0">
+                          <a:solidFill>
+                            <a:srgbClr val="222222"/>
+                          </a:solidFill>
+                        </a:rPr>
+                        <a:t>3.5</a:t>
+                      </a:r>
+                      <a:endParaRPr sz="1200"/>
+                    </a:p>
+                  </a:txBody>
+                  <a:tcPr marL="73152" marR="73152" marT="27432" marB="27432" anchor="ctr">
+                    <a:lnL w="0">
+                      <a:noFill/>
+                    </a:lnL>
+                    <a:lnR w="0">
+                      <a:noFill/>
+                    </a:lnR>
+                    <a:lnT w="0">
+                      <a:noFill/>
+                    </a:lnT>
+                    <a:lnB w="0">
+                      <a:noFill/>
+                    </a:lnB>
+                    <a:noFill/>
+                  </a:tcPr>
+                </a:tc>
+                <a:tc>
+                  <a:txBody>
+                    <a:bodyPr wrap="square"/>
+                    <a:lstStyle/>
+                    <a:p>
+                      <a:pPr algn="r"/>
+                      <a:r>
+                        <a:rPr sz="1200" b="0" i="0">
+                          <a:solidFill>
+                            <a:srgbClr val="222222"/>
+                          </a:solidFill>
+                        </a:rPr>
+                        <a:t>3.5</a:t>
+                      </a:r>
+                      <a:endParaRPr sz="1200"/>
+                    </a:p>
+                  </a:txBody>
+                  <a:tcPr marL="73152" marR="73152" marT="27432" marB="27432" anchor="ctr">
+                    <a:lnL w="0">
+                      <a:noFill/>
+                    </a:lnL>
+                    <a:lnR w="0">
+                      <a:noFill/>
+                    </a:lnR>
+                    <a:lnT w="0">
+                      <a:noFill/>
+                    </a:lnT>
+                    <a:lnB w="0">
+                      <a:noFill/>
+                    </a:lnB>
+                    <a:noFill/>
+                  </a:tcPr>
+                </a:tc>
+              </a:tr>
+              <a:tr h="260603">
+                <a:tc>
+                  <a:txBody>
+                    <a:bodyPr wrap="square"/>
+                    <a:lstStyle/>
+                    <a:p>
+                      <a:pPr algn="l"/>
+                      <a:r>
+                        <a:rPr sz="1200" b="0" i="0">
+                          <a:solidFill>
+                            <a:srgbClr val="222222"/>
+                          </a:solidFill>
+                        </a:rPr>
+                        <a:t>1</a:t>
+                      </a:r>
+                      <a:endParaRPr sz="1200"/>
+                    </a:p>
+                  </a:txBody>
+                  <a:tcPr marL="73152" marR="73152" marT="27432" marB="27432" anchor="ctr">
+                    <a:lnL w="0">
+                      <a:noFill/>
+                    </a:lnL>
+                    <a:lnR w="0">
+                      <a:noFill/>
+                    </a:lnR>
+                    <a:lnT w="0">
+                      <a:noFill/>
+                    </a:lnT>
+                    <a:lnB w="0">
+                      <a:noFill/>
+                    </a:lnB>
+                    <a:noFill/>
+                  </a:tcPr>
+                </a:tc>
+                <a:tc>
+                  <a:txBody>
+                    <a:bodyPr wrap="square"/>
+                    <a:lstStyle/>
+                    <a:p>
+                      <a:pPr algn="r"/>
+                      <a:r>
+                        <a:rPr sz="1200" b="0" i="0">
+                          <a:solidFill>
+                            <a:srgbClr val="222222"/>
+                          </a:solidFill>
+                        </a:rPr>
+                        <a:t>58</a:t>
+                      </a:r>
+                      <a:endParaRPr sz="1200"/>
+                    </a:p>
+                  </a:txBody>
+                  <a:tcPr marL="73152" marR="73152" marT="27432" marB="27432" anchor="ctr">
+                    <a:lnL w="0">
+                      <a:noFill/>
+                    </a:lnL>
+                    <a:lnR w="0">
+                      <a:noFill/>
+                    </a:lnR>
+                    <a:lnT w="0">
+                      <a:noFill/>
+                    </a:lnT>
+                    <a:lnB w="0">
+                      <a:noFill/>
+                    </a:lnB>
+                    <a:noFill/>
+                  </a:tcPr>
+                </a:tc>
+                <a:tc>
+                  <a:txBody>
+                    <a:bodyPr wrap="square"/>
+                    <a:lstStyle/>
+                    <a:p>
+                      <a:pPr algn="r"/>
+                      <a:r>
+                        <a:rPr sz="1200" b="0" i="0">
+                          <a:solidFill>
+                            <a:srgbClr val="222222"/>
+                          </a:solidFill>
+                        </a:rPr>
+                        <a:t>3.4</a:t>
+                      </a:r>
+                      <a:endParaRPr sz="1200"/>
+                    </a:p>
+                  </a:txBody>
+                  <a:tcPr marL="73152" marR="73152" marT="27432" marB="27432" anchor="ctr">
+                    <a:lnL w="0">
+                      <a:noFill/>
+                    </a:lnL>
+                    <a:lnR w="0">
+                      <a:noFill/>
+                    </a:lnR>
+                    <a:lnT w="0">
+                      <a:noFill/>
+                    </a:lnT>
+                    <a:lnB w="0">
+                      <a:noFill/>
+                    </a:lnB>
+                    <a:noFill/>
+                  </a:tcPr>
+                </a:tc>
+                <a:tc>
+                  <a:txBody>
+                    <a:bodyPr wrap="square"/>
+                    <a:lstStyle/>
+                    <a:p>
+                      <a:pPr algn="r"/>
+                      <a:r>
+                        <a:rPr sz="1200" b="0" i="0">
+                          <a:solidFill>
+                            <a:srgbClr val="222222"/>
+                          </a:solidFill>
+                        </a:rPr>
+                        <a:t>3.5</a:t>
+                      </a:r>
+                      <a:endParaRPr sz="1200"/>
+                    </a:p>
+                  </a:txBody>
+                  <a:tcPr marL="73152" marR="73152" marT="27432" marB="27432" anchor="ctr">
+                    <a:lnL w="0">
+                      <a:noFill/>
+                    </a:lnL>
+                    <a:lnR w="0">
+                      <a:noFill/>
+                    </a:lnR>
+                    <a:lnT w="0">
+                      <a:noFill/>
+                    </a:lnT>
+                    <a:lnB w="0">
+                      <a:noFill/>
+                    </a:lnB>
+                    <a:noFill/>
+                  </a:tcPr>
+                </a:tc>
+                <a:tc>
+                  <a:txBody>
+                    <a:bodyPr wrap="square"/>
+                    <a:lstStyle/>
+                    <a:p>
+                      <a:pPr algn="r"/>
+                      <a:r>
+                        <a:rPr sz="1200" b="0" i="0">
+                          <a:solidFill>
+                            <a:srgbClr val="222222"/>
+                          </a:solidFill>
+                        </a:rPr>
+                        <a:t>7.0</a:t>
+                      </a:r>
+                      <a:endParaRPr sz="1200"/>
+                    </a:p>
+                  </a:txBody>
+                  <a:tcPr marL="73152" marR="73152" marT="27432" marB="27432" anchor="ctr">
+                    <a:lnL w="0">
+                      <a:noFill/>
+                    </a:lnL>
+                    <a:lnR w="0">
+                      <a:noFill/>
+                    </a:lnR>
+                    <a:lnT w="0">
+                      <a:noFill/>
+                    </a:lnT>
+                    <a:lnB w="0">
+                      <a:noFill/>
+                    </a:lnB>
+                    <a:noFill/>
+                  </a:tcPr>
+                </a:tc>
+              </a:tr>
+              <a:tr h="260603">
+                <a:tc>
+                  <a:txBody>
+                    <a:bodyPr wrap="square"/>
+                    <a:lstStyle/>
+                    <a:p>
+                      <a:pPr algn="l"/>
+                      <a:r>
+                        <a:rPr sz="1200" b="0" i="0">
+                          <a:solidFill>
+                            <a:srgbClr val="222222"/>
+                          </a:solidFill>
+                        </a:rPr>
+                        <a:t>2</a:t>
+                      </a:r>
+                      <a:endParaRPr sz="1200"/>
+                    </a:p>
+                  </a:txBody>
+                  <a:tcPr marL="73152" marR="73152" marT="27432" marB="27432" anchor="ctr">
+                    <a:lnL w="0">
+                      <a:noFill/>
+                    </a:lnL>
+                    <a:lnR w="0">
+                      <a:noFill/>
+                    </a:lnR>
+                    <a:lnT w="0">
+                      <a:noFill/>
+                    </a:lnT>
+                    <a:lnB w="0">
+                      <a:noFill/>
+                    </a:lnB>
+                    <a:noFill/>
+                  </a:tcPr>
+                </a:tc>
+                <a:tc>
+                  <a:txBody>
+                    <a:bodyPr wrap="square"/>
+                    <a:lstStyle/>
+                    <a:p>
+                      <a:pPr algn="r"/>
+                      <a:r>
+                        <a:rPr sz="1200" b="0" i="0">
+                          <a:solidFill>
+                            <a:srgbClr val="222222"/>
+                          </a:solidFill>
+                        </a:rPr>
+                        <a:t>102</a:t>
+                      </a:r>
+                      <a:endParaRPr sz="1200"/>
+                    </a:p>
+                  </a:txBody>
+                  <a:tcPr marL="73152" marR="73152" marT="27432" marB="27432" anchor="ctr">
+                    <a:lnL w="0">
+                      <a:noFill/>
+                    </a:lnL>
+                    <a:lnR w="0">
+                      <a:noFill/>
+                    </a:lnR>
+                    <a:lnT w="0">
+                      <a:noFill/>
+                    </a:lnT>
+                    <a:lnB w="0">
+                      <a:noFill/>
+                    </a:lnB>
+                    <a:noFill/>
+                  </a:tcPr>
+                </a:tc>
+                <a:tc>
+                  <a:txBody>
+                    <a:bodyPr wrap="square"/>
+                    <a:lstStyle/>
+                    <a:p>
+                      <a:pPr algn="r"/>
+                      <a:r>
+                        <a:rPr sz="1200" b="0" i="0">
+                          <a:solidFill>
+                            <a:srgbClr val="222222"/>
+                          </a:solidFill>
+                        </a:rPr>
+                        <a:t>6.1</a:t>
+                      </a:r>
+                      <a:endParaRPr sz="1200"/>
+                    </a:p>
+                  </a:txBody>
+                  <a:tcPr marL="73152" marR="73152" marT="27432" marB="27432" anchor="ctr">
+                    <a:lnL w="0">
+                      <a:noFill/>
+                    </a:lnL>
+                    <a:lnR w="0">
+                      <a:noFill/>
+                    </a:lnR>
+                    <a:lnT w="0">
+                      <a:noFill/>
+                    </a:lnT>
+                    <a:lnB w="0">
+                      <a:noFill/>
+                    </a:lnB>
+                    <a:noFill/>
+                  </a:tcPr>
+                </a:tc>
+                <a:tc>
+                  <a:txBody>
+                    <a:bodyPr wrap="square"/>
+                    <a:lstStyle/>
+                    <a:p>
+                      <a:pPr algn="r"/>
+                      <a:r>
+                        <a:rPr sz="1200" b="0" i="0">
+                          <a:solidFill>
+                            <a:srgbClr val="222222"/>
+                          </a:solidFill>
+                        </a:rPr>
+                        <a:t>6.1</a:t>
+                      </a:r>
+                      <a:endParaRPr sz="1200"/>
+                    </a:p>
+                  </a:txBody>
+                  <a:tcPr marL="73152" marR="73152" marT="27432" marB="27432" anchor="ctr">
+                    <a:lnL w="0">
+                      <a:noFill/>
+                    </a:lnL>
+                    <a:lnR w="0">
+                      <a:noFill/>
+                    </a:lnR>
+                    <a:lnT w="0">
+                      <a:noFill/>
+                    </a:lnT>
+                    <a:lnB w="0">
+                      <a:noFill/>
+                    </a:lnB>
+                    <a:noFill/>
+                  </a:tcPr>
+                </a:tc>
+                <a:tc>
+                  <a:txBody>
+                    <a:bodyPr wrap="square"/>
+                    <a:lstStyle/>
+                    <a:p>
+                      <a:pPr algn="r"/>
+                      <a:r>
+                        <a:rPr sz="1200" b="0" i="0">
+                          <a:solidFill>
+                            <a:srgbClr val="222222"/>
+                          </a:solidFill>
+                        </a:rPr>
+                        <a:t>13.0</a:t>
+                      </a:r>
+                      <a:endParaRPr sz="1200"/>
+                    </a:p>
+                  </a:txBody>
+                  <a:tcPr marL="73152" marR="73152" marT="27432" marB="27432" anchor="ctr">
+                    <a:lnL w="0">
+                      <a:noFill/>
+                    </a:lnL>
+                    <a:lnR w="0">
+                      <a:noFill/>
+                    </a:lnR>
+                    <a:lnT w="0">
+                      <a:noFill/>
+                    </a:lnT>
+                    <a:lnB w="0">
+                      <a:noFill/>
+                    </a:lnB>
+                    <a:noFill/>
+                  </a:tcPr>
+                </a:tc>
+              </a:tr>
+              <a:tr h="260603">
+                <a:tc>
+                  <a:txBody>
+                    <a:bodyPr wrap="square"/>
+                    <a:lstStyle/>
+                    <a:p>
+                      <a:pPr algn="l"/>
+                      <a:r>
+                        <a:rPr sz="1200" b="0" i="0">
+                          <a:solidFill>
+                            <a:srgbClr val="222222"/>
+                          </a:solidFill>
+                        </a:rPr>
+                        <a:t>3</a:t>
+                      </a:r>
+                      <a:endParaRPr sz="1200"/>
+                    </a:p>
+                  </a:txBody>
+                  <a:tcPr marL="73152" marR="73152" marT="27432" marB="27432" anchor="ctr">
+                    <a:lnL w="0">
+                      <a:noFill/>
+                    </a:lnL>
+                    <a:lnR w="0">
+                      <a:noFill/>
+                    </a:lnR>
+                    <a:lnT w="0">
+                      <a:noFill/>
+                    </a:lnT>
+                    <a:lnB w="0">
+                      <a:noFill/>
+                    </a:lnB>
+                    <a:noFill/>
+                  </a:tcPr>
+                </a:tc>
+                <a:tc>
+                  <a:txBody>
+                    <a:bodyPr wrap="square"/>
+                    <a:lstStyle/>
+                    <a:p>
+                      <a:pPr algn="r"/>
+                      <a:r>
+                        <a:rPr sz="1200" b="0" i="0">
+                          <a:solidFill>
+                            <a:srgbClr val="222222"/>
+                          </a:solidFill>
+                        </a:rPr>
+                        <a:t>146</a:t>
+                      </a:r>
+                      <a:endParaRPr sz="1200"/>
+                    </a:p>
+                  </a:txBody>
+                  <a:tcPr marL="73152" marR="73152" marT="27432" marB="27432" anchor="ctr">
+                    <a:lnL w="0">
+                      <a:noFill/>
+                    </a:lnL>
+                    <a:lnR w="0">
+                      <a:noFill/>
+                    </a:lnR>
+                    <a:lnT w="0">
+                      <a:noFill/>
+                    </a:lnT>
+                    <a:lnB w="0">
+                      <a:noFill/>
+                    </a:lnB>
+                    <a:noFill/>
+                  </a:tcPr>
+                </a:tc>
+                <a:tc>
+                  <a:txBody>
+                    <a:bodyPr wrap="square"/>
+                    <a:lstStyle/>
+                    <a:p>
+                      <a:pPr algn="r"/>
+                      <a:r>
+                        <a:rPr sz="1200" b="0" i="0">
+                          <a:solidFill>
+                            <a:srgbClr val="222222"/>
+                          </a:solidFill>
+                        </a:rPr>
+                        <a:t>8.7</a:t>
+                      </a:r>
+                      <a:endParaRPr sz="1200"/>
+                    </a:p>
+                  </a:txBody>
+                  <a:tcPr marL="73152" marR="73152" marT="27432" marB="27432" anchor="ctr">
+                    <a:lnL w="0">
+                      <a:noFill/>
+                    </a:lnL>
+                    <a:lnR w="0">
+                      <a:noFill/>
+                    </a:lnR>
+                    <a:lnT w="0">
+                      <a:noFill/>
+                    </a:lnT>
+                    <a:lnB w="0">
+                      <a:noFill/>
+                    </a:lnB>
+                    <a:noFill/>
+                  </a:tcPr>
+                </a:tc>
+                <a:tc>
+                  <a:txBody>
+                    <a:bodyPr wrap="square"/>
+                    <a:lstStyle/>
+                    <a:p>
+                      <a:pPr algn="r"/>
+                      <a:r>
+                        <a:rPr sz="1200" b="0" i="0">
+                          <a:solidFill>
+                            <a:srgbClr val="222222"/>
+                          </a:solidFill>
+                        </a:rPr>
+                        <a:t>8.7</a:t>
+                      </a:r>
+                      <a:endParaRPr sz="1200"/>
+                    </a:p>
+                  </a:txBody>
+                  <a:tcPr marL="73152" marR="73152" marT="27432" marB="27432" anchor="ctr">
+                    <a:lnL w="0">
+                      <a:noFill/>
+                    </a:lnL>
+                    <a:lnR w="0">
+                      <a:noFill/>
+                    </a:lnR>
+                    <a:lnT w="0">
+                      <a:noFill/>
+                    </a:lnT>
+                    <a:lnB w="0">
+                      <a:noFill/>
+                    </a:lnB>
+                    <a:noFill/>
+                  </a:tcPr>
+                </a:tc>
+                <a:tc>
+                  <a:txBody>
+                    <a:bodyPr wrap="square"/>
+                    <a:lstStyle/>
+                    <a:p>
+                      <a:pPr algn="r"/>
+                      <a:r>
+                        <a:rPr sz="1200" b="0" i="0">
+                          <a:solidFill>
+                            <a:srgbClr val="222222"/>
+                          </a:solidFill>
+                        </a:rPr>
+                        <a:t>21.7</a:t>
+                      </a:r>
+                      <a:endParaRPr sz="1200"/>
+                    </a:p>
+                  </a:txBody>
+                  <a:tcPr marL="73152" marR="73152" marT="27432" marB="27432" anchor="ctr">
+                    <a:lnL w="0">
+                      <a:noFill/>
+                    </a:lnL>
+                    <a:lnR w="0">
+                      <a:noFill/>
+                    </a:lnR>
+                    <a:lnT w="0">
+                      <a:noFill/>
+                    </a:lnT>
+                    <a:lnB w="0">
+                      <a:noFill/>
+                    </a:lnB>
+                    <a:noFill/>
+                  </a:tcPr>
+                </a:tc>
+              </a:tr>
+              <a:tr h="260603">
+                <a:tc>
+                  <a:txBody>
+                    <a:bodyPr wrap="square"/>
+                    <a:lstStyle/>
+                    <a:p>
+                      <a:pPr algn="l"/>
+                      <a:r>
+                        <a:rPr sz="1200" b="0" i="0">
+                          <a:solidFill>
+                            <a:srgbClr val="222222"/>
+                          </a:solidFill>
+                        </a:rPr>
+                        <a:t>4</a:t>
+                      </a:r>
+                      <a:endParaRPr sz="1200"/>
+                    </a:p>
+                  </a:txBody>
+                  <a:tcPr marL="73152" marR="73152" marT="27432" marB="27432" anchor="ctr">
+                    <a:lnL w="0">
+                      <a:noFill/>
+                    </a:lnL>
+                    <a:lnR w="0">
+                      <a:noFill/>
+                    </a:lnR>
+                    <a:lnT w="0">
+                      <a:noFill/>
+                    </a:lnT>
+                    <a:lnB w="0">
+                      <a:noFill/>
+                    </a:lnB>
+                    <a:noFill/>
+                  </a:tcPr>
+                </a:tc>
+                <a:tc>
+                  <a:txBody>
+                    <a:bodyPr wrap="square"/>
+                    <a:lstStyle/>
+                    <a:p>
+                      <a:pPr algn="r"/>
+                      <a:r>
+                        <a:rPr sz="1200" b="0" i="0">
+                          <a:solidFill>
+                            <a:srgbClr val="222222"/>
+                          </a:solidFill>
+                        </a:rPr>
+                        <a:t>117</a:t>
+                      </a:r>
+                      <a:endParaRPr sz="1200"/>
+                    </a:p>
+                  </a:txBody>
+                  <a:tcPr marL="73152" marR="73152" marT="27432" marB="27432" anchor="ctr">
+                    <a:lnL w="0">
+                      <a:noFill/>
+                    </a:lnL>
+                    <a:lnR w="0">
+                      <a:noFill/>
+                    </a:lnR>
+                    <a:lnT w="0">
+                      <a:noFill/>
+                    </a:lnT>
+                    <a:lnB w="0">
+                      <a:noFill/>
+                    </a:lnB>
+                    <a:noFill/>
+                  </a:tcPr>
+                </a:tc>
+                <a:tc>
+                  <a:txBody>
+                    <a:bodyPr wrap="square"/>
+                    <a:lstStyle/>
+                    <a:p>
+                      <a:pPr algn="r"/>
+                      <a:r>
+                        <a:rPr sz="1200" b="0" i="0">
+                          <a:solidFill>
+                            <a:srgbClr val="222222"/>
+                          </a:solidFill>
+                        </a:rPr>
+                        <a:t>6.9</a:t>
+                      </a:r>
+                      <a:endParaRPr sz="1200"/>
+                    </a:p>
+                  </a:txBody>
+                  <a:tcPr marL="73152" marR="73152" marT="27432" marB="27432" anchor="ctr">
+                    <a:lnL w="0">
+                      <a:noFill/>
+                    </a:lnL>
+                    <a:lnR w="0">
+                      <a:noFill/>
+                    </a:lnR>
+                    <a:lnT w="0">
+                      <a:noFill/>
+                    </a:lnT>
+                    <a:lnB w="0">
+                      <a:noFill/>
+                    </a:lnB>
+                    <a:noFill/>
+                  </a:tcPr>
+                </a:tc>
+                <a:tc>
+                  <a:txBody>
+                    <a:bodyPr wrap="square"/>
+                    <a:lstStyle/>
+                    <a:p>
+                      <a:pPr algn="r"/>
+                      <a:r>
+                        <a:rPr sz="1200" b="0" i="0">
+                          <a:solidFill>
+                            <a:srgbClr val="222222"/>
+                          </a:solidFill>
+                        </a:rPr>
+                        <a:t>7.0</a:t>
+                      </a:r>
+                      <a:endParaRPr sz="1200"/>
+                    </a:p>
+                  </a:txBody>
+                  <a:tcPr marL="73152" marR="73152" marT="27432" marB="27432" anchor="ctr">
+                    <a:lnL w="0">
+                      <a:noFill/>
+                    </a:lnL>
+                    <a:lnR w="0">
+                      <a:noFill/>
+                    </a:lnR>
+                    <a:lnT w="0">
+                      <a:noFill/>
+                    </a:lnT>
+                    <a:lnB w="0">
+                      <a:noFill/>
+                    </a:lnB>
+                    <a:noFill/>
+                  </a:tcPr>
+                </a:tc>
+                <a:tc>
+                  <a:txBody>
+                    <a:bodyPr wrap="square"/>
+                    <a:lstStyle/>
+                    <a:p>
+                      <a:pPr algn="r"/>
+                      <a:r>
+                        <a:rPr sz="1200" b="0" i="0">
+                          <a:solidFill>
+                            <a:srgbClr val="222222"/>
+                          </a:solidFill>
+                        </a:rPr>
+                        <a:t>28.7</a:t>
+                      </a:r>
+                      <a:endParaRPr sz="1200"/>
+                    </a:p>
+                  </a:txBody>
+                  <a:tcPr marL="73152" marR="73152" marT="27432" marB="27432" anchor="ctr">
+                    <a:lnL w="0">
+                      <a:noFill/>
+                    </a:lnL>
+                    <a:lnR w="0">
+                      <a:noFill/>
+                    </a:lnR>
+                    <a:lnT w="0">
+                      <a:noFill/>
+                    </a:lnT>
+                    <a:lnB w="0">
+                      <a:noFill/>
+                    </a:lnB>
+                    <a:noFill/>
+                  </a:tcPr>
+                </a:tc>
+              </a:tr>
+              <a:tr h="260603">
+                <a:tc>
+                  <a:txBody>
+                    <a:bodyPr wrap="square"/>
+                    <a:lstStyle/>
+                    <a:p>
+                      <a:pPr algn="l"/>
+                      <a:r>
+                        <a:rPr sz="1200" b="0" i="0">
+                          <a:solidFill>
+                            <a:srgbClr val="222222"/>
+                          </a:solidFill>
+                        </a:rPr>
+                        <a:t>5</a:t>
+                      </a:r>
+                      <a:endParaRPr sz="1200"/>
+                    </a:p>
+                  </a:txBody>
+                  <a:tcPr marL="73152" marR="73152" marT="27432" marB="27432" anchor="ctr">
+                    <a:lnL w="0">
+                      <a:noFill/>
+                    </a:lnL>
+                    <a:lnR w="0">
+                      <a:noFill/>
+                    </a:lnR>
+                    <a:lnT w="0">
+                      <a:noFill/>
+                    </a:lnT>
+                    <a:lnB w="0">
+                      <a:noFill/>
+                    </a:lnB>
+                    <a:noFill/>
+                  </a:tcPr>
+                </a:tc>
+                <a:tc>
+                  <a:txBody>
+                    <a:bodyPr wrap="square"/>
+                    <a:lstStyle/>
+                    <a:p>
+                      <a:pPr algn="r"/>
+                      <a:r>
+                        <a:rPr sz="1200" b="0" i="0">
+                          <a:solidFill>
+                            <a:srgbClr val="222222"/>
+                          </a:solidFill>
+                        </a:rPr>
+                        <a:t>329</a:t>
+                      </a:r>
+                      <a:endParaRPr sz="1200"/>
+                    </a:p>
+                  </a:txBody>
+                  <a:tcPr marL="73152" marR="73152" marT="27432" marB="27432" anchor="ctr">
+                    <a:lnL w="0">
+                      <a:noFill/>
+                    </a:lnL>
+                    <a:lnR w="0">
+                      <a:noFill/>
+                    </a:lnR>
+                    <a:lnT w="0">
+                      <a:noFill/>
+                    </a:lnT>
+                    <a:lnB w="0">
+                      <a:noFill/>
+                    </a:lnB>
+                    <a:noFill/>
+                  </a:tcPr>
+                </a:tc>
+                <a:tc>
+                  <a:txBody>
+                    <a:bodyPr wrap="square"/>
+                    <a:lstStyle/>
+                    <a:p>
+                      <a:pPr algn="r"/>
+                      <a:r>
+                        <a:rPr sz="1200" b="0" i="0">
+                          <a:solidFill>
+                            <a:srgbClr val="222222"/>
+                          </a:solidFill>
+                        </a:rPr>
+                        <a:t>19.5</a:t>
+                      </a:r>
+                      <a:endParaRPr sz="1200"/>
+                    </a:p>
+                  </a:txBody>
+                  <a:tcPr marL="73152" marR="73152" marT="27432" marB="27432" anchor="ctr">
+                    <a:lnL w="0">
+                      <a:noFill/>
+                    </a:lnL>
+                    <a:lnR w="0">
+                      <a:noFill/>
+                    </a:lnR>
+                    <a:lnT w="0">
+                      <a:noFill/>
+                    </a:lnT>
+                    <a:lnB w="0">
+                      <a:noFill/>
+                    </a:lnB>
+                    <a:noFill/>
+                  </a:tcPr>
+                </a:tc>
+                <a:tc>
+                  <a:txBody>
+                    <a:bodyPr wrap="square"/>
+                    <a:lstStyle/>
+                    <a:p>
+                      <a:pPr algn="r"/>
+                      <a:r>
+                        <a:rPr sz="1200" b="0" i="0">
+                          <a:solidFill>
+                            <a:srgbClr val="222222"/>
+                          </a:solidFill>
+                        </a:rPr>
+                        <a:t>19.6</a:t>
+                      </a:r>
+                      <a:endParaRPr sz="1200"/>
+                    </a:p>
+                  </a:txBody>
+                  <a:tcPr marL="73152" marR="73152" marT="27432" marB="27432" anchor="ctr">
+                    <a:lnL w="0">
+                      <a:noFill/>
+                    </a:lnL>
+                    <a:lnR w="0">
+                      <a:noFill/>
+                    </a:lnR>
+                    <a:lnT w="0">
+                      <a:noFill/>
+                    </a:lnT>
+                    <a:lnB w="0">
+                      <a:noFill/>
+                    </a:lnB>
+                    <a:noFill/>
+                  </a:tcPr>
+                </a:tc>
+                <a:tc>
+                  <a:txBody>
+                    <a:bodyPr wrap="square"/>
+                    <a:lstStyle/>
+                    <a:p>
+                      <a:pPr algn="r"/>
+                      <a:r>
+                        <a:rPr sz="1200" b="0" i="0">
+                          <a:solidFill>
+                            <a:srgbClr val="222222"/>
+                          </a:solidFill>
+                        </a:rPr>
+                        <a:t>48.3</a:t>
+                      </a:r>
+                      <a:endParaRPr sz="1200"/>
+                    </a:p>
+                  </a:txBody>
+                  <a:tcPr marL="73152" marR="73152" marT="27432" marB="27432" anchor="ctr">
+                    <a:lnL w="0">
+                      <a:noFill/>
+                    </a:lnL>
+                    <a:lnR w="0">
+                      <a:noFill/>
+                    </a:lnR>
+                    <a:lnT w="0">
+                      <a:noFill/>
+                    </a:lnT>
+                    <a:lnB w="0">
+                      <a:noFill/>
+                    </a:lnB>
+                    <a:noFill/>
+                  </a:tcPr>
+                </a:tc>
+              </a:tr>
+              <a:tr h="260603">
+                <a:tc>
+                  <a:txBody>
+                    <a:bodyPr wrap="square"/>
+                    <a:lstStyle/>
+                    <a:p>
+                      <a:pPr algn="l"/>
+                      <a:r>
+                        <a:rPr sz="1200" b="0" i="0">
+                          <a:solidFill>
+                            <a:srgbClr val="222222"/>
+                          </a:solidFill>
+                        </a:rPr>
+                        <a:t>6</a:t>
+                      </a:r>
+                      <a:endParaRPr sz="1200"/>
+                    </a:p>
+                  </a:txBody>
+                  <a:tcPr marL="73152" marR="73152" marT="27432" marB="27432" anchor="ctr">
+                    <a:lnL w="0">
+                      <a:noFill/>
+                    </a:lnL>
+                    <a:lnR w="0">
+                      <a:noFill/>
+                    </a:lnR>
+                    <a:lnT w="0">
+                      <a:noFill/>
+                    </a:lnT>
+                    <a:lnB w="0">
+                      <a:noFill/>
+                    </a:lnB>
+                    <a:noFill/>
+                  </a:tcPr>
+                </a:tc>
+                <a:tc>
+                  <a:txBody>
+                    <a:bodyPr wrap="square"/>
+                    <a:lstStyle/>
+                    <a:p>
+                      <a:pPr algn="r"/>
+                      <a:r>
+                        <a:rPr sz="1200" b="0" i="0">
+                          <a:solidFill>
+                            <a:srgbClr val="222222"/>
+                          </a:solidFill>
+                        </a:rPr>
+                        <a:t>231</a:t>
+                      </a:r>
+                      <a:endParaRPr sz="1200"/>
+                    </a:p>
+                  </a:txBody>
+                  <a:tcPr marL="73152" marR="73152" marT="27432" marB="27432" anchor="ctr">
+                    <a:lnL w="0">
+                      <a:noFill/>
+                    </a:lnL>
+                    <a:lnR w="0">
+                      <a:noFill/>
+                    </a:lnR>
+                    <a:lnT w="0">
+                      <a:noFill/>
+                    </a:lnT>
+                    <a:lnB w="0">
+                      <a:noFill/>
+                    </a:lnB>
+                    <a:noFill/>
+                  </a:tcPr>
+                </a:tc>
+                <a:tc>
+                  <a:txBody>
+                    <a:bodyPr wrap="square"/>
+                    <a:lstStyle/>
+                    <a:p>
+                      <a:pPr algn="r"/>
+                      <a:r>
+                        <a:rPr sz="1200" b="0" i="0">
+                          <a:solidFill>
+                            <a:srgbClr val="222222"/>
+                          </a:solidFill>
+                        </a:rPr>
+                        <a:t>13.7</a:t>
+                      </a:r>
+                      <a:endParaRPr sz="1200"/>
+                    </a:p>
+                  </a:txBody>
+                  <a:tcPr marL="73152" marR="73152" marT="27432" marB="27432" anchor="ctr">
+                    <a:lnL w="0">
+                      <a:noFill/>
+                    </a:lnL>
+                    <a:lnR w="0">
+                      <a:noFill/>
+                    </a:lnR>
+                    <a:lnT w="0">
+                      <a:noFill/>
+                    </a:lnT>
+                    <a:lnB w="0">
+                      <a:noFill/>
+                    </a:lnB>
+                    <a:noFill/>
+                  </a:tcPr>
+                </a:tc>
+                <a:tc>
+                  <a:txBody>
+                    <a:bodyPr wrap="square"/>
+                    <a:lstStyle/>
+                    <a:p>
+                      <a:pPr algn="r"/>
+                      <a:r>
+                        <a:rPr sz="1200" b="0" i="0">
+                          <a:solidFill>
+                            <a:srgbClr val="222222"/>
+                          </a:solidFill>
+                        </a:rPr>
+                        <a:t>13.8</a:t>
+                      </a:r>
+                      <a:endParaRPr sz="1200"/>
+                    </a:p>
+                  </a:txBody>
+                  <a:tcPr marL="73152" marR="73152" marT="27432" marB="27432" anchor="ctr">
+                    <a:lnL w="0">
+                      <a:noFill/>
+                    </a:lnL>
+                    <a:lnR w="0">
+                      <a:noFill/>
+                    </a:lnR>
+                    <a:lnT w="0">
+                      <a:noFill/>
+                    </a:lnT>
+                    <a:lnB w="0">
+                      <a:noFill/>
+                    </a:lnB>
+                    <a:noFill/>
+                  </a:tcPr>
+                </a:tc>
+                <a:tc>
+                  <a:txBody>
+                    <a:bodyPr wrap="square"/>
+                    <a:lstStyle/>
+                    <a:p>
+                      <a:pPr algn="r"/>
+                      <a:r>
+                        <a:rPr sz="1200" b="0" i="0">
+                          <a:solidFill>
+                            <a:srgbClr val="222222"/>
+                          </a:solidFill>
+                        </a:rPr>
+                        <a:t>62.0</a:t>
+                      </a:r>
+                      <a:endParaRPr sz="1200"/>
+                    </a:p>
+                  </a:txBody>
+                  <a:tcPr marL="73152" marR="73152" marT="27432" marB="27432" anchor="ctr">
+                    <a:lnL w="0">
+                      <a:noFill/>
+                    </a:lnL>
+                    <a:lnR w="0">
+                      <a:noFill/>
+                    </a:lnR>
+                    <a:lnT w="0">
+                      <a:noFill/>
+                    </a:lnT>
+                    <a:lnB w="0">
+                      <a:noFill/>
+                    </a:lnB>
+                    <a:noFill/>
+                  </a:tcPr>
+                </a:tc>
+              </a:tr>
+              <a:tr h="260603">
+                <a:tc>
+                  <a:txBody>
+                    <a:bodyPr wrap="square"/>
+                    <a:lstStyle/>
+                    <a:p>
+                      <a:pPr algn="l"/>
+                      <a:r>
+                        <a:rPr sz="1200" b="0" i="0">
+                          <a:solidFill>
+                            <a:srgbClr val="222222"/>
+                          </a:solidFill>
+                        </a:rPr>
+                        <a:t>7</a:t>
+                      </a:r>
+                      <a:endParaRPr sz="1200"/>
+                    </a:p>
+                  </a:txBody>
+                  <a:tcPr marL="73152" marR="73152" marT="27432" marB="27432" anchor="ctr">
+                    <a:lnL w="0">
+                      <a:noFill/>
+                    </a:lnL>
+                    <a:lnR w="0">
+                      <a:noFill/>
+                    </a:lnR>
+                    <a:lnT w="0">
+                      <a:noFill/>
+                    </a:lnT>
+                    <a:lnB w="0">
+                      <a:noFill/>
+                    </a:lnB>
+                    <a:noFill/>
+                  </a:tcPr>
+                </a:tc>
+                <a:tc>
+                  <a:txBody>
+                    <a:bodyPr wrap="square"/>
+                    <a:lstStyle/>
+                    <a:p>
+                      <a:pPr algn="r"/>
+                      <a:r>
+                        <a:rPr sz="1200" b="0" i="0">
+                          <a:solidFill>
+                            <a:srgbClr val="222222"/>
+                          </a:solidFill>
+                        </a:rPr>
+                        <a:t>339</a:t>
+                      </a:r>
+                      <a:endParaRPr sz="1200"/>
+                    </a:p>
+                  </a:txBody>
+                  <a:tcPr marL="73152" marR="73152" marT="27432" marB="27432" anchor="ctr">
+                    <a:lnL w="0">
+                      <a:noFill/>
+                    </a:lnL>
+                    <a:lnR w="0">
+                      <a:noFill/>
+                    </a:lnR>
+                    <a:lnT w="0">
+                      <a:noFill/>
+                    </a:lnT>
+                    <a:lnB w="0">
+                      <a:noFill/>
+                    </a:lnB>
+                    <a:noFill/>
+                  </a:tcPr>
+                </a:tc>
+                <a:tc>
+                  <a:txBody>
+                    <a:bodyPr wrap="square"/>
+                    <a:lstStyle/>
+                    <a:p>
+                      <a:pPr algn="r"/>
+                      <a:r>
+                        <a:rPr sz="1200" b="0" i="0">
+                          <a:solidFill>
+                            <a:srgbClr val="222222"/>
+                          </a:solidFill>
+                        </a:rPr>
+                        <a:t>20.1</a:t>
+                      </a:r>
+                      <a:endParaRPr sz="1200"/>
+                    </a:p>
+                  </a:txBody>
+                  <a:tcPr marL="73152" marR="73152" marT="27432" marB="27432" anchor="ctr">
+                    <a:lnL w="0">
+                      <a:noFill/>
+                    </a:lnL>
+                    <a:lnR w="0">
+                      <a:noFill/>
+                    </a:lnR>
+                    <a:lnT w="0">
+                      <a:noFill/>
+                    </a:lnT>
+                    <a:lnB w="0">
+                      <a:noFill/>
+                    </a:lnB>
+                    <a:noFill/>
+                  </a:tcPr>
+                </a:tc>
+                <a:tc>
+                  <a:txBody>
+                    <a:bodyPr wrap="square"/>
+                    <a:lstStyle/>
+                    <a:p>
+                      <a:pPr algn="r"/>
+                      <a:r>
+                        <a:rPr sz="1200" b="0" i="0">
+                          <a:solidFill>
+                            <a:srgbClr val="222222"/>
+                          </a:solidFill>
+                        </a:rPr>
+                        <a:t>20.2</a:t>
+                      </a:r>
+                      <a:endParaRPr sz="1200"/>
+                    </a:p>
+                  </a:txBody>
+                  <a:tcPr marL="73152" marR="73152" marT="27432" marB="27432" anchor="ctr">
+                    <a:lnL w="0">
+                      <a:noFill/>
+                    </a:lnL>
+                    <a:lnR w="0">
+                      <a:noFill/>
+                    </a:lnR>
+                    <a:lnT w="0">
+                      <a:noFill/>
+                    </a:lnT>
+                    <a:lnB w="0">
+                      <a:noFill/>
+                    </a:lnB>
+                    <a:noFill/>
+                  </a:tcPr>
+                </a:tc>
+                <a:tc>
+                  <a:txBody>
+                    <a:bodyPr wrap="square"/>
+                    <a:lstStyle/>
+                    <a:p>
+                      <a:pPr algn="r"/>
+                      <a:r>
+                        <a:rPr sz="1200" b="0" i="0">
+                          <a:solidFill>
+                            <a:srgbClr val="222222"/>
+                          </a:solidFill>
+                        </a:rPr>
+                        <a:t>82.2</a:t>
+                      </a:r>
+                      <a:endParaRPr sz="1200"/>
+                    </a:p>
+                  </a:txBody>
+                  <a:tcPr marL="73152" marR="73152" marT="27432" marB="27432" anchor="ctr">
+                    <a:lnL w="0">
+                      <a:noFill/>
+                    </a:lnL>
+                    <a:lnR w="0">
+                      <a:noFill/>
+                    </a:lnR>
+                    <a:lnT w="0">
+                      <a:noFill/>
+                    </a:lnT>
+                    <a:lnB w="0">
+                      <a:noFill/>
+                    </a:lnB>
+                    <a:noFill/>
+                  </a:tcPr>
+                </a:tc>
+              </a:tr>
+              <a:tr h="260603">
+                <a:tc>
+                  <a:txBody>
+                    <a:bodyPr wrap="square"/>
+                    <a:lstStyle/>
+                    <a:p>
+                      <a:pPr algn="l"/>
+                      <a:r>
+                        <a:rPr sz="1200" b="0" i="0">
+                          <a:solidFill>
+                            <a:srgbClr val="222222"/>
+                          </a:solidFill>
+                        </a:rPr>
+                        <a:t>8</a:t>
+                      </a:r>
+                      <a:endParaRPr sz="1200"/>
+                    </a:p>
+                  </a:txBody>
+                  <a:tcPr marL="73152" marR="73152" marT="27432" marB="27432" anchor="ctr">
+                    <a:lnL w="0">
+                      <a:noFill/>
+                    </a:lnL>
+                    <a:lnR w="0">
+                      <a:noFill/>
+                    </a:lnR>
+                    <a:lnT w="0">
+                      <a:noFill/>
+                    </a:lnT>
+                    <a:lnB w="0">
+                      <a:noFill/>
+                    </a:lnB>
+                    <a:noFill/>
+                  </a:tcPr>
+                </a:tc>
+                <a:tc>
+                  <a:txBody>
+                    <a:bodyPr wrap="square"/>
+                    <a:lstStyle/>
+                    <a:p>
+                      <a:pPr algn="r"/>
+                      <a:r>
+                        <a:rPr sz="1200" b="0" i="0">
+                          <a:solidFill>
+                            <a:srgbClr val="222222"/>
+                          </a:solidFill>
+                        </a:rPr>
+                        <a:t>219</a:t>
+                      </a:r>
+                      <a:endParaRPr sz="1200"/>
+                    </a:p>
+                  </a:txBody>
+                  <a:tcPr marL="73152" marR="73152" marT="27432" marB="27432" anchor="ctr">
+                    <a:lnL w="0">
+                      <a:noFill/>
+                    </a:lnL>
+                    <a:lnR w="0">
+                      <a:noFill/>
+                    </a:lnR>
+                    <a:lnT w="0">
+                      <a:noFill/>
+                    </a:lnT>
+                    <a:lnB w="0">
+                      <a:noFill/>
+                    </a:lnB>
+                    <a:noFill/>
+                  </a:tcPr>
+                </a:tc>
+                <a:tc>
+                  <a:txBody>
+                    <a:bodyPr wrap="square"/>
+                    <a:lstStyle/>
+                    <a:p>
+                      <a:pPr algn="r"/>
+                      <a:r>
+                        <a:rPr sz="1200" b="0" i="0">
+                          <a:solidFill>
+                            <a:srgbClr val="222222"/>
+                          </a:solidFill>
+                        </a:rPr>
+                        <a:t>13.0</a:t>
+                      </a:r>
+                      <a:endParaRPr sz="1200"/>
+                    </a:p>
+                  </a:txBody>
+                  <a:tcPr marL="73152" marR="73152" marT="27432" marB="27432" anchor="ctr">
+                    <a:lnL w="0">
+                      <a:noFill/>
+                    </a:lnL>
+                    <a:lnR w="0">
+                      <a:noFill/>
+                    </a:lnR>
+                    <a:lnT w="0">
+                      <a:noFill/>
+                    </a:lnT>
+                    <a:lnB w="0">
+                      <a:noFill/>
+                    </a:lnB>
+                    <a:noFill/>
+                  </a:tcPr>
+                </a:tc>
+                <a:tc>
+                  <a:txBody>
+                    <a:bodyPr wrap="square"/>
+                    <a:lstStyle/>
+                    <a:p>
+                      <a:pPr algn="r"/>
+                      <a:r>
+                        <a:rPr sz="1200" b="0" i="0">
+                          <a:solidFill>
+                            <a:srgbClr val="222222"/>
+                          </a:solidFill>
+                        </a:rPr>
+                        <a:t>13.0</a:t>
+                      </a:r>
+                      <a:endParaRPr sz="1200"/>
+                    </a:p>
+                  </a:txBody>
+                  <a:tcPr marL="73152" marR="73152" marT="27432" marB="27432" anchor="ctr">
+                    <a:lnL w="0">
+                      <a:noFill/>
+                    </a:lnL>
+                    <a:lnR w="0">
+                      <a:noFill/>
+                    </a:lnR>
+                    <a:lnT w="0">
+                      <a:noFill/>
+                    </a:lnT>
+                    <a:lnB w="0">
+                      <a:noFill/>
+                    </a:lnB>
+                    <a:noFill/>
+                  </a:tcPr>
+                </a:tc>
+                <a:tc>
+                  <a:txBody>
+                    <a:bodyPr wrap="square"/>
+                    <a:lstStyle/>
+                    <a:p>
+                      <a:pPr algn="r"/>
+                      <a:r>
+                        <a:rPr sz="1200" b="0" i="0">
+                          <a:solidFill>
+                            <a:srgbClr val="222222"/>
+                          </a:solidFill>
+                        </a:rPr>
+                        <a:t>95.2</a:t>
+                      </a:r>
+                      <a:endParaRPr sz="1200"/>
+                    </a:p>
+                  </a:txBody>
+                  <a:tcPr marL="73152" marR="73152" marT="27432" marB="27432" anchor="ctr">
+                    <a:lnL w="0">
+                      <a:noFill/>
+                    </a:lnL>
+                    <a:lnR w="0">
+                      <a:noFill/>
+                    </a:lnR>
+                    <a:lnT w="0">
+                      <a:noFill/>
+                    </a:lnT>
+                    <a:lnB w="0">
+                      <a:noFill/>
+                    </a:lnB>
+                    <a:noFill/>
+                  </a:tcPr>
+                </a:tc>
+              </a:tr>
+              <a:tr h="260603">
+                <a:tc>
+                  <a:txBody>
+                    <a:bodyPr wrap="square"/>
+                    <a:lstStyle/>
+                    <a:p>
+                      <a:pPr algn="l"/>
+                      <a:r>
+                        <a:rPr sz="1200" b="0" i="0">
+                          <a:solidFill>
+                            <a:srgbClr val="222222"/>
+                          </a:solidFill>
+                        </a:rPr>
+                        <a:t>9</a:t>
+                      </a:r>
+                      <a:endParaRPr sz="1200"/>
+                    </a:p>
+                  </a:txBody>
+                  <a:tcPr marL="73152" marR="73152" marT="27432" marB="27432" anchor="ctr">
+                    <a:lnL w="0">
+                      <a:noFill/>
+                    </a:lnL>
+                    <a:lnR w="0">
+                      <a:noFill/>
+                    </a:lnR>
+                    <a:lnT w="0">
+                      <a:noFill/>
+                    </a:lnT>
+                    <a:lnB w="0">
+                      <a:noFill/>
+                    </a:lnB>
+                    <a:noFill/>
+                  </a:tcPr>
+                </a:tc>
+                <a:tc>
+                  <a:txBody>
+                    <a:bodyPr wrap="square"/>
+                    <a:lstStyle/>
+                    <a:p>
+                      <a:pPr algn="r"/>
+                      <a:r>
+                        <a:rPr sz="1200" b="0" i="0">
+                          <a:solidFill>
+                            <a:srgbClr val="222222"/>
+                          </a:solidFill>
+                        </a:rPr>
+                        <a:t>49</a:t>
+                      </a:r>
+                      <a:endParaRPr sz="1200"/>
+                    </a:p>
+                  </a:txBody>
+                  <a:tcPr marL="73152" marR="73152" marT="27432" marB="27432" anchor="ctr">
+                    <a:lnL w="0">
+                      <a:noFill/>
+                    </a:lnL>
+                    <a:lnR w="0">
+                      <a:noFill/>
+                    </a:lnR>
+                    <a:lnT w="0">
+                      <a:noFill/>
+                    </a:lnT>
+                    <a:lnB w="0">
+                      <a:noFill/>
+                    </a:lnB>
+                    <a:noFill/>
+                  </a:tcPr>
+                </a:tc>
+                <a:tc>
+                  <a:txBody>
+                    <a:bodyPr wrap="square"/>
+                    <a:lstStyle/>
+                    <a:p>
+                      <a:pPr algn="r"/>
+                      <a:r>
+                        <a:rPr sz="1200" b="0" i="0">
+                          <a:solidFill>
+                            <a:srgbClr val="222222"/>
+                          </a:solidFill>
+                        </a:rPr>
+                        <a:t>2.9</a:t>
+                      </a:r>
+                      <a:endParaRPr sz="1200"/>
+                    </a:p>
+                  </a:txBody>
+                  <a:tcPr marL="73152" marR="73152" marT="27432" marB="27432" anchor="ctr">
+                    <a:lnL w="0">
+                      <a:noFill/>
+                    </a:lnL>
+                    <a:lnR w="0">
+                      <a:noFill/>
+                    </a:lnR>
+                    <a:lnT w="0">
+                      <a:noFill/>
+                    </a:lnT>
+                    <a:lnB w="0">
+                      <a:noFill/>
+                    </a:lnB>
+                    <a:noFill/>
+                  </a:tcPr>
+                </a:tc>
+                <a:tc>
+                  <a:txBody>
+                    <a:bodyPr wrap="square"/>
+                    <a:lstStyle/>
+                    <a:p>
+                      <a:pPr algn="r"/>
+                      <a:r>
+                        <a:rPr sz="1200" b="0" i="0">
+                          <a:solidFill>
+                            <a:srgbClr val="222222"/>
+                          </a:solidFill>
+                        </a:rPr>
+                        <a:t>2.9</a:t>
+                      </a:r>
+                      <a:endParaRPr sz="1200"/>
+                    </a:p>
+                  </a:txBody>
+                  <a:tcPr marL="73152" marR="73152" marT="27432" marB="27432" anchor="ctr">
+                    <a:lnL w="0">
+                      <a:noFill/>
+                    </a:lnL>
+                    <a:lnR w="0">
+                      <a:noFill/>
+                    </a:lnR>
+                    <a:lnT w="0">
+                      <a:noFill/>
+                    </a:lnT>
+                    <a:lnB w="0">
+                      <a:noFill/>
+                    </a:lnB>
+                    <a:noFill/>
+                  </a:tcPr>
+                </a:tc>
+                <a:tc>
+                  <a:txBody>
+                    <a:bodyPr wrap="square"/>
+                    <a:lstStyle/>
+                    <a:p>
+                      <a:pPr algn="r"/>
+                      <a:r>
+                        <a:rPr sz="1200" b="0" i="0">
+                          <a:solidFill>
+                            <a:srgbClr val="222222"/>
+                          </a:solidFill>
+                        </a:rPr>
+                        <a:t>98.2</a:t>
+                      </a:r>
+                      <a:endParaRPr sz="1200"/>
+                    </a:p>
+                  </a:txBody>
+                  <a:tcPr marL="73152" marR="73152" marT="27432" marB="27432" anchor="ctr">
+                    <a:lnL w="0">
+                      <a:noFill/>
+                    </a:lnL>
+                    <a:lnR w="0">
+                      <a:noFill/>
+                    </a:lnR>
+                    <a:lnT w="0">
+                      <a:noFill/>
+                    </a:lnT>
+                    <a:lnB w="0">
+                      <a:noFill/>
+                    </a:lnB>
+                    <a:noFill/>
+                  </a:tcPr>
+                </a:tc>
+              </a:tr>
+              <a:tr h="260603">
+                <a:tc>
+                  <a:txBody>
+                    <a:bodyPr wrap="square"/>
+                    <a:lstStyle/>
+                    <a:p>
+                      <a:pPr algn="l"/>
+                      <a:r>
+                        <a:rPr sz="1200" b="0" i="0">
+                          <a:solidFill>
+                            <a:srgbClr val="222222"/>
+                          </a:solidFill>
+                        </a:rPr>
+                        <a:t>Most people can be trusted</a:t>
+                      </a:r>
+                      <a:endParaRPr sz="1200"/>
+                    </a:p>
+                  </a:txBody>
+                  <a:tcPr marL="73152" marR="73152" marT="27432" marB="27432" anchor="ctr">
+                    <a:lnL w="0">
+                      <a:noFill/>
+                    </a:lnL>
+                    <a:lnR w="0">
+                      <a:noFill/>
+                    </a:lnR>
+                    <a:lnT w="0">
+                      <a:noFill/>
+                    </a:lnT>
+                    <a:lnB w="0">
+                      <a:noFill/>
+                    </a:lnB>
+                    <a:noFill/>
+                  </a:tcPr>
+                </a:tc>
+                <a:tc>
+                  <a:txBody>
+                    <a:bodyPr wrap="square"/>
+                    <a:lstStyle/>
+                    <a:p>
+                      <a:pPr algn="r"/>
+                      <a:r>
+                        <a:rPr sz="1200" b="0" i="0">
+                          <a:solidFill>
+                            <a:srgbClr val="222222"/>
+                          </a:solidFill>
+                        </a:rPr>
+                        <a:t>31</a:t>
+                      </a:r>
+                      <a:endParaRPr sz="1200"/>
+                    </a:p>
+                  </a:txBody>
+                  <a:tcPr marL="73152" marR="73152" marT="27432" marB="27432" anchor="ctr">
+                    <a:lnL w="0">
+                      <a:noFill/>
+                    </a:lnL>
+                    <a:lnR w="0">
+                      <a:noFill/>
+                    </a:lnR>
+                    <a:lnT w="0">
+                      <a:noFill/>
+                    </a:lnT>
+                    <a:lnB w="0">
+                      <a:noFill/>
+                    </a:lnB>
+                    <a:noFill/>
+                  </a:tcPr>
+                </a:tc>
+                <a:tc>
+                  <a:txBody>
+                    <a:bodyPr wrap="square"/>
+                    <a:lstStyle/>
+                    <a:p>
+                      <a:pPr algn="r"/>
+                      <a:r>
+                        <a:rPr sz="1200" b="0" i="0">
+                          <a:solidFill>
+                            <a:srgbClr val="222222"/>
+                          </a:solidFill>
+                        </a:rPr>
+                        <a:t>1.8</a:t>
+                      </a:r>
+                      <a:endParaRPr sz="1200"/>
+                    </a:p>
+                  </a:txBody>
+                  <a:tcPr marL="73152" marR="73152" marT="27432" marB="27432" anchor="ctr">
+                    <a:lnL w="0">
+                      <a:noFill/>
+                    </a:lnL>
+                    <a:lnR w="0">
+                      <a:noFill/>
+                    </a:lnR>
+                    <a:lnT w="0">
+                      <a:noFill/>
+                    </a:lnT>
+                    <a:lnB w="0">
+                      <a:noFill/>
+                    </a:lnB>
+                    <a:noFill/>
+                  </a:tcPr>
+                </a:tc>
+                <a:tc>
+                  <a:txBody>
+                    <a:bodyPr wrap="square"/>
+                    <a:lstStyle/>
+                    <a:p>
+                      <a:pPr algn="r"/>
+                      <a:r>
+                        <a:rPr sz="1200" b="0" i="0">
+                          <a:solidFill>
+                            <a:srgbClr val="222222"/>
+                          </a:solidFill>
+                        </a:rPr>
+                        <a:t>1.8</a:t>
+                      </a:r>
+                      <a:endParaRPr sz="1200"/>
+                    </a:p>
+                  </a:txBody>
+                  <a:tcPr marL="73152" marR="73152" marT="27432" marB="27432" anchor="ctr">
+                    <a:lnL w="0">
+                      <a:noFill/>
+                    </a:lnL>
+                    <a:lnR w="0">
+                      <a:noFill/>
+                    </a:lnR>
+                    <a:lnT w="0">
+                      <a:noFill/>
+                    </a:lnT>
+                    <a:lnB w="0">
+                      <a:noFill/>
+                    </a:lnB>
+                    <a:noFill/>
+                  </a:tcPr>
+                </a:tc>
+                <a:tc>
+                  <a:txBody>
+                    <a:bodyPr wrap="square"/>
+                    <a:lstStyle/>
+                    <a:p>
+                      <a:pPr algn="r"/>
+                      <a:r>
+                        <a:rPr sz="1200" b="0" i="0">
+                          <a:solidFill>
+                            <a:srgbClr val="222222"/>
+                          </a:solidFill>
+                        </a:rPr>
+                        <a:t>100.0</a:t>
+                      </a:r>
+                      <a:endParaRPr sz="1200"/>
+                    </a:p>
+                  </a:txBody>
+                  <a:tcPr marL="73152" marR="73152" marT="27432" marB="27432" anchor="ctr">
+                    <a:lnL w="0">
+                      <a:noFill/>
+                    </a:lnL>
+                    <a:lnR w="0">
+                      <a:noFill/>
+                    </a:lnR>
+                    <a:lnT w="0">
+                      <a:noFill/>
+                    </a:lnT>
+                    <a:lnB w="0">
+                      <a:noFill/>
+                    </a:lnB>
+                    <a:noFill/>
+                  </a:tcPr>
+                </a:tc>
+              </a:tr>
+              <a:tr h="260603">
+                <a:tc>
+                  <a:txBody>
+                    <a:bodyPr wrap="square"/>
+                    <a:lstStyle/>
+                    <a:p>
+                      <a:pPr algn="l"/>
+                      <a:r>
+                        <a:rPr sz="1200" b="0" i="0">
+                          <a:solidFill>
+                            <a:srgbClr val="222222"/>
+                          </a:solidFill>
+                        </a:rPr>
+                        <a:t>Missing</a:t>
+                      </a:r>
+                      <a:endParaRPr sz="1200"/>
+                    </a:p>
+                  </a:txBody>
+                  <a:tcPr marL="73152" marR="73152" marT="27432" marB="27432" anchor="ctr">
+                    <a:lnL w="0">
+                      <a:noFill/>
+                    </a:lnL>
+                    <a:lnR w="0">
+                      <a:noFill/>
+                    </a:lnR>
+                    <a:lnT w="0">
+                      <a:noFill/>
+                    </a:lnT>
+                    <a:lnB w="0">
+                      <a:noFill/>
+                    </a:lnB>
+                    <a:noFill/>
+                  </a:tcPr>
+                </a:tc>
+                <a:tc>
+                  <a:txBody>
+                    <a:bodyPr wrap="square"/>
+                    <a:lstStyle/>
+                    <a:p>
+                      <a:pPr algn="r"/>
+                      <a:r>
+                        <a:rPr sz="1200" b="0" i="0">
+                          <a:solidFill>
+                            <a:srgbClr val="222222"/>
+                          </a:solidFill>
+                        </a:rPr>
+                        <a:t>4</a:t>
+                      </a:r>
+                      <a:endParaRPr sz="1200"/>
+                    </a:p>
+                  </a:txBody>
+                  <a:tcPr marL="73152" marR="73152" marT="27432" marB="27432" anchor="ctr">
+                    <a:lnL w="0">
+                      <a:noFill/>
+                    </a:lnL>
+                    <a:lnR w="0">
+                      <a:noFill/>
+                    </a:lnR>
+                    <a:lnT w="0">
+                      <a:noFill/>
+                    </a:lnT>
+                    <a:lnB w="0">
+                      <a:noFill/>
+                    </a:lnB>
+                    <a:noFill/>
+                  </a:tcPr>
+                </a:tc>
+                <a:tc>
+                  <a:txBody>
+                    <a:bodyPr wrap="square"/>
+                    <a:lstStyle/>
+                    <a:p>
+                      <a:pPr algn="r"/>
+                      <a:r>
+                        <a:rPr sz="1200" b="0" i="0">
+                          <a:solidFill>
+                            <a:srgbClr val="222222"/>
+                          </a:solidFill>
+                        </a:rPr>
+                        <a:t>0.2</a:t>
+                      </a:r>
+                      <a:endParaRPr sz="1200"/>
+                    </a:p>
+                  </a:txBody>
+                  <a:tcPr marL="73152" marR="73152" marT="27432" marB="27432" anchor="ctr">
+                    <a:lnL w="0">
+                      <a:noFill/>
+                    </a:lnL>
+                    <a:lnR w="0">
+                      <a:noFill/>
+                    </a:lnR>
+                    <a:lnT w="0">
+                      <a:noFill/>
+                    </a:lnT>
+                    <a:lnB w="0">
+                      <a:noFill/>
+                    </a:lnB>
+                    <a:noFill/>
+                  </a:tcPr>
+                </a:tc>
+                <a:tc>
+                  <a:txBody>
+                    <a:bodyPr wrap="square"/>
+                    <a:lstStyle/>
+                    <a:p>
+                      <a:pPr algn="r"/>
+                      <a:r>
+                        <a:rPr sz="1200" b="0" i="0">
+                          <a:solidFill>
+                            <a:srgbClr val="222222"/>
+                          </a:solidFill>
+                        </a:rPr>
+                        <a:t/>
+                      </a:r>
+                      <a:endParaRPr sz="1200"/>
+                    </a:p>
+                  </a:txBody>
+                  <a:tcPr marL="73152" marR="73152" marT="27432" marB="27432" anchor="ctr">
+                    <a:lnL w="0">
+                      <a:noFill/>
+                    </a:lnL>
+                    <a:lnR w="0">
+                      <a:noFill/>
+                    </a:lnR>
+                    <a:lnT w="0">
+                      <a:noFill/>
+                    </a:lnT>
+                    <a:lnB w="0">
+                      <a:noFill/>
+                    </a:lnB>
+                    <a:noFill/>
+                  </a:tcPr>
+                </a:tc>
+                <a:tc>
+                  <a:txBody>
+                    <a:bodyPr wrap="square"/>
+                    <a:lstStyle/>
+                    <a:p>
+                      <a:pPr algn="r"/>
+                      <a:r>
+                        <a:rPr sz="1200" b="0" i="0">
+                          <a:solidFill>
+                            <a:srgbClr val="222222"/>
+                          </a:solidFill>
+                        </a:rPr>
+                        <a:t/>
+                      </a:r>
+                      <a:endParaRPr sz="1200"/>
+                    </a:p>
+                  </a:txBody>
+                  <a:tcPr marL="73152" marR="73152" marT="27432" marB="27432" anchor="ctr">
+                    <a:lnL w="0">
+                      <a:noFill/>
+                    </a:lnL>
+                    <a:lnR w="0">
+                      <a:noFill/>
+                    </a:lnR>
+                    <a:lnT w="0">
+                      <a:noFill/>
+                    </a:lnT>
+                    <a:lnB w="0">
+                      <a:noFill/>
+                    </a:lnB>
+                    <a:noFill/>
+                  </a:tcPr>
+                </a:tc>
+              </a:tr>
+              <a:tr h="260603">
+                <a:tc>
+                  <a:txBody>
+                    <a:bodyPr wrap="square"/>
+                    <a:lstStyle/>
+                    <a:p>
+                      <a:pPr algn="l"/>
+                      <a:r>
+                        <a:rPr sz="1200" b="0" i="0">
+                          <a:solidFill>
+                            <a:srgbClr val="222222"/>
+                          </a:solidFill>
+                        </a:rPr>
+                        <a:t>Total</a:t>
+                      </a:r>
+                      <a:endParaRPr sz="1200"/>
+                    </a:p>
+                  </a:txBody>
+                  <a:tcPr marL="73152" marR="73152" marT="27432" marB="27432" anchor="ctr">
+                    <a:lnL w="0">
+                      <a:noFill/>
+                    </a:lnL>
+                    <a:lnR w="0">
+                      <a:noFill/>
+                    </a:lnR>
+                    <a:lnT w="0">
+                      <a:noFill/>
+                    </a:lnT>
+                    <a:lnB w="12700">
+                      <a:solidFill>
+                        <a:srgbClr val="222222"/>
+                      </a:solidFill>
+                    </a:lnB>
+                    <a:noFill/>
+                  </a:tcPr>
+                </a:tc>
+                <a:tc>
+                  <a:txBody>
+                    <a:bodyPr wrap="square"/>
+                    <a:lstStyle/>
+                    <a:p>
+                      <a:pPr algn="r"/>
+                      <a:r>
+                        <a:rPr sz="1200" b="0" i="0">
+                          <a:solidFill>
+                            <a:srgbClr val="222222"/>
+                          </a:solidFill>
+                        </a:rPr>
+                        <a:t>1684</a:t>
+                      </a:r>
+                      <a:endParaRPr sz="1200"/>
+                    </a:p>
+                  </a:txBody>
+                  <a:tcPr marL="73152" marR="73152" marT="27432" marB="27432" anchor="ctr">
+                    <a:lnL w="0">
+                      <a:noFill/>
+                    </a:lnL>
+                    <a:lnR w="0">
+                      <a:noFill/>
+                    </a:lnR>
+                    <a:lnT w="0">
+                      <a:noFill/>
+                    </a:lnT>
+                    <a:lnB w="12700">
+                      <a:solidFill>
+                        <a:srgbClr val="222222"/>
+                      </a:solidFill>
+                    </a:lnB>
+                    <a:noFill/>
+                  </a:tcPr>
+                </a:tc>
+                <a:tc>
+                  <a:txBody>
+                    <a:bodyPr wrap="square"/>
+                    <a:lstStyle/>
+                    <a:p>
+                      <a:pPr algn="r"/>
+                      <a:r>
+                        <a:rPr sz="1200" b="0" i="0">
+                          <a:solidFill>
+                            <a:srgbClr val="222222"/>
+                          </a:solidFill>
+                        </a:rPr>
+                        <a:t>100.0</a:t>
+                      </a:r>
+                      <a:endParaRPr sz="1200"/>
+                    </a:p>
+                  </a:txBody>
+                  <a:tcPr marL="73152" marR="73152" marT="27432" marB="27432" anchor="ctr">
+                    <a:lnL w="0">
+                      <a:noFill/>
+                    </a:lnL>
+                    <a:lnR w="0">
+                      <a:noFill/>
+                    </a:lnR>
+                    <a:lnT w="0">
+                      <a:noFill/>
+                    </a:lnT>
+                    <a:lnB w="12700">
+                      <a:solidFill>
+                        <a:srgbClr val="222222"/>
+                      </a:solidFill>
+                    </a:lnB>
+                    <a:noFill/>
+                  </a:tcPr>
+                </a:tc>
+                <a:tc>
+                  <a:txBody>
+                    <a:bodyPr wrap="square"/>
+                    <a:lstStyle/>
+                    <a:p>
+                      <a:pPr algn="r"/>
+                      <a:r>
+                        <a:rPr sz="1200" b="0" i="0">
+                          <a:solidFill>
+                            <a:srgbClr val="222222"/>
+                          </a:solidFill>
+                        </a:rPr>
+                        <a:t/>
+                      </a:r>
+                      <a:endParaRPr sz="1200"/>
+                    </a:p>
+                  </a:txBody>
+                  <a:tcPr marL="73152" marR="73152" marT="27432" marB="27432" anchor="ctr">
+                    <a:lnL w="0">
+                      <a:noFill/>
+                    </a:lnL>
+                    <a:lnR w="0">
+                      <a:noFill/>
+                    </a:lnR>
+                    <a:lnT w="0">
+                      <a:noFill/>
+                    </a:lnT>
+                    <a:lnB w="12700">
+                      <a:solidFill>
+                        <a:srgbClr val="222222"/>
+                      </a:solidFill>
+                    </a:lnB>
+                    <a:noFill/>
+                  </a:tcPr>
+                </a:tc>
+                <a:tc>
+                  <a:txBody>
+                    <a:bodyPr wrap="square"/>
+                    <a:lstStyle/>
+                    <a:p>
+                      <a:pPr algn="r"/>
+                      <a:r>
+                        <a:rPr sz="1200" b="0" i="0">
+                          <a:solidFill>
+                            <a:srgbClr val="222222"/>
+                          </a:solidFill>
+                        </a:rPr>
+                        <a:t/>
+                      </a:r>
+                      <a:endParaRPr sz="1200"/>
+                    </a:p>
+                  </a:txBody>
+                  <a:tcPr marL="73152" marR="73152" marT="27432" marB="27432" anchor="ctr">
+                    <a:lnL w="0">
+                      <a:noFill/>
+                    </a:lnL>
+                    <a:lnR w="0">
+                      <a:noFill/>
+                    </a:lnR>
+                    <a:lnT w="0">
+                      <a:noFill/>
+                    </a:lnT>
+                    <a:lnB w="12700">
+                      <a:solidFill>
+                        <a:srgbClr val="222222"/>
+                      </a:solidFill>
+                    </a:lnB>
+                    <a:noFill/>
+                  </a:tcPr>
+                </a:tc>
+              </a:tr>
+            </a:tbl>
+          </a:graphicData>
+        </a:graphic>
+      </p:graphicFrame>
+      <p:sp>
+        <p:nvSpPr>
+          <p:cNvPr id="7" name="Oval 6"/>
+          <p:cNvSpPr/>
+          <p:nvPr/>
+        </p:nvSpPr>
+        <p:spPr>
+          <a:xfrm>
+            <a:off x="3447287" y="1261872"/>
+            <a:ext cx="292608" cy="292608"/>
+          </a:xfrm>
+          <a:prstGeom prst="ellipse">
+            <a:avLst/>
+          </a:prstGeom>
+          <a:solidFill>
+            <a:srgbClr val="B88C00"/>
+          </a:solidFill>
+          <a:ln>
+            <a:noFill/>
+          </a:ln>
+        </p:spPr>
+        <p:txBody>
+          <a:bodyPr rtlCol="0" anchor="ctr" wrap="square" lIns="0" rIns="0" tIns="18288" bIns="18288"/>
+          <a:lstStyle/>
+          <a:p>
+            <a:pPr algn="ctr"/>
+            <a:r>
+              <a:rPr sz="1200" b="1" i="0">
+                <a:solidFill>
+                  <a:srgbClr val="FFFFFF"/>
+                </a:solidFill>
+              </a:rPr>
+              <a:t>1</a:t>
+            </a:r>
+            <a:endParaRPr sz="1200"/>
+          </a:p>
+        </p:txBody>
+      </p:sp>
+      <p:sp>
+        <p:nvSpPr>
+          <p:cNvPr id="8" name="Oval 7"/>
+          <p:cNvSpPr/>
+          <p:nvPr/>
+        </p:nvSpPr>
+        <p:spPr>
+          <a:xfrm>
+            <a:off x="4407407" y="1261872"/>
+            <a:ext cx="292608" cy="292608"/>
+          </a:xfrm>
+          <a:prstGeom prst="ellipse">
+            <a:avLst/>
+          </a:prstGeom>
+          <a:solidFill>
+            <a:srgbClr val="B88C00"/>
+          </a:solidFill>
+          <a:ln>
+            <a:noFill/>
+          </a:ln>
+        </p:spPr>
+        <p:txBody>
+          <a:bodyPr rtlCol="0" anchor="ctr" wrap="square" lIns="0" rIns="0" tIns="18288" bIns="18288"/>
+          <a:lstStyle/>
+          <a:p>
+            <a:pPr algn="ctr"/>
+            <a:r>
+              <a:rPr sz="1200" b="1" i="0">
+                <a:solidFill>
+                  <a:srgbClr val="FFFFFF"/>
+                </a:solidFill>
+              </a:rPr>
+              <a:t>2</a:t>
+            </a:r>
+            <a:endParaRPr sz="1200"/>
+          </a:p>
+        </p:txBody>
+      </p:sp>
+      <p:sp>
+        <p:nvSpPr>
+          <p:cNvPr id="9" name="Oval 8"/>
+          <p:cNvSpPr/>
+          <p:nvPr/>
+        </p:nvSpPr>
+        <p:spPr>
+          <a:xfrm>
+            <a:off x="5458968" y="1261872"/>
+            <a:ext cx="292608" cy="292608"/>
+          </a:xfrm>
+          <a:prstGeom prst="ellipse">
+            <a:avLst/>
+          </a:prstGeom>
+          <a:solidFill>
+            <a:srgbClr val="B88C00"/>
+          </a:solidFill>
+          <a:ln>
+            <a:noFill/>
+          </a:ln>
+        </p:spPr>
+        <p:txBody>
+          <a:bodyPr rtlCol="0" anchor="ctr" wrap="square" lIns="0" rIns="0" tIns="18288" bIns="18288"/>
+          <a:lstStyle/>
+          <a:p>
+            <a:pPr algn="ctr"/>
+            <a:r>
+              <a:rPr sz="1200" b="1" i="0">
+                <a:solidFill>
+                  <a:srgbClr val="FFFFFF"/>
+                </a:solidFill>
+              </a:rPr>
+              <a:t>3</a:t>
+            </a:r>
+            <a:endParaRPr sz="1200"/>
+          </a:p>
+        </p:txBody>
+      </p:sp>
+      <p:sp>
+        <p:nvSpPr>
+          <p:cNvPr id="10" name="Oval 9"/>
+          <p:cNvSpPr/>
+          <p:nvPr/>
+        </p:nvSpPr>
+        <p:spPr>
+          <a:xfrm>
+            <a:off x="6853428" y="1261872"/>
+            <a:ext cx="292608" cy="292608"/>
+          </a:xfrm>
+          <a:prstGeom prst="ellipse">
+            <a:avLst/>
+          </a:prstGeom>
+          <a:solidFill>
+            <a:srgbClr val="B88C00"/>
+          </a:solidFill>
+          <a:ln>
+            <a:noFill/>
+          </a:ln>
+        </p:spPr>
+        <p:txBody>
+          <a:bodyPr rtlCol="0" anchor="ctr" wrap="square" lIns="0" rIns="0" tIns="18288" bIns="18288"/>
+          <a:lstStyle/>
+          <a:p>
+            <a:pPr algn="ctr"/>
+            <a:r>
+              <a:rPr sz="1200" b="1" i="0">
+                <a:solidFill>
+                  <a:srgbClr val="FFFFFF"/>
+                </a:solidFill>
+              </a:rPr>
+              <a:t>4</a:t>
+            </a:r>
+            <a:endParaRPr sz="1200"/>
+          </a:p>
+        </p:txBody>
+      </p:sp>
+      <p:sp>
+        <p:nvSpPr>
+          <p:cNvPr id="11" name="Oval 10"/>
+          <p:cNvSpPr/>
+          <p:nvPr/>
+        </p:nvSpPr>
+        <p:spPr>
+          <a:xfrm>
+            <a:off x="7882127" y="3371849"/>
+            <a:ext cx="292608" cy="292608"/>
+          </a:xfrm>
+          <a:prstGeom prst="ellipse">
+            <a:avLst/>
+          </a:prstGeom>
+          <a:solidFill>
+            <a:srgbClr val="B88C00"/>
+          </a:solidFill>
+          <a:ln>
+            <a:noFill/>
+          </a:ln>
+        </p:spPr>
+        <p:txBody>
+          <a:bodyPr rtlCol="0" anchor="ctr" wrap="square" lIns="0" rIns="0" tIns="18288" bIns="18288"/>
+          <a:lstStyle/>
+          <a:p>
+            <a:pPr algn="ctr"/>
+            <a:r>
+              <a:rPr sz="1200" b="1" i="0">
+                <a:solidFill>
+                  <a:srgbClr val="FFFFFF"/>
+                </a:solidFill>
+              </a:rPr>
+              <a:t>5</a:t>
+            </a:r>
+            <a:endParaRPr sz="1200"/>
+          </a:p>
+        </p:txBody>
+      </p:sp>
+      <p:sp>
+        <p:nvSpPr>
+          <p:cNvPr id="12" name="Oval 11"/>
+          <p:cNvSpPr/>
+          <p:nvPr/>
+        </p:nvSpPr>
+        <p:spPr>
+          <a:xfrm>
+            <a:off x="7882127" y="4674869"/>
+            <a:ext cx="292608" cy="292608"/>
+          </a:xfrm>
+          <a:prstGeom prst="ellipse">
+            <a:avLst/>
+          </a:prstGeom>
+          <a:solidFill>
+            <a:srgbClr val="B88C00"/>
+          </a:solidFill>
+          <a:ln>
+            <a:noFill/>
+          </a:ln>
+        </p:spPr>
+        <p:txBody>
+          <a:bodyPr rtlCol="0" anchor="ctr" wrap="square" lIns="0" rIns="0" tIns="18288" bIns="18288"/>
+          <a:lstStyle/>
+          <a:p>
+            <a:pPr algn="ctr"/>
+            <a:r>
+              <a:rPr sz="1200" b="1" i="0">
+                <a:solidFill>
+                  <a:srgbClr val="FFFFFF"/>
+                </a:solidFill>
+              </a:rPr>
+              <a:t>6</a:t>
+            </a:r>
+            <a:endParaRPr sz="1200"/>
+          </a:p>
+        </p:txBody>
+      </p:sp>
+      <p:sp>
+        <p:nvSpPr>
+          <p:cNvPr id="13" name="Oval 12"/>
+          <p:cNvSpPr/>
+          <p:nvPr/>
+        </p:nvSpPr>
+        <p:spPr>
+          <a:xfrm>
+            <a:off x="8366760" y="1591056"/>
+            <a:ext cx="292608" cy="292608"/>
+          </a:xfrm>
+          <a:prstGeom prst="ellipse">
+            <a:avLst/>
+          </a:prstGeom>
+          <a:solidFill>
+            <a:srgbClr val="B88C00"/>
+          </a:solidFill>
+          <a:ln>
+            <a:noFill/>
+          </a:ln>
+        </p:spPr>
+        <p:txBody>
+          <a:bodyPr rtlCol="0" anchor="ctr" wrap="square" lIns="0" rIns="0" tIns="18288" bIns="18288"/>
+          <a:lstStyle/>
+          <a:p>
+            <a:pPr algn="ctr"/>
+            <a:r>
+              <a:rPr sz="1200" b="1" i="0">
+                <a:solidFill>
+                  <a:srgbClr val="FFFFFF"/>
+                </a:solidFill>
+              </a:rPr>
+              <a:t>1</a:t>
+            </a:r>
+            <a:endParaRPr sz="1200"/>
+          </a:p>
+        </p:txBody>
+      </p:sp>
+      <p:sp>
+        <p:nvSpPr>
+          <p:cNvPr id="14" name="TextBox 13"/>
+          <p:cNvSpPr txBox="1"/>
+          <p:nvPr/>
+        </p:nvSpPr>
+        <p:spPr>
+          <a:xfrm>
+            <a:off x="8778240" y="1371600"/>
+            <a:ext cx="2606039" cy="731520"/>
+          </a:xfrm>
+          <a:prstGeom prst="rect">
+            <a:avLst/>
+          </a:prstGeom>
+          <a:noFill/>
+        </p:spPr>
+        <p:txBody>
+          <a:bodyPr wrap="square" lIns="0" rIns="0" tIns="0" bIns="0" anchor="ctr">
+            <a:spAutoFit/>
+          </a:bodyPr>
+          <a:lstStyle/>
+          <a:p>
+            <a:pPr algn="l"/>
+            <a:r>
+              <a:rPr sz="1300" b="0" i="0">
+                <a:solidFill>
+                  <a:srgbClr val="1F2A33"/>
+                </a:solidFill>
+              </a:rPr>
+              <a:t>Frequency: how many respondents gave each answer</a:t>
+            </a:r>
+            <a:endParaRPr sz="1300"/>
+          </a:p>
+        </p:txBody>
+      </p:sp>
+      <p:sp>
+        <p:nvSpPr>
+          <p:cNvPr id="15" name="Oval 14"/>
+          <p:cNvSpPr/>
+          <p:nvPr/>
+        </p:nvSpPr>
+        <p:spPr>
+          <a:xfrm>
+            <a:off x="8366760" y="2322575"/>
+            <a:ext cx="292608" cy="292608"/>
+          </a:xfrm>
+          <a:prstGeom prst="ellipse">
+            <a:avLst/>
+          </a:prstGeom>
+          <a:solidFill>
+            <a:srgbClr val="B88C00"/>
+          </a:solidFill>
+          <a:ln>
+            <a:noFill/>
+          </a:ln>
+        </p:spPr>
+        <p:txBody>
+          <a:bodyPr rtlCol="0" anchor="ctr" wrap="square" lIns="0" rIns="0" tIns="18288" bIns="18288"/>
+          <a:lstStyle/>
+          <a:p>
+            <a:pPr algn="ctr"/>
+            <a:r>
+              <a:rPr sz="1200" b="1" i="0">
+                <a:solidFill>
+                  <a:srgbClr val="FFFFFF"/>
+                </a:solidFill>
+              </a:rPr>
+              <a:t>2</a:t>
+            </a:r>
+            <a:endParaRPr sz="1200"/>
+          </a:p>
+        </p:txBody>
+      </p:sp>
+      <p:sp>
+        <p:nvSpPr>
+          <p:cNvPr id="16" name="TextBox 15"/>
+          <p:cNvSpPr txBox="1"/>
+          <p:nvPr/>
+        </p:nvSpPr>
+        <p:spPr>
+          <a:xfrm>
+            <a:off x="8778240" y="2103120"/>
+            <a:ext cx="2606039" cy="731520"/>
+          </a:xfrm>
+          <a:prstGeom prst="rect">
+            <a:avLst/>
+          </a:prstGeom>
+          <a:noFill/>
+        </p:spPr>
+        <p:txBody>
+          <a:bodyPr wrap="square" lIns="0" rIns="0" tIns="0" bIns="0" anchor="ctr">
+            <a:spAutoFit/>
+          </a:bodyPr>
+          <a:lstStyle/>
+          <a:p>
+            <a:pPr algn="l"/>
+            <a:r>
+              <a:rPr sz="1300" b="0" i="0">
+                <a:solidFill>
+                  <a:srgbClr val="1F2A33"/>
+                </a:solidFill>
+              </a:rPr>
+              <a:t>Percent: the share of all 1,684 respondents, missing included</a:t>
+            </a:r>
+            <a:endParaRPr sz="1300"/>
+          </a:p>
+        </p:txBody>
+      </p:sp>
+      <p:sp>
+        <p:nvSpPr>
+          <p:cNvPr id="17" name="Oval 16"/>
+          <p:cNvSpPr/>
+          <p:nvPr/>
+        </p:nvSpPr>
+        <p:spPr>
+          <a:xfrm>
+            <a:off x="8366760" y="3054096"/>
+            <a:ext cx="292608" cy="292608"/>
+          </a:xfrm>
+          <a:prstGeom prst="ellipse">
+            <a:avLst/>
+          </a:prstGeom>
+          <a:solidFill>
+            <a:srgbClr val="B88C00"/>
+          </a:solidFill>
+          <a:ln>
+            <a:noFill/>
+          </a:ln>
+        </p:spPr>
+        <p:txBody>
+          <a:bodyPr rtlCol="0" anchor="ctr" wrap="square" lIns="0" rIns="0" tIns="18288" bIns="18288"/>
+          <a:lstStyle/>
+          <a:p>
+            <a:pPr algn="ctr"/>
+            <a:r>
+              <a:rPr sz="1200" b="1" i="0">
+                <a:solidFill>
+                  <a:srgbClr val="FFFFFF"/>
+                </a:solidFill>
+              </a:rPr>
+              <a:t>3</a:t>
+            </a:r>
+            <a:endParaRPr sz="1200"/>
+          </a:p>
+        </p:txBody>
+      </p:sp>
+      <p:sp>
+        <p:nvSpPr>
+          <p:cNvPr id="18" name="TextBox 17"/>
+          <p:cNvSpPr txBox="1"/>
+          <p:nvPr/>
+        </p:nvSpPr>
+        <p:spPr>
+          <a:xfrm>
+            <a:off x="8778240" y="2834640"/>
+            <a:ext cx="2606039" cy="731520"/>
+          </a:xfrm>
+          <a:prstGeom prst="rect">
+            <a:avLst/>
+          </a:prstGeom>
+          <a:noFill/>
+        </p:spPr>
+        <p:txBody>
+          <a:bodyPr wrap="square" lIns="0" rIns="0" tIns="0" bIns="0" anchor="ctr">
+            <a:spAutoFit/>
+          </a:bodyPr>
+          <a:lstStyle/>
+          <a:p>
+            <a:pPr algn="l"/>
+            <a:r>
+              <a:rPr sz="1300" b="0" i="0">
+                <a:solidFill>
+                  <a:srgbClr val="1F2A33"/>
+                </a:solidFill>
+              </a:rPr>
+              <a:t>Valid Percent: the share of the 1,680 who answered; usually the one to report</a:t>
+            </a:r>
+            <a:endParaRPr sz="1300"/>
+          </a:p>
+        </p:txBody>
+      </p:sp>
+      <p:sp>
+        <p:nvSpPr>
+          <p:cNvPr id="19" name="Oval 18"/>
+          <p:cNvSpPr/>
+          <p:nvPr/>
+        </p:nvSpPr>
+        <p:spPr>
+          <a:xfrm>
+            <a:off x="8366760" y="3785616"/>
+            <a:ext cx="292608" cy="292608"/>
+          </a:xfrm>
+          <a:prstGeom prst="ellipse">
+            <a:avLst/>
+          </a:prstGeom>
+          <a:solidFill>
+            <a:srgbClr val="B88C00"/>
+          </a:solidFill>
+          <a:ln>
+            <a:noFill/>
+          </a:ln>
+        </p:spPr>
+        <p:txBody>
+          <a:bodyPr rtlCol="0" anchor="ctr" wrap="square" lIns="0" rIns="0" tIns="18288" bIns="18288"/>
+          <a:lstStyle/>
+          <a:p>
+            <a:pPr algn="ctr"/>
+            <a:r>
+              <a:rPr sz="1200" b="1" i="0">
+                <a:solidFill>
+                  <a:srgbClr val="FFFFFF"/>
+                </a:solidFill>
+              </a:rPr>
+              <a:t>4</a:t>
+            </a:r>
+            <a:endParaRPr sz="1200"/>
+          </a:p>
+        </p:txBody>
+      </p:sp>
+      <p:sp>
+        <p:nvSpPr>
+          <p:cNvPr id="20" name="TextBox 19"/>
+          <p:cNvSpPr txBox="1"/>
+          <p:nvPr/>
+        </p:nvSpPr>
+        <p:spPr>
+          <a:xfrm>
+            <a:off x="8778240" y="3566160"/>
+            <a:ext cx="2606039" cy="731520"/>
+          </a:xfrm>
+          <a:prstGeom prst="rect">
+            <a:avLst/>
+          </a:prstGeom>
+          <a:noFill/>
+        </p:spPr>
+        <p:txBody>
+          <a:bodyPr wrap="square" lIns="0" rIns="0" tIns="0" bIns="0" anchor="ctr">
+            <a:spAutoFit/>
+          </a:bodyPr>
+          <a:lstStyle/>
+          <a:p>
+            <a:pPr algn="l"/>
+            <a:r>
+              <a:rPr sz="1300" b="0" i="0">
+                <a:solidFill>
+                  <a:srgbClr val="1F2A33"/>
+                </a:solidFill>
+              </a:rPr>
+              <a:t>Cumulative Percent: the share answering this value or lower</a:t>
+            </a:r>
+            <a:endParaRPr sz="1300"/>
+          </a:p>
+        </p:txBody>
+      </p:sp>
+      <p:sp>
+        <p:nvSpPr>
+          <p:cNvPr id="21" name="Oval 20"/>
+          <p:cNvSpPr/>
+          <p:nvPr/>
+        </p:nvSpPr>
+        <p:spPr>
+          <a:xfrm>
+            <a:off x="8366760" y="4517136"/>
+            <a:ext cx="292608" cy="292608"/>
+          </a:xfrm>
+          <a:prstGeom prst="ellipse">
+            <a:avLst/>
+          </a:prstGeom>
+          <a:solidFill>
+            <a:srgbClr val="B88C00"/>
+          </a:solidFill>
+          <a:ln>
+            <a:noFill/>
+          </a:ln>
+        </p:spPr>
+        <p:txBody>
+          <a:bodyPr rtlCol="0" anchor="ctr" wrap="square" lIns="0" rIns="0" tIns="18288" bIns="18288"/>
+          <a:lstStyle/>
+          <a:p>
+            <a:pPr algn="ctr"/>
+            <a:r>
+              <a:rPr sz="1200" b="1" i="0">
+                <a:solidFill>
+                  <a:srgbClr val="FFFFFF"/>
+                </a:solidFill>
+              </a:rPr>
+              <a:t>5</a:t>
+            </a:r>
+            <a:endParaRPr sz="1200"/>
+          </a:p>
+        </p:txBody>
+      </p:sp>
+      <p:sp>
+        <p:nvSpPr>
+          <p:cNvPr id="22" name="TextBox 21"/>
+          <p:cNvSpPr txBox="1"/>
+          <p:nvPr/>
+        </p:nvSpPr>
+        <p:spPr>
+          <a:xfrm>
+            <a:off x="8778240" y="4297680"/>
+            <a:ext cx="2606039" cy="731520"/>
+          </a:xfrm>
+          <a:prstGeom prst="rect">
+            <a:avLst/>
+          </a:prstGeom>
+          <a:noFill/>
+        </p:spPr>
+        <p:txBody>
+          <a:bodyPr wrap="square" lIns="0" rIns="0" tIns="0" bIns="0" anchor="ctr">
+            <a:spAutoFit/>
+          </a:bodyPr>
+          <a:lstStyle/>
+          <a:p>
+            <a:pPr algn="l"/>
+            <a:r>
+              <a:rPr sz="1300" b="0" i="0">
+                <a:solidFill>
+                  <a:srgbClr val="1F2A33"/>
+                </a:solidFill>
+              </a:rPr>
+              <a:t>The row where the cumulative percent passes 50% holds the median: 6</a:t>
+            </a:r>
+            <a:endParaRPr sz="1300"/>
+          </a:p>
+        </p:txBody>
+      </p:sp>
+      <p:sp>
+        <p:nvSpPr>
+          <p:cNvPr id="23" name="Oval 22"/>
+          <p:cNvSpPr/>
+          <p:nvPr/>
+        </p:nvSpPr>
+        <p:spPr>
+          <a:xfrm>
+            <a:off x="8366760" y="5248656"/>
+            <a:ext cx="292608" cy="292608"/>
+          </a:xfrm>
+          <a:prstGeom prst="ellipse">
+            <a:avLst/>
+          </a:prstGeom>
+          <a:solidFill>
+            <a:srgbClr val="B88C00"/>
+          </a:solidFill>
+          <a:ln>
+            <a:noFill/>
+          </a:ln>
+        </p:spPr>
+        <p:txBody>
+          <a:bodyPr rtlCol="0" anchor="ctr" wrap="square" lIns="0" rIns="0" tIns="18288" bIns="18288"/>
+          <a:lstStyle/>
+          <a:p>
+            <a:pPr algn="ctr"/>
+            <a:r>
+              <a:rPr sz="1200" b="1" i="0">
+                <a:solidFill>
+                  <a:srgbClr val="FFFFFF"/>
+                </a:solidFill>
+              </a:rPr>
+              <a:t>6</a:t>
+            </a:r>
+            <a:endParaRPr sz="1200"/>
+          </a:p>
+        </p:txBody>
+      </p:sp>
+      <p:sp>
+        <p:nvSpPr>
+          <p:cNvPr id="24" name="TextBox 23"/>
+          <p:cNvSpPr txBox="1"/>
+          <p:nvPr/>
+        </p:nvSpPr>
+        <p:spPr>
+          <a:xfrm>
+            <a:off x="8778240" y="5029200"/>
+            <a:ext cx="2606039" cy="731520"/>
+          </a:xfrm>
+          <a:prstGeom prst="rect">
+            <a:avLst/>
+          </a:prstGeom>
+          <a:noFill/>
+        </p:spPr>
+        <p:txBody>
+          <a:bodyPr wrap="square" lIns="0" rIns="0" tIns="0" bIns="0" anchor="ctr">
+            <a:spAutoFit/>
+          </a:bodyPr>
+          <a:lstStyle/>
+          <a:p>
+            <a:pPr algn="l"/>
+            <a:r>
+              <a:rPr sz="1300" b="0" i="0">
+                <a:solidFill>
+                  <a:srgbClr val="1F2A33"/>
+                </a:solidFill>
+              </a:rPr>
+              <a:t>Missing: refusals and don't knows, kept out of the valid percentages</a:t>
+            </a:r>
+            <a:endParaRPr sz="1300"/>
+          </a:p>
+        </p:txBody>
+      </p:sp>
+      <p:sp>
+        <p:nvSpPr>
+          <p:cNvPr id="25" name="TextBox 24"/>
+          <p:cNvSpPr txBox="1"/>
+          <p:nvPr/>
+        </p:nvSpPr>
+        <p:spPr>
+          <a:xfrm>
+            <a:off x="758952" y="5943600"/>
+            <a:ext cx="10607040" cy="292608"/>
+          </a:xfrm>
+          <a:prstGeom prst="rect">
+            <a:avLst/>
+          </a:prstGeom>
+          <a:noFill/>
+        </p:spPr>
+        <p:txBody>
+          <a:bodyPr wrap="square" lIns="0" rIns="0" tIns="0" bIns="0" anchor="ctr">
+            <a:spAutoFit/>
+          </a:bodyPr>
+          <a:lstStyle/>
+          <a:p>
+            <a:pPr algn="l"/>
+            <a:r>
+              <a:rPr sz="1200" b="0" i="0">
+                <a:solidFill>
+                  <a:srgbClr val="55606B"/>
+                </a:solidFill>
+              </a:rPr>
+              <a:t>Data: ESS Round 11 (2023–24), UK sample. JASP: Descriptives › Descriptive Statistics › Tables › Frequency tables (maximum distinct values raised above 11).</a:t>
+            </a:r>
+            <a:endParaRPr sz="1200"/>
+          </a:p>
+        </p:txBody>
+      </p:sp>
+    </p:spTree>
+  </p:cSld>
+  <p:clrMapOvr>
+    <a:masterClrMapping/>
+  </p:clrMapOvr>
+</p:sld>
+</file>
+
+<file path=ppt/slides/slide45.xml><?xml version="1.0" encoding="utf-8"?>
+<p:sld xmlns:a="http://schemas.openxmlformats.org/drawingml/2006/main" xmlns:p="http://schemas.openxmlformats.org/presentationml/2006/main" xmlns:r="http://schemas.openxmlformats.org/officeDocument/2006/relationships">
+  <p:cSld>
+    <p:spTree>
+      <p:nvGrpSpPr>
+        <p:cNvPr id="1" name=""/>
+        <p:cNvGrpSpPr/>
+        <p:nvPr/>
+      </p:nvGrpSpPr>
+      <p:grpSpPr/>
+      <p:sp>
+        <p:nvSpPr>
+          <p:cNvPr id="2" name="Title 1"/>
+          <p:cNvSpPr>
+            <a:spLocks noGrp="1"/>
+          </p:cNvSpPr>
+          <p:nvPr>
+            <p:ph type="title"/>
+          </p:nvPr>
+        </p:nvSpPr>
+        <p:spPr/>
+        <p:txBody>
+          <a:bodyPr/>
+          <a:lstStyle/>
+          <a:p>
+            <a:r>
+              <a:t>Reporting the results</a:t>
+            </a:r>
+          </a:p>
+        </p:txBody>
+      </p:sp>
+      <p:sp>
+        <p:nvSpPr>
+          <p:cNvPr id="3" name="Footer Placeholder 2">
+            <a:extLst>
+              <a:ext uri="{FF2B5EF4-FFF2-40B4-BE49-F238E27FC236}">
+                <a16:creationId xmlns:a16="http://schemas.microsoft.com/office/drawing/2014/main" id="{D0C8C946-5335-2921-801F-E32EBBDC06AC}"/>
+              </a:ext>
+            </a:extLst>
+          </p:cNvPr>
+          <p:cNvSpPr>
+            <a:spLocks noGrp="1"/>
+          </p:cNvSpPr>
+          <p:nvPr>
+            <p:ph type="ftr" sz="quarter" idx="11"/>
+          </p:nvPr>
+        </p:nvSpPr>
+        <p:spPr/>
+        <p:txBody>
+          <a:bodyPr/>
+          <a:lstStyle/>
+          <a:p>
+            <a:r>
+              <a:rPr lang="en-GB"/>
+              <a:t>Measurement and Description</a:t>
+            </a:r>
+          </a:p>
+        </p:txBody>
+      </p:sp>
+      <p:sp>
+        <p:nvSpPr>
+          <p:cNvPr id="4" name="Slide Number Placeholder 3">
+            <a:extLst>
+              <a:ext uri="{FF2B5EF4-FFF2-40B4-BE49-F238E27FC236}">
+                <a16:creationId xmlns:a16="http://schemas.microsoft.com/office/drawing/2014/main" id="{975A5B92-8D16-E54E-863B-32FBAC4EF875}"/>
+              </a:ext>
+            </a:extLst>
+          </p:cNvPr>
+          <p:cNvSpPr>
+            <a:spLocks noGrp="1"/>
+          </p:cNvSpPr>
+          <p:nvPr>
+            <p:ph type="sldNum" sz="quarter" idx="12"/>
+          </p:nvPr>
+        </p:nvSpPr>
+        <p:spPr/>
+        <p:txBody>
+          <a:bodyPr/>
+          <a:lstStyle/>
+          <a:p>
+            <a:fld id="{9FAA51BB-2FC0-4DB8-B50E-F52D50E733B6}" type="slidenum">
+              <a:rPr lang="en-GB" smtClean="0"/>
+              <a:t>20</a:t>
+            </a:fld>
+            <a:endParaRPr lang="en-GB"/>
+          </a:p>
+        </p:txBody>
+      </p:sp>
+      <p:sp>
+        <p:nvSpPr>
+          <p:cNvPr id="5" name="Rounded Rectangle 4"/>
+          <p:cNvSpPr/>
+          <p:nvPr/>
+        </p:nvSpPr>
+        <p:spPr>
+          <a:xfrm>
+            <a:off x="758952" y="1371600"/>
+            <a:ext cx="6675120" cy="4434840"/>
+          </a:xfrm>
+          <a:prstGeom prst="roundRect">
+            <a:avLst>
+              <a:gd name="adj" fmla="val 8000"/>
+            </a:avLst>
+          </a:prstGeom>
+          <a:solidFill>
+            <a:srgbClr val="EEF3F7"/>
+          </a:solidFill>
+          <a:ln>
+            <a:noFill/>
+          </a:ln>
+        </p:spPr>
+        <p:txBody>
+          <a:bodyPr rtlCol="0" anchor="ctr"/>
+          <a:lstStyle/>
+          <a:p>
+            <a:pPr algn="ctr"/>
+          </a:p>
+        </p:txBody>
+      </p:sp>
+      <p:sp>
+        <p:nvSpPr>
+          <p:cNvPr id="6" name="TextBox 5"/>
+          <p:cNvSpPr txBox="1"/>
+          <p:nvPr/>
+        </p:nvSpPr>
+        <p:spPr>
+          <a:xfrm>
+            <a:off x="987552" y="1508760"/>
+            <a:ext cx="6263640" cy="4160520"/>
+          </a:xfrm>
+          <a:prstGeom prst="rect">
+            <a:avLst/>
+          </a:prstGeom>
+          <a:noFill/>
+        </p:spPr>
+        <p:txBody>
+          <a:bodyPr wrap="square" lIns="0" rIns="0" tIns="0" bIns="0" anchor="t">
+            <a:spAutoFit/>
+          </a:bodyPr>
+          <a:lstStyle/>
+          <a:p>
+            <a:pPr algn="l">
+              <a:spcAft>
+                <a:spcPts val="600"/>
+              </a:spcAft>
+            </a:pPr>
+            <a:r>
+              <a:rPr sz="1500" b="1" i="0">
+                <a:solidFill>
+                  <a:srgbClr val="3F739B"/>
+                </a:solidFill>
+              </a:rPr>
+              <a:t>Example paragraph</a:t>
+            </a:r>
+            <a:endParaRPr sz="1500"/>
+          </a:p>
+          <a:p>
+            <a:pPr algn="l">
+              <a:lnSpc>
+                <a:spcPct val="106000"/>
+              </a:lnSpc>
+            </a:pPr>
+            <a:r>
+              <a:rPr sz="1800" b="0" i="0">
+                <a:solidFill>
+                  <a:srgbClr val="1F2A33"/>
+                </a:solidFill>
+              </a:rPr>
+              <a:t>In the UK sample of the European Social Survey 2023–24, 1,680 of the 1,684 respondents answered the question on whether most people can be trusted, using a scale from 0 (“you can’t be too careful”) to 10 (“most people can be trusted”). The average answer was 5.4 and the median 6, with a standard deviation of 2.3 points. The most common answer was 7, chosen by 20% of respondents, and just under half (48%) answered 5 or below. The mean sits a little below the median because a minority of very low answers pulls it down.</a:t>
+            </a:r>
+            <a:endParaRPr sz="1800"/>
+          </a:p>
+        </p:txBody>
+      </p:sp>
+      <p:sp>
+        <p:nvSpPr>
+          <p:cNvPr id="7" name="Rounded Rectangle 6"/>
+          <p:cNvSpPr/>
+          <p:nvPr/>
+        </p:nvSpPr>
+        <p:spPr>
+          <a:xfrm>
+            <a:off x="7635240" y="1371600"/>
+            <a:ext cx="3730752" cy="4434840"/>
+          </a:xfrm>
+          <a:prstGeom prst="roundRect">
+            <a:avLst>
+              <a:gd name="adj" fmla="val 8000"/>
+            </a:avLst>
+          </a:prstGeom>
+          <a:solidFill>
+            <a:srgbClr val="1F394D"/>
+          </a:solidFill>
+          <a:ln>
+            <a:noFill/>
+          </a:ln>
+        </p:spPr>
+        <p:txBody>
+          <a:bodyPr rtlCol="0" anchor="ctr"/>
+          <a:lstStyle/>
+          <a:p>
+            <a:pPr algn="ctr"/>
+          </a:p>
+        </p:txBody>
+      </p:sp>
+      <p:sp>
+        <p:nvSpPr>
+          <p:cNvPr id="8" name="TextBox 7"/>
+          <p:cNvSpPr txBox="1"/>
+          <p:nvPr/>
+        </p:nvSpPr>
+        <p:spPr>
+          <a:xfrm>
+            <a:off x="7863840" y="1508760"/>
+            <a:ext cx="3337560" cy="365760"/>
+          </a:xfrm>
+          <a:prstGeom prst="rect">
+            <a:avLst/>
+          </a:prstGeom>
+          <a:noFill/>
+        </p:spPr>
+        <p:txBody>
+          <a:bodyPr wrap="square" lIns="0" rIns="0" tIns="0" bIns="0" anchor="t">
+            <a:spAutoFit/>
+          </a:bodyPr>
+          <a:lstStyle/>
+          <a:p>
+            <a:pPr algn="l"/>
+            <a:r>
+              <a:rPr sz="1600" b="1" i="0">
+                <a:solidFill>
+                  <a:srgbClr val="B88C00"/>
+                </a:solidFill>
+              </a:rPr>
+              <a:t>Checklist</a:t>
+            </a:r>
+            <a:endParaRPr sz="1600"/>
+          </a:p>
+        </p:txBody>
+      </p:sp>
+      <p:sp>
+        <p:nvSpPr>
+          <p:cNvPr id="9" name="Oval 8"/>
+          <p:cNvSpPr/>
+          <p:nvPr/>
+        </p:nvSpPr>
+        <p:spPr>
+          <a:xfrm>
+            <a:off x="7882128" y="2057400"/>
+            <a:ext cx="365760" cy="365760"/>
+          </a:xfrm>
+          <a:prstGeom prst="ellipse">
+            <a:avLst/>
+          </a:prstGeom>
+          <a:solidFill>
+            <a:srgbClr val="B88C00"/>
+          </a:solidFill>
+          <a:ln>
+            <a:noFill/>
+          </a:ln>
+        </p:spPr>
+        <p:txBody>
+          <a:bodyPr rtlCol="0" anchor="ctr" wrap="square" lIns="0" rIns="0" tIns="18288" bIns="18288"/>
+          <a:lstStyle/>
+          <a:p>
+            <a:pPr algn="ctr"/>
+            <a:r>
+              <a:rPr sz="1400" b="1" i="0">
+                <a:solidFill>
+                  <a:srgbClr val="FFFFFF"/>
+                </a:solidFill>
+              </a:rPr>
+              <a:t>1</a:t>
+            </a:r>
+            <a:endParaRPr sz="1400"/>
+          </a:p>
+        </p:txBody>
+      </p:sp>
+      <p:sp>
+        <p:nvSpPr>
+          <p:cNvPr id="10" name="TextBox 9"/>
+          <p:cNvSpPr txBox="1"/>
+          <p:nvPr/>
+        </p:nvSpPr>
+        <p:spPr>
+          <a:xfrm>
+            <a:off x="8385048" y="2057400"/>
+            <a:ext cx="2880360" cy="384048"/>
+          </a:xfrm>
+          <a:prstGeom prst="rect">
+            <a:avLst/>
+          </a:prstGeom>
+          <a:noFill/>
+        </p:spPr>
+        <p:txBody>
+          <a:bodyPr wrap="square" lIns="0" rIns="0" tIns="0" bIns="0" anchor="ctr">
+            <a:spAutoFit/>
+          </a:bodyPr>
+          <a:lstStyle/>
+          <a:p>
+            <a:pPr algn="l"/>
+            <a:r>
+              <a:rPr sz="1500" b="0" i="0">
+                <a:solidFill>
+                  <a:srgbClr val="FFFFFF"/>
+                </a:solidFill>
+              </a:rPr>
+              <a:t>What was asked, and on what scale</a:t>
+            </a:r>
+            <a:endParaRPr sz="1500"/>
+          </a:p>
+        </p:txBody>
+      </p:sp>
+      <p:sp>
+        <p:nvSpPr>
+          <p:cNvPr id="11" name="Oval 10"/>
+          <p:cNvSpPr/>
+          <p:nvPr/>
+        </p:nvSpPr>
+        <p:spPr>
+          <a:xfrm>
+            <a:off x="7882128" y="2660904"/>
+            <a:ext cx="365760" cy="365760"/>
+          </a:xfrm>
+          <a:prstGeom prst="ellipse">
+            <a:avLst/>
+          </a:prstGeom>
+          <a:solidFill>
+            <a:srgbClr val="B88C00"/>
+          </a:solidFill>
+          <a:ln>
+            <a:noFill/>
+          </a:ln>
+        </p:spPr>
+        <p:txBody>
+          <a:bodyPr rtlCol="0" anchor="ctr" wrap="square" lIns="0" rIns="0" tIns="18288" bIns="18288"/>
+          <a:lstStyle/>
+          <a:p>
+            <a:pPr algn="ctr"/>
+            <a:r>
+              <a:rPr sz="1400" b="1" i="0">
+                <a:solidFill>
+                  <a:srgbClr val="FFFFFF"/>
+                </a:solidFill>
+              </a:rPr>
+              <a:t>2</a:t>
+            </a:r>
+            <a:endParaRPr sz="1400"/>
+          </a:p>
+        </p:txBody>
+      </p:sp>
+      <p:sp>
+        <p:nvSpPr>
+          <p:cNvPr id="12" name="TextBox 11"/>
+          <p:cNvSpPr txBox="1"/>
+          <p:nvPr/>
+        </p:nvSpPr>
+        <p:spPr>
+          <a:xfrm>
+            <a:off x="8385048" y="2660904"/>
+            <a:ext cx="2880360" cy="384048"/>
+          </a:xfrm>
+          <a:prstGeom prst="rect">
+            <a:avLst/>
+          </a:prstGeom>
+          <a:noFill/>
+        </p:spPr>
+        <p:txBody>
+          <a:bodyPr wrap="square" lIns="0" rIns="0" tIns="0" bIns="0" anchor="ctr">
+            <a:spAutoFit/>
+          </a:bodyPr>
+          <a:lstStyle/>
+          <a:p>
+            <a:pPr algn="l"/>
+            <a:r>
+              <a:rPr sz="1500" b="0" i="0">
+                <a:solidFill>
+                  <a:srgbClr val="FFFFFF"/>
+                </a:solidFill>
+              </a:rPr>
+              <a:t>How many answered, and how many did not</a:t>
+            </a:r>
+            <a:endParaRPr sz="1500"/>
+          </a:p>
+        </p:txBody>
+      </p:sp>
+      <p:sp>
+        <p:nvSpPr>
+          <p:cNvPr id="13" name="Oval 12"/>
+          <p:cNvSpPr/>
+          <p:nvPr/>
+        </p:nvSpPr>
+        <p:spPr>
+          <a:xfrm>
+            <a:off x="7882128" y="3264408"/>
+            <a:ext cx="365760" cy="365760"/>
+          </a:xfrm>
+          <a:prstGeom prst="ellipse">
+            <a:avLst/>
+          </a:prstGeom>
+          <a:solidFill>
+            <a:srgbClr val="B88C00"/>
+          </a:solidFill>
+          <a:ln>
+            <a:noFill/>
+          </a:ln>
+        </p:spPr>
+        <p:txBody>
+          <a:bodyPr rtlCol="0" anchor="ctr" wrap="square" lIns="0" rIns="0" tIns="18288" bIns="18288"/>
+          <a:lstStyle/>
+          <a:p>
+            <a:pPr algn="ctr"/>
+            <a:r>
+              <a:rPr sz="1400" b="1" i="0">
+                <a:solidFill>
+                  <a:srgbClr val="FFFFFF"/>
+                </a:solidFill>
+              </a:rPr>
+              <a:t>3</a:t>
+            </a:r>
+            <a:endParaRPr sz="1400"/>
+          </a:p>
+        </p:txBody>
+      </p:sp>
+      <p:sp>
+        <p:nvSpPr>
+          <p:cNvPr id="14" name="TextBox 13"/>
+          <p:cNvSpPr txBox="1"/>
+          <p:nvPr/>
+        </p:nvSpPr>
+        <p:spPr>
+          <a:xfrm>
+            <a:off x="8385048" y="3264408"/>
+            <a:ext cx="2880360" cy="384048"/>
+          </a:xfrm>
+          <a:prstGeom prst="rect">
+            <a:avLst/>
+          </a:prstGeom>
+          <a:noFill/>
+        </p:spPr>
+        <p:txBody>
+          <a:bodyPr wrap="square" lIns="0" rIns="0" tIns="0" bIns="0" anchor="ctr">
+            <a:spAutoFit/>
+          </a:bodyPr>
+          <a:lstStyle/>
+          <a:p>
+            <a:pPr algn="l"/>
+            <a:r>
+              <a:rPr sz="1500" b="0" i="0">
+                <a:solidFill>
+                  <a:srgbClr val="FFFFFF"/>
+                </a:solidFill>
+              </a:rPr>
+              <a:t>The centre: mean and median</a:t>
+            </a:r>
+            <a:endParaRPr sz="1500"/>
+          </a:p>
+        </p:txBody>
+      </p:sp>
+      <p:sp>
+        <p:nvSpPr>
+          <p:cNvPr id="15" name="Oval 14"/>
+          <p:cNvSpPr/>
+          <p:nvPr/>
+        </p:nvSpPr>
+        <p:spPr>
+          <a:xfrm>
+            <a:off x="7882128" y="3867912"/>
+            <a:ext cx="365760" cy="365760"/>
+          </a:xfrm>
+          <a:prstGeom prst="ellipse">
+            <a:avLst/>
+          </a:prstGeom>
+          <a:solidFill>
+            <a:srgbClr val="B88C00"/>
+          </a:solidFill>
+          <a:ln>
+            <a:noFill/>
+          </a:ln>
+        </p:spPr>
+        <p:txBody>
+          <a:bodyPr rtlCol="0" anchor="ctr" wrap="square" lIns="0" rIns="0" tIns="18288" bIns="18288"/>
+          <a:lstStyle/>
+          <a:p>
+            <a:pPr algn="ctr"/>
+            <a:r>
+              <a:rPr sz="1400" b="1" i="0">
+                <a:solidFill>
+                  <a:srgbClr val="FFFFFF"/>
+                </a:solidFill>
+              </a:rPr>
+              <a:t>4</a:t>
+            </a:r>
+            <a:endParaRPr sz="1400"/>
+          </a:p>
+        </p:txBody>
+      </p:sp>
+      <p:sp>
+        <p:nvSpPr>
+          <p:cNvPr id="16" name="TextBox 15"/>
+          <p:cNvSpPr txBox="1"/>
+          <p:nvPr/>
+        </p:nvSpPr>
+        <p:spPr>
+          <a:xfrm>
+            <a:off x="8385048" y="3867912"/>
+            <a:ext cx="2880360" cy="384048"/>
+          </a:xfrm>
+          <a:prstGeom prst="rect">
+            <a:avLst/>
+          </a:prstGeom>
+          <a:noFill/>
+        </p:spPr>
+        <p:txBody>
+          <a:bodyPr wrap="square" lIns="0" rIns="0" tIns="0" bIns="0" anchor="ctr">
+            <a:spAutoFit/>
+          </a:bodyPr>
+          <a:lstStyle/>
+          <a:p>
+            <a:pPr algn="l"/>
+            <a:r>
+              <a:rPr sz="1500" b="0" i="0">
+                <a:solidFill>
+                  <a:srgbClr val="FFFFFF"/>
+                </a:solidFill>
+              </a:rPr>
+              <a:t>The spread: standard deviation</a:t>
+            </a:r>
+            <a:endParaRPr sz="1500"/>
+          </a:p>
+        </p:txBody>
+      </p:sp>
+      <p:sp>
+        <p:nvSpPr>
+          <p:cNvPr id="17" name="Oval 16"/>
+          <p:cNvSpPr/>
+          <p:nvPr/>
+        </p:nvSpPr>
+        <p:spPr>
+          <a:xfrm>
+            <a:off x="7882128" y="4471416"/>
+            <a:ext cx="365760" cy="365760"/>
+          </a:xfrm>
+          <a:prstGeom prst="ellipse">
+            <a:avLst/>
+          </a:prstGeom>
+          <a:solidFill>
+            <a:srgbClr val="B88C00"/>
+          </a:solidFill>
+          <a:ln>
+            <a:noFill/>
+          </a:ln>
+        </p:spPr>
+        <p:txBody>
+          <a:bodyPr rtlCol="0" anchor="ctr" wrap="square" lIns="0" rIns="0" tIns="18288" bIns="18288"/>
+          <a:lstStyle/>
+          <a:p>
+            <a:pPr algn="ctr"/>
+            <a:r>
+              <a:rPr sz="1400" b="1" i="0">
+                <a:solidFill>
+                  <a:srgbClr val="FFFFFF"/>
+                </a:solidFill>
+              </a:rPr>
+              <a:t>5</a:t>
+            </a:r>
+            <a:endParaRPr sz="1400"/>
+          </a:p>
+        </p:txBody>
+      </p:sp>
+      <p:sp>
+        <p:nvSpPr>
+          <p:cNvPr id="18" name="TextBox 17"/>
+          <p:cNvSpPr txBox="1"/>
+          <p:nvPr/>
+        </p:nvSpPr>
+        <p:spPr>
+          <a:xfrm>
+            <a:off x="8385048" y="4471416"/>
+            <a:ext cx="2880360" cy="384048"/>
+          </a:xfrm>
+          <a:prstGeom prst="rect">
+            <a:avLst/>
+          </a:prstGeom>
+          <a:noFill/>
+        </p:spPr>
+        <p:txBody>
+          <a:bodyPr wrap="square" lIns="0" rIns="0" tIns="0" bIns="0" anchor="ctr">
+            <a:spAutoFit/>
+          </a:bodyPr>
+          <a:lstStyle/>
+          <a:p>
+            <a:pPr algn="l"/>
+            <a:r>
+              <a:rPr sz="1500" b="0" i="0">
+                <a:solidFill>
+                  <a:srgbClr val="FFFFFF"/>
+                </a:solidFill>
+              </a:rPr>
+              <a:t>The shape: symmetric or skewed</a:t>
+            </a:r>
+            <a:endParaRPr sz="1500"/>
+          </a:p>
+        </p:txBody>
+      </p:sp>
+      <p:sp>
+        <p:nvSpPr>
+          <p:cNvPr id="19" name="Oval 18"/>
+          <p:cNvSpPr/>
+          <p:nvPr/>
+        </p:nvSpPr>
+        <p:spPr>
+          <a:xfrm>
+            <a:off x="7882128" y="5074920"/>
+            <a:ext cx="365760" cy="365760"/>
+          </a:xfrm>
+          <a:prstGeom prst="ellipse">
+            <a:avLst/>
+          </a:prstGeom>
+          <a:solidFill>
+            <a:srgbClr val="B88C00"/>
+          </a:solidFill>
+          <a:ln>
+            <a:noFill/>
+          </a:ln>
+        </p:spPr>
+        <p:txBody>
+          <a:bodyPr rtlCol="0" anchor="ctr" wrap="square" lIns="0" rIns="0" tIns="18288" bIns="18288"/>
+          <a:lstStyle/>
+          <a:p>
+            <a:pPr algn="ctr"/>
+            <a:r>
+              <a:rPr sz="1400" b="1" i="0">
+                <a:solidFill>
+                  <a:srgbClr val="FFFFFF"/>
+                </a:solidFill>
+              </a:rPr>
+              <a:t>6</a:t>
+            </a:r>
+            <a:endParaRPr sz="1400"/>
+          </a:p>
+        </p:txBody>
+      </p:sp>
+      <p:sp>
+        <p:nvSpPr>
+          <p:cNvPr id="20" name="TextBox 19"/>
+          <p:cNvSpPr txBox="1"/>
+          <p:nvPr/>
+        </p:nvSpPr>
+        <p:spPr>
+          <a:xfrm>
+            <a:off x="8385048" y="5074920"/>
+            <a:ext cx="2880360" cy="384048"/>
+          </a:xfrm>
+          <a:prstGeom prst="rect">
+            <a:avLst/>
+          </a:prstGeom>
+          <a:noFill/>
+        </p:spPr>
+        <p:txBody>
+          <a:bodyPr wrap="square" lIns="0" rIns="0" tIns="0" bIns="0" anchor="ctr">
+            <a:spAutoFit/>
+          </a:bodyPr>
+          <a:lstStyle/>
+          <a:p>
+            <a:pPr algn="l"/>
+            <a:r>
+              <a:rPr sz="1500" b="0" i="0">
+                <a:solidFill>
+                  <a:srgbClr val="FFFFFF"/>
+                </a:solidFill>
+              </a:rPr>
+              <a:t>A chart of the whole distribution</a:t>
+            </a:r>
+            <a:endParaRPr sz="1500"/>
+          </a:p>
+        </p:txBody>
+      </p:sp>
+      <p:sp>
+        <p:nvSpPr>
+          <p:cNvPr id="21" name="TextBox 20"/>
+          <p:cNvSpPr txBox="1"/>
+          <p:nvPr/>
+        </p:nvSpPr>
+        <p:spPr>
+          <a:xfrm>
+            <a:off x="758952" y="5943600"/>
+            <a:ext cx="10607040" cy="292608"/>
+          </a:xfrm>
+          <a:prstGeom prst="rect">
+            <a:avLst/>
+          </a:prstGeom>
+          <a:noFill/>
+        </p:spPr>
+        <p:txBody>
+          <a:bodyPr wrap="square" lIns="0" rIns="0" tIns="0" bIns="0" anchor="ctr">
+            <a:spAutoFit/>
+          </a:bodyPr>
+          <a:lstStyle/>
+          <a:p>
+            <a:pPr algn="l"/>
+            <a:r>
+              <a:rPr sz="1200" b="0" i="0">
+                <a:solidFill>
+                  <a:srgbClr val="55606B"/>
+                </a:solidFill>
+              </a:rPr>
+              <a:t>Data: European Social Survey Round 11 (2023–24), UK sample (gb-ess11-trust.sav).</a:t>
+            </a:r>
+            <a:endParaRPr sz="1200"/>
+          </a:p>
+        </p:txBody>
+      </p:sp>
+    </p:spTree>
+  </p:cSld>
+  <p:clrMapOvr>
+    <a:masterClrMapping/>
+  </p:clrMapOvr>
+</p:sld>
+</file>
+
+<file path=ppt/slides/slide46.xml><?xml version="1.0" encoding="utf-8"?>
+<p:sld xmlns:a="http://schemas.openxmlformats.org/drawingml/2006/main" xmlns:p="http://schemas.openxmlformats.org/presentationml/2006/main" xmlns:r="http://schemas.openxmlformats.org/officeDocument/2006/relationships">
+  <p:cSld>
+    <p:spTree>
+      <p:nvGrpSpPr>
+        <p:cNvPr id="1" name=""/>
+        <p:cNvGrpSpPr/>
+        <p:nvPr/>
+      </p:nvGrpSpPr>
+      <p:grpSpPr/>
+      <p:sp>
+        <p:nvSpPr>
+          <p:cNvPr id="2" name="Title 1"/>
+          <p:cNvSpPr>
+            <a:spLocks noGrp="1"/>
+          </p:cNvSpPr>
+          <p:nvPr>
+            <p:ph type="title"/>
+          </p:nvPr>
+        </p:nvSpPr>
+        <p:spPr/>
+        <p:txBody>
+          <a:bodyPr/>
+          <a:lstStyle/>
+          <a:p>
+            <a:r>
+              <a:t>Interactive explorer</a:t>
+            </a:r>
+          </a:p>
+        </p:txBody>
+      </p:sp>
+      <p:sp>
+        <p:nvSpPr>
+          <p:cNvPr id="3" name="Footer Placeholder 2">
+            <a:extLst>
+              <a:ext uri="{FF2B5EF4-FFF2-40B4-BE49-F238E27FC236}">
+                <a16:creationId xmlns:a16="http://schemas.microsoft.com/office/drawing/2014/main" id="{D0C8C946-5335-2921-801F-E32EBBDC06AC}"/>
+              </a:ext>
+            </a:extLst>
+          </p:cNvPr>
+          <p:cNvSpPr>
+            <a:spLocks noGrp="1"/>
+          </p:cNvSpPr>
+          <p:nvPr>
+            <p:ph type="ftr" sz="quarter" idx="11"/>
+          </p:nvPr>
+        </p:nvSpPr>
+        <p:spPr/>
+        <p:txBody>
+          <a:bodyPr/>
+          <a:lstStyle/>
+          <a:p>
+            <a:r>
+              <a:rPr lang="en-GB"/>
+              <a:t>Measurement and Description</a:t>
+            </a:r>
+          </a:p>
+        </p:txBody>
+      </p:sp>
+      <p:sp>
+        <p:nvSpPr>
+          <p:cNvPr id="4" name="Slide Number Placeholder 3">
+            <a:extLst>
+              <a:ext uri="{FF2B5EF4-FFF2-40B4-BE49-F238E27FC236}">
+                <a16:creationId xmlns:a16="http://schemas.microsoft.com/office/drawing/2014/main" id="{975A5B92-8D16-E54E-863B-32FBAC4EF875}"/>
+              </a:ext>
+            </a:extLst>
+          </p:cNvPr>
+          <p:cNvSpPr>
+            <a:spLocks noGrp="1"/>
+          </p:cNvSpPr>
+          <p:nvPr>
+            <p:ph type="sldNum" sz="quarter" idx="12"/>
+          </p:nvPr>
+        </p:nvSpPr>
+        <p:spPr/>
+        <p:txBody>
+          <a:bodyPr/>
+          <a:lstStyle/>
+          <a:p>
+            <a:fld id="{9FAA51BB-2FC0-4DB8-B50E-F52D50E733B6}" type="slidenum">
+              <a:rPr lang="en-GB" smtClean="0"/>
+              <a:t>20</a:t>
+            </a:fld>
+            <a:endParaRPr lang="en-GB"/>
+          </a:p>
+        </p:txBody>
+      </p:sp>
+      <p:pic>
+        <p:nvPicPr>
+          <p:cNvPr id="5" name="Picture 4" descr="qr_w1.png"/>
           <p:cNvPicPr>
             <a:picLocks noChangeAspect="1"/>
           </p:cNvPicPr>
@@ -31613,270 +37305,508 @@
         </p:blipFill>
         <p:spPr>
           <a:xfrm>
-            <a:off x="921422" y="1628960"/>
-            <a:ext cx="2446775" cy="2309999"/>
+            <a:off x="1051560" y="1463040"/>
+            <a:ext cx="2834640" cy="2834640"/>
           </a:xfrm>
           <a:prstGeom prst="rect">
             <a:avLst/>
           </a:prstGeom>
         </p:spPr>
       </p:pic>
-      <p:pic>
-        <p:nvPicPr>
-          <p:cNvPr id="9" name="Picture 8">
-            <a:extLst>
-              <a:ext uri="{FF2B5EF4-FFF2-40B4-BE49-F238E27FC236}">
-                <a16:creationId xmlns:a16="http://schemas.microsoft.com/office/drawing/2014/main" id="{FBBC354D-46B3-C54E-EE00-677BB1EDCF3E}"/>
-              </a:ext>
-            </a:extLst>
-          </p:cNvPr>
-          <p:cNvPicPr>
-            <a:picLocks noChangeAspect="1"/>
-          </p:cNvPicPr>
+      <p:sp>
+        <p:nvSpPr>
+          <p:cNvPr id="6" name="TextBox 5"/>
+          <p:cNvSpPr txBox="1"/>
           <p:nvPr/>
-        </p:nvPicPr>
-        <p:blipFill>
-          <a:blip r:embed="rId3"/>
-          <a:stretch>
-            <a:fillRect/>
-          </a:stretch>
-        </p:blipFill>
+        </p:nvSpPr>
         <p:spPr>
           <a:xfrm>
-            <a:off x="3686185" y="1628960"/>
-            <a:ext cx="7463629" cy="3857440"/>
+            <a:off x="758952" y="4434840"/>
+            <a:ext cx="3429000" cy="1097280"/>
           </a:xfrm>
           <a:prstGeom prst="rect">
             <a:avLst/>
           </a:prstGeom>
+          <a:noFill/>
         </p:spPr>
-      </p:pic>
+        <p:txBody>
+          <a:bodyPr wrap="square" lIns="0" rIns="0" tIns="0" bIns="0" anchor="t">
+            <a:spAutoFit/>
+          </a:bodyPr>
+          <a:lstStyle/>
+          <a:p>
+            <a:pPr algn="ctr">
+              <a:spcAft>
+                <a:spcPts val="400"/>
+              </a:spcAft>
+            </a:pPr>
+            <a:r>
+              <a:rPr sz="1400" b="1" i="0">
+                <a:solidFill>
+                  <a:srgbClr val="1F394D"/>
+                </a:solidFill>
+              </a:rPr>
+              <a:t>Course site › [W1] Interactive Explorer</a:t>
+            </a:r>
+            <a:endParaRPr sz="1400"/>
+          </a:p>
+          <a:p>
+            <a:pPr algn="ctr"/>
+            <a:r>
+              <a:rPr sz="1200" b="0" i="0">
+                <a:solidFill>
+                  <a:srgbClr val="55606B"/>
+                </a:solidFill>
+              </a:rPr>
+              <a:t>cgmoreh.github.io/SOC2069-QUANT-26</a:t>
+            </a:r>
+            <a:endParaRPr sz="1200"/>
+          </a:p>
+        </p:txBody>
+      </p:sp>
+      <p:sp>
+        <p:nvSpPr>
+          <p:cNvPr id="7" name="Rounded Rectangle 6"/>
+          <p:cNvSpPr/>
+          <p:nvPr/>
+        </p:nvSpPr>
+        <p:spPr>
+          <a:xfrm>
+            <a:off x="4526280" y="1417320"/>
+            <a:ext cx="6839712" cy="1097280"/>
+          </a:xfrm>
+          <a:prstGeom prst="roundRect">
+            <a:avLst>
+              <a:gd name="adj" fmla="val 8000"/>
+            </a:avLst>
+          </a:prstGeom>
+          <a:solidFill>
+            <a:srgbClr val="EEF3F7"/>
+          </a:solidFill>
+          <a:ln>
+            <a:noFill/>
+          </a:ln>
+        </p:spPr>
+        <p:txBody>
+          <a:bodyPr rtlCol="0" anchor="ctr"/>
+          <a:lstStyle/>
+          <a:p>
+            <a:pPr algn="ctr"/>
+          </a:p>
+        </p:txBody>
+      </p:sp>
+      <p:sp>
+        <p:nvSpPr>
+          <p:cNvPr id="8" name="Oval 7"/>
+          <p:cNvSpPr/>
+          <p:nvPr/>
+        </p:nvSpPr>
+        <p:spPr>
+          <a:xfrm>
+            <a:off x="4732020" y="1714500"/>
+            <a:ext cx="502920" cy="502920"/>
+          </a:xfrm>
+          <a:prstGeom prst="ellipse">
+            <a:avLst/>
+          </a:prstGeom>
+          <a:solidFill>
+            <a:srgbClr val="1F394D"/>
+          </a:solidFill>
+          <a:ln>
+            <a:noFill/>
+          </a:ln>
+        </p:spPr>
+        <p:txBody>
+          <a:bodyPr rtlCol="0" anchor="ctr" wrap="square" lIns="0" rIns="0" tIns="18288" bIns="18288"/>
+          <a:lstStyle/>
+          <a:p>
+            <a:pPr algn="ctr"/>
+            <a:r>
+              <a:rPr sz="1800" b="1" i="0">
+                <a:solidFill>
+                  <a:srgbClr val="FFFFFF"/>
+                </a:solidFill>
+              </a:rPr>
+              <a:t>1</a:t>
+            </a:r>
+            <a:endParaRPr sz="1800"/>
+          </a:p>
+        </p:txBody>
+      </p:sp>
+      <p:sp>
+        <p:nvSpPr>
+          <p:cNvPr id="9" name="TextBox 8"/>
+          <p:cNvSpPr txBox="1"/>
+          <p:nvPr/>
+        </p:nvSpPr>
+        <p:spPr>
+          <a:xfrm>
+            <a:off x="5440680" y="1527048"/>
+            <a:ext cx="5760720" cy="877824"/>
+          </a:xfrm>
+          <a:prstGeom prst="rect">
+            <a:avLst/>
+          </a:prstGeom>
+          <a:noFill/>
+        </p:spPr>
+        <p:txBody>
+          <a:bodyPr wrap="square" lIns="0" rIns="0" tIns="0" bIns="0" anchor="ctr">
+            <a:spAutoFit/>
+          </a:bodyPr>
+          <a:lstStyle/>
+          <a:p>
+            <a:pPr algn="l">
+              <a:spcAft>
+                <a:spcPts val="200"/>
+              </a:spcAft>
+            </a:pPr>
+            <a:r>
+              <a:rPr sz="1800" b="1" i="0">
+                <a:solidFill>
+                  <a:srgbClr val="1F394D"/>
+                </a:solidFill>
+              </a:rPr>
+              <a:t>One very rich household</a:t>
+            </a:r>
+            <a:endParaRPr sz="1800"/>
+          </a:p>
+          <a:p>
+            <a:pPr algn="l"/>
+            <a:r>
+              <a:rPr sz="1500" b="0" i="0">
+                <a:solidFill>
+                  <a:srgbClr val="1F2A33"/>
+                </a:solidFill>
+              </a:rPr>
+              <a:t>Move the highest of nine incomes and watch the mean chase it while the median stays put.</a:t>
+            </a:r>
+            <a:endParaRPr sz="1500"/>
+          </a:p>
+        </p:txBody>
+      </p:sp>
+      <p:sp>
+        <p:nvSpPr>
+          <p:cNvPr id="10" name="Rounded Rectangle 9"/>
+          <p:cNvSpPr/>
+          <p:nvPr/>
+        </p:nvSpPr>
+        <p:spPr>
+          <a:xfrm>
+            <a:off x="4526280" y="2651760"/>
+            <a:ext cx="6839712" cy="1097280"/>
+          </a:xfrm>
+          <a:prstGeom prst="roundRect">
+            <a:avLst>
+              <a:gd name="adj" fmla="val 8000"/>
+            </a:avLst>
+          </a:prstGeom>
+          <a:solidFill>
+            <a:srgbClr val="EEF3F7"/>
+          </a:solidFill>
+          <a:ln>
+            <a:noFill/>
+          </a:ln>
+        </p:spPr>
+        <p:txBody>
+          <a:bodyPr rtlCol="0" anchor="ctr"/>
+          <a:lstStyle/>
+          <a:p>
+            <a:pPr algn="ctr"/>
+          </a:p>
+        </p:txBody>
+      </p:sp>
+      <p:sp>
+        <p:nvSpPr>
+          <p:cNvPr id="11" name="Oval 10"/>
+          <p:cNvSpPr/>
+          <p:nvPr/>
+        </p:nvSpPr>
+        <p:spPr>
+          <a:xfrm>
+            <a:off x="4732020" y="2948940"/>
+            <a:ext cx="502920" cy="502920"/>
+          </a:xfrm>
+          <a:prstGeom prst="ellipse">
+            <a:avLst/>
+          </a:prstGeom>
+          <a:solidFill>
+            <a:srgbClr val="1F394D"/>
+          </a:solidFill>
+          <a:ln>
+            <a:noFill/>
+          </a:ln>
+        </p:spPr>
+        <p:txBody>
+          <a:bodyPr rtlCol="0" anchor="ctr" wrap="square" lIns="0" rIns="0" tIns="18288" bIns="18288"/>
+          <a:lstStyle/>
+          <a:p>
+            <a:pPr algn="ctr"/>
+            <a:r>
+              <a:rPr sz="1800" b="1" i="0">
+                <a:solidFill>
+                  <a:srgbClr val="FFFFFF"/>
+                </a:solidFill>
+              </a:rPr>
+              <a:t>2</a:t>
+            </a:r>
+            <a:endParaRPr sz="1800"/>
+          </a:p>
+        </p:txBody>
+      </p:sp>
+      <p:sp>
+        <p:nvSpPr>
+          <p:cNvPr id="12" name="TextBox 11"/>
+          <p:cNvSpPr txBox="1"/>
+          <p:nvPr/>
+        </p:nvSpPr>
+        <p:spPr>
+          <a:xfrm>
+            <a:off x="5440680" y="2761488"/>
+            <a:ext cx="5760720" cy="877824"/>
+          </a:xfrm>
+          <a:prstGeom prst="rect">
+            <a:avLst/>
+          </a:prstGeom>
+          <a:noFill/>
+        </p:spPr>
+        <p:txBody>
+          <a:bodyPr wrap="square" lIns="0" rIns="0" tIns="0" bIns="0" anchor="ctr">
+            <a:spAutoFit/>
+          </a:bodyPr>
+          <a:lstStyle/>
+          <a:p>
+            <a:pPr algn="l">
+              <a:spcAft>
+                <a:spcPts val="200"/>
+              </a:spcAft>
+            </a:pPr>
+            <a:r>
+              <a:rPr sz="1800" b="1" i="0">
+                <a:solidFill>
+                  <a:srgbClr val="1F394D"/>
+                </a:solidFill>
+              </a:rPr>
+              <a:t>The standard deviation by hand</a:t>
+            </a:r>
+            <a:endParaRPr sz="1800"/>
+          </a:p>
+          <a:p>
+            <a:pPr algn="l"/>
+            <a:r>
+              <a:rPr sz="1500" b="0" i="0">
+                <a:solidFill>
+                  <a:srgbClr val="1F2A33"/>
+                </a:solidFill>
+              </a:rPr>
+              <a:t>Change five trust scores and follow each step from deviations to the standard deviation.</a:t>
+            </a:r>
+            <a:endParaRPr sz="1500"/>
+          </a:p>
+        </p:txBody>
+      </p:sp>
+      <p:sp>
+        <p:nvSpPr>
+          <p:cNvPr id="13" name="Rounded Rectangle 12"/>
+          <p:cNvSpPr/>
+          <p:nvPr/>
+        </p:nvSpPr>
+        <p:spPr>
+          <a:xfrm>
+            <a:off x="4526280" y="3886200"/>
+            <a:ext cx="6839712" cy="1097280"/>
+          </a:xfrm>
+          <a:prstGeom prst="roundRect">
+            <a:avLst>
+              <a:gd name="adj" fmla="val 8000"/>
+            </a:avLst>
+          </a:prstGeom>
+          <a:solidFill>
+            <a:srgbClr val="EEF3F7"/>
+          </a:solidFill>
+          <a:ln>
+            <a:noFill/>
+          </a:ln>
+        </p:spPr>
+        <p:txBody>
+          <a:bodyPr rtlCol="0" anchor="ctr"/>
+          <a:lstStyle/>
+          <a:p>
+            <a:pPr algn="ctr"/>
+          </a:p>
+        </p:txBody>
+      </p:sp>
+      <p:sp>
+        <p:nvSpPr>
+          <p:cNvPr id="14" name="Oval 13"/>
+          <p:cNvSpPr/>
+          <p:nvPr/>
+        </p:nvSpPr>
+        <p:spPr>
+          <a:xfrm>
+            <a:off x="4732020" y="4183379"/>
+            <a:ext cx="502920" cy="502920"/>
+          </a:xfrm>
+          <a:prstGeom prst="ellipse">
+            <a:avLst/>
+          </a:prstGeom>
+          <a:solidFill>
+            <a:srgbClr val="1F394D"/>
+          </a:solidFill>
+          <a:ln>
+            <a:noFill/>
+          </a:ln>
+        </p:spPr>
+        <p:txBody>
+          <a:bodyPr rtlCol="0" anchor="ctr" wrap="square" lIns="0" rIns="0" tIns="18288" bIns="18288"/>
+          <a:lstStyle/>
+          <a:p>
+            <a:pPr algn="ctr"/>
+            <a:r>
+              <a:rPr sz="1800" b="1" i="0">
+                <a:solidFill>
+                  <a:srgbClr val="FFFFFF"/>
+                </a:solidFill>
+              </a:rPr>
+              <a:t>3</a:t>
+            </a:r>
+            <a:endParaRPr sz="1800"/>
+          </a:p>
+        </p:txBody>
+      </p:sp>
+      <p:sp>
+        <p:nvSpPr>
+          <p:cNvPr id="15" name="TextBox 14"/>
+          <p:cNvSpPr txBox="1"/>
+          <p:nvPr/>
+        </p:nvSpPr>
+        <p:spPr>
+          <a:xfrm>
+            <a:off x="5440680" y="3995928"/>
+            <a:ext cx="5760720" cy="877824"/>
+          </a:xfrm>
+          <a:prstGeom prst="rect">
+            <a:avLst/>
+          </a:prstGeom>
+          <a:noFill/>
+        </p:spPr>
+        <p:txBody>
+          <a:bodyPr wrap="square" lIns="0" rIns="0" tIns="0" bIns="0" anchor="ctr">
+            <a:spAutoFit/>
+          </a:bodyPr>
+          <a:lstStyle/>
+          <a:p>
+            <a:pPr algn="l">
+              <a:spcAft>
+                <a:spcPts val="200"/>
+              </a:spcAft>
+            </a:pPr>
+            <a:r>
+              <a:rPr sz="1800" b="1" i="0">
+                <a:solidFill>
+                  <a:srgbClr val="1F394D"/>
+                </a:solidFill>
+              </a:rPr>
+              <a:t>Same average, different spread</a:t>
+            </a:r>
+            <a:endParaRPr sz="1800"/>
+          </a:p>
+          <a:p>
+            <a:pPr algn="l"/>
+            <a:r>
+              <a:rPr sz="1500" b="0" i="0">
+                <a:solidFill>
+                  <a:srgbClr val="1F2A33"/>
+                </a:solidFill>
+              </a:rPr>
+              <a:t>Widen or narrow two income distributions that share the same mean.</a:t>
+            </a:r>
+            <a:endParaRPr sz="1500"/>
+          </a:p>
+        </p:txBody>
+      </p:sp>
+      <p:sp>
+        <p:nvSpPr>
+          <p:cNvPr id="16" name="Rounded Rectangle 15"/>
+          <p:cNvSpPr/>
+          <p:nvPr/>
+        </p:nvSpPr>
+        <p:spPr>
+          <a:xfrm>
+            <a:off x="4526280" y="5120640"/>
+            <a:ext cx="6839712" cy="731520"/>
+          </a:xfrm>
+          <a:prstGeom prst="roundRect">
+            <a:avLst>
+              <a:gd name="adj" fmla="val 8000"/>
+            </a:avLst>
+          </a:prstGeom>
+          <a:solidFill>
+            <a:srgbClr val="1F394D"/>
+          </a:solidFill>
+          <a:ln>
+            <a:noFill/>
+          </a:ln>
+        </p:spPr>
+        <p:txBody>
+          <a:bodyPr rtlCol="0" anchor="ctr"/>
+          <a:lstStyle/>
+          <a:p>
+            <a:pPr algn="ctr"/>
+          </a:p>
+        </p:txBody>
+      </p:sp>
+      <p:sp>
+        <p:nvSpPr>
+          <p:cNvPr id="17" name="TextBox 16"/>
+          <p:cNvSpPr txBox="1"/>
+          <p:nvPr/>
+        </p:nvSpPr>
+        <p:spPr>
+          <a:xfrm>
+            <a:off x="4754880" y="5120640"/>
+            <a:ext cx="6400800" cy="731520"/>
+          </a:xfrm>
+          <a:prstGeom prst="rect">
+            <a:avLst/>
+          </a:prstGeom>
+          <a:noFill/>
+        </p:spPr>
+        <p:txBody>
+          <a:bodyPr wrap="square" lIns="0" rIns="0" tIns="0" bIns="0" anchor="ctr">
+            <a:spAutoFit/>
+          </a:bodyPr>
+          <a:lstStyle/>
+          <a:p>
+            <a:pPr algn="l"/>
+            <a:r>
+              <a:rPr sz="1500" b="1" i="0">
+                <a:solidFill>
+                  <a:srgbClr val="B88C00"/>
+                </a:solidFill>
+              </a:rPr>
+              <a:t>Also on the page: </a:t>
+            </a:r>
+            <a:r>
+              <a:rPr sz="1500" b="0" i="0">
+                <a:solidFill>
+                  <a:srgbClr val="FFFFFF"/>
+                </a:solidFill>
+              </a:rPr>
+              <a:t>the distribution of trust in the ESS 2023–24, with its mean, median and mode</a:t>
+            </a:r>
+            <a:endParaRPr sz="1500"/>
+          </a:p>
+        </p:txBody>
+      </p:sp>
     </p:spTree>
-    <p:extLst>
-      <p:ext uri="{BB962C8B-B14F-4D97-AF65-F5344CB8AC3E}">
-        <p14:creationId xmlns:p14="http://schemas.microsoft.com/office/powerpoint/2010/main" val="3610846768"/>
-      </p:ext>
-    </p:extLst>
   </p:cSld>
   <p:clrMapOvr>
     <a:masterClrMapping/>
   </p:clrMapOvr>
-  <mc:AlternateContent xmlns:mc="http://schemas.openxmlformats.org/markup-compatibility/2006" xmlns:p159="http://schemas.microsoft.com/office/powerpoint/2015/09/main">
-    <mc:Choice Requires="p159">
-      <p:transition spd="slow">
-        <p159:morph option="byObject"/>
-      </p:transition>
-    </mc:Choice>
-    <mc:Fallback xmlns="">
-      <p:transition spd="slow">
-        <p:fade/>
-      </p:transition>
-    </mc:Fallback>
-  </mc:AlternateContent>
 </p:sld>
 </file>
 
-<file path=ppt/slides/slide44.xml><?xml version="1.0" encoding="utf-8"?>
-<p:sld xmlns:a="http://schemas.openxmlformats.org/drawingml/2006/main" xmlns:r="http://schemas.openxmlformats.org/officeDocument/2006/relationships" xmlns:p="http://schemas.openxmlformats.org/presentationml/2006/main">
-  <p:cSld>
-    <p:spTree>
-      <p:nvGrpSpPr>
-        <p:cNvPr id="1" name="">
-          <a:extLst>
-            <a:ext uri="{FF2B5EF4-FFF2-40B4-BE49-F238E27FC236}">
-              <a16:creationId xmlns:a16="http://schemas.microsoft.com/office/drawing/2014/main" id="{06CD65B6-3332-D0C1-C713-CE42EB7D3F14}"/>
-            </a:ext>
-          </a:extLst>
-        </p:cNvPr>
-        <p:cNvGrpSpPr/>
-        <p:nvPr/>
-      </p:nvGrpSpPr>
-      <p:grpSpPr>
-        <a:xfrm>
-          <a:off x="0" y="0"/>
-          <a:ext cx="0" cy="0"/>
-          <a:chOff x="0" y="0"/>
-          <a:chExt cx="0" cy="0"/>
-        </a:xfrm>
-      </p:grpSpPr>
-      <p:sp>
-        <p:nvSpPr>
-          <p:cNvPr id="2" name="Title 1">
-            <a:extLst>
-              <a:ext uri="{FF2B5EF4-FFF2-40B4-BE49-F238E27FC236}">
-                <a16:creationId xmlns:a16="http://schemas.microsoft.com/office/drawing/2014/main" id="{9BDDD02E-BFDD-5055-53E1-A23C2D92EC76}"/>
-              </a:ext>
-            </a:extLst>
-          </p:cNvPr>
-          <p:cNvSpPr>
-            <a:spLocks noGrp="1"/>
-          </p:cNvSpPr>
-          <p:nvPr>
-            <p:ph type="title"/>
-          </p:nvPr>
-        </p:nvSpPr>
-        <p:spPr/>
-        <p:txBody>
-          <a:bodyPr/>
-          <a:lstStyle/>
-          <a:p>
-            <a:r>
-              <a:rPr lang="en-GB" dirty="0"/>
-              <a:t>Workshop exercise</a:t>
-            </a:r>
-          </a:p>
-        </p:txBody>
-      </p:sp>
-      <p:sp>
-        <p:nvSpPr>
-          <p:cNvPr id="4" name="Footer Placeholder 3">
-            <a:extLst>
-              <a:ext uri="{FF2B5EF4-FFF2-40B4-BE49-F238E27FC236}">
-                <a16:creationId xmlns:a16="http://schemas.microsoft.com/office/drawing/2014/main" id="{36637C30-B663-C548-F1A9-FB0627699C03}"/>
-              </a:ext>
-            </a:extLst>
-          </p:cNvPr>
-          <p:cNvSpPr>
-            <a:spLocks noGrp="1"/>
-          </p:cNvSpPr>
-          <p:nvPr>
-            <p:ph type="ftr" sz="quarter" idx="11"/>
-          </p:nvPr>
-        </p:nvSpPr>
-        <p:spPr/>
-        <p:txBody>
-          <a:bodyPr/>
-          <a:lstStyle/>
-          <a:p>
-            <a:r>
-              <a:rPr lang="en-GB"/>
-              <a:t>Measurement and Description</a:t>
-            </a:r>
-            <a:endParaRPr lang="en-GB" dirty="0"/>
-          </a:p>
-        </p:txBody>
-      </p:sp>
-      <p:sp>
-        <p:nvSpPr>
-          <p:cNvPr id="5" name="Slide Number Placeholder 4">
-            <a:extLst>
-              <a:ext uri="{FF2B5EF4-FFF2-40B4-BE49-F238E27FC236}">
-                <a16:creationId xmlns:a16="http://schemas.microsoft.com/office/drawing/2014/main" id="{0132C580-909E-3FF2-B073-FCD0B1879CE5}"/>
-              </a:ext>
-            </a:extLst>
-          </p:cNvPr>
-          <p:cNvSpPr>
-            <a:spLocks noGrp="1"/>
-          </p:cNvSpPr>
-          <p:nvPr>
-            <p:ph type="sldNum" sz="quarter" idx="12"/>
-          </p:nvPr>
-        </p:nvSpPr>
-        <p:spPr/>
-        <p:txBody>
-          <a:bodyPr/>
-          <a:lstStyle/>
-          <a:p>
-            <a:fld id="{9FAA51BB-2FC0-4DB8-B50E-F52D50E733B6}" type="slidenum">
-              <a:rPr lang="en-GB" smtClean="0"/>
-              <a:pPr/>
-              <a:t>44</a:t>
-            </a:fld>
-            <a:endParaRPr lang="en-GB" dirty="0"/>
-          </a:p>
-        </p:txBody>
-      </p:sp>
-      <p:pic>
-        <p:nvPicPr>
-          <p:cNvPr id="7" name="Picture 6">
-            <a:extLst>
-              <a:ext uri="{FF2B5EF4-FFF2-40B4-BE49-F238E27FC236}">
-                <a16:creationId xmlns:a16="http://schemas.microsoft.com/office/drawing/2014/main" id="{6A5D34AB-0BA1-B1DA-3669-013C48375C4B}"/>
-              </a:ext>
-            </a:extLst>
-          </p:cNvPr>
-          <p:cNvPicPr>
-            <a:picLocks noChangeAspect="1"/>
-          </p:cNvPicPr>
-          <p:nvPr/>
-        </p:nvPicPr>
-        <p:blipFill>
-          <a:blip r:embed="rId2">
-            <a:extLst>
-              <a:ext uri="{28A0092B-C50C-407E-A947-70E740481C1C}">
-                <a14:useLocalDpi xmlns:a14="http://schemas.microsoft.com/office/drawing/2010/main" val="0"/>
-              </a:ext>
-            </a:extLst>
-          </a:blip>
-          <a:srcRect/>
-          <a:stretch/>
-        </p:blipFill>
-        <p:spPr>
-          <a:xfrm>
-            <a:off x="1003642" y="1628960"/>
-            <a:ext cx="2282335" cy="2309999"/>
-          </a:xfrm>
-          <a:prstGeom prst="rect">
-            <a:avLst/>
-          </a:prstGeom>
-        </p:spPr>
-      </p:pic>
-      <p:pic>
-        <p:nvPicPr>
-          <p:cNvPr id="6" name="Picture 5">
-            <a:extLst>
-              <a:ext uri="{FF2B5EF4-FFF2-40B4-BE49-F238E27FC236}">
-                <a16:creationId xmlns:a16="http://schemas.microsoft.com/office/drawing/2014/main" id="{EE2AEC71-BB08-4B44-7D0C-B91BA7A87306}"/>
-              </a:ext>
-            </a:extLst>
-          </p:cNvPr>
-          <p:cNvPicPr>
-            <a:picLocks noChangeAspect="1"/>
-          </p:cNvPicPr>
-          <p:nvPr/>
-        </p:nvPicPr>
-        <p:blipFill>
-          <a:blip r:embed="rId3"/>
-          <a:stretch>
-            <a:fillRect/>
-          </a:stretch>
-        </p:blipFill>
-        <p:spPr>
-          <a:xfrm>
-            <a:off x="4074711" y="1628959"/>
-            <a:ext cx="6396643" cy="4220315"/>
-          </a:xfrm>
-          <a:prstGeom prst="rect">
-            <a:avLst/>
-          </a:prstGeom>
-        </p:spPr>
-      </p:pic>
-    </p:spTree>
-    <p:extLst>
-      <p:ext uri="{BB962C8B-B14F-4D97-AF65-F5344CB8AC3E}">
-        <p14:creationId xmlns:p14="http://schemas.microsoft.com/office/powerpoint/2010/main" val="3938945432"/>
-      </p:ext>
-    </p:extLst>
-  </p:cSld>
-  <p:clrMapOvr>
-    <a:masterClrMapping/>
-  </p:clrMapOvr>
-  <mc:AlternateContent xmlns:mc="http://schemas.openxmlformats.org/markup-compatibility/2006">
-    <mc:Choice xmlns:p159="http://schemas.microsoft.com/office/powerpoint/2015/09/main" Requires="p159">
-      <p:transition spd="slow">
-        <p159:morph option="byObject"/>
-      </p:transition>
-    </mc:Choice>
-    <mc:Fallback>
-      <p:transition spd="slow">
-        <p:fade/>
-      </p:transition>
-    </mc:Fallback>
-  </mc:AlternateContent>
-</p:sld>
-</file>
-
-<file path=ppt/slides/slide45.xml><?xml version="1.0" encoding="utf-8"?>
+<file path=ppt/slides/slide47.xml><?xml version="1.0" encoding="utf-8"?>
 <p:sld xmlns:a="http://schemas.openxmlformats.org/drawingml/2006/main" xmlns:r="http://schemas.openxmlformats.org/officeDocument/2006/relationships" xmlns:p="http://schemas.openxmlformats.org/presentationml/2006/main">
   <p:cSld>
     <p:spTree>
@@ -32038,7 +37968,7 @@
 </p:sld>
 </file>
 
-<file path=ppt/slides/slide46.xml><?xml version="1.0" encoding="utf-8"?>
+<file path=ppt/slides/slide48.xml><?xml version="1.0" encoding="utf-8"?>
 <p:sld xmlns:a="http://schemas.openxmlformats.org/drawingml/2006/main" xmlns:r="http://schemas.openxmlformats.org/officeDocument/2006/relationships" xmlns:p="http://schemas.openxmlformats.org/presentationml/2006/main">
   <p:cSld>
     <p:spTree>
